--- a/docs/slide.pptx
+++ b/docs/slide.pptx
@@ -5,7 +5,7 @@
     <p:sldMasterId id="2147483648" r:id="rId1"/>
   </p:sldMasterIdLst>
   <p:notesMasterIdLst>
-    <p:notesMasterId r:id="rId27"/>
+    <p:notesMasterId r:id="rId28"/>
   </p:notesMasterIdLst>
   <p:sldIdLst>
     <p:sldId id="256" r:id="rId2"/>
@@ -24,26 +24,27 @@
     <p:sldId id="268" r:id="rId15"/>
     <p:sldId id="269" r:id="rId16"/>
     <p:sldId id="270" r:id="rId17"/>
-    <p:sldId id="271" r:id="rId18"/>
-    <p:sldId id="272" r:id="rId19"/>
-    <p:sldId id="273" r:id="rId20"/>
-    <p:sldId id="274" r:id="rId21"/>
-    <p:sldId id="275" r:id="rId22"/>
-    <p:sldId id="276" r:id="rId23"/>
-    <p:sldId id="277" r:id="rId24"/>
-    <p:sldId id="278" r:id="rId25"/>
-    <p:sldId id="279" r:id="rId26"/>
+    <p:sldId id="281" r:id="rId18"/>
+    <p:sldId id="271" r:id="rId19"/>
+    <p:sldId id="272" r:id="rId20"/>
+    <p:sldId id="273" r:id="rId21"/>
+    <p:sldId id="274" r:id="rId22"/>
+    <p:sldId id="275" r:id="rId23"/>
+    <p:sldId id="276" r:id="rId24"/>
+    <p:sldId id="277" r:id="rId25"/>
+    <p:sldId id="278" r:id="rId26"/>
+    <p:sldId id="279" r:id="rId27"/>
   </p:sldIdLst>
   <p:sldSz cx="12192000" cy="6858000"/>
   <p:notesSz cx="6858000" cy="9144000"/>
   <p:embeddedFontLst>
     <p:embeddedFont>
       <p:font typeface="JetBrains Mono"/>
-      <p:regular r:id="rId28"/>
+      <p:regular r:id="rId29"/>
     </p:embeddedFont>
     <p:embeddedFont>
       <p:font typeface="Plus Jakarta Sans"/>
-      <p:bold r:id="rId29"/>
+      <p:bold r:id="rId30"/>
     </p:embeddedFont>
   </p:embeddedFontLst>
   <p:defaultTextStyle>
@@ -575,7 +576,7 @@
           <a:p>
             <a:fld id="{A5EB01C6-151A-4024-BDB7-3E7CA93F6BF5}" type="slidenum">
               <a:rPr lang="vi-VN" smtClean="0"/>
-              <a:t>23</a:t>
+              <a:t>24</a:t>
             </a:fld>
             <a:endParaRPr lang="vi-VN"/>
           </a:p>
@@ -13498,14 +13499,6 @@
 <file path=ppt/slides/slide17.xml><?xml version="1.0" encoding="utf-8"?>
 <p:sld xmlns:a="http://schemas.openxmlformats.org/drawingml/2006/main" xmlns:r="http://schemas.openxmlformats.org/officeDocument/2006/relationships" xmlns:p="http://schemas.openxmlformats.org/presentationml/2006/main">
   <p:cSld>
-    <p:bg>
-      <p:bgPr>
-        <a:solidFill>
-          <a:srgbClr val="FFFFFF"/>
-        </a:solidFill>
-        <a:effectLst/>
-      </p:bgPr>
-    </p:bg>
     <p:spTree>
       <p:nvGrpSpPr>
         <p:cNvPr id="1" name=""/>
@@ -13520,199 +13513,15 @@
           <a:chExt cx="0" cy="0"/>
         </a:xfrm>
       </p:grpSpPr>
-      <p:sp>
-        <p:nvSpPr>
-          <p:cNvPr id="2" name="Rounded Rectangle 1"/>
-          <p:cNvSpPr/>
-          <p:nvPr/>
-        </p:nvSpPr>
-        <p:spPr>
-          <a:xfrm>
-            <a:off x="457200" y="2557462"/>
-            <a:ext cx="5876925" cy="2495550"/>
-          </a:xfrm>
-          <a:prstGeom prst="roundRect">
-            <a:avLst>
-              <a:gd name="adj" fmla="val 4580"/>
-            </a:avLst>
-          </a:prstGeom>
-          <a:solidFill>
-            <a:srgbClr val="F0FDFA"/>
-          </a:solidFill>
-          <a:ln w="9525">
-            <a:solidFill>
-              <a:srgbClr val="99F6E4"/>
-            </a:solidFill>
-          </a:ln>
-          <a:effectLst/>
-        </p:spPr>
-        <p:style>
-          <a:lnRef idx="1">
-            <a:schemeClr val="accent1"/>
-          </a:lnRef>
-          <a:fillRef idx="3">
-            <a:schemeClr val="accent1"/>
-          </a:fillRef>
-          <a:effectRef idx="2">
-            <a:schemeClr val="accent1"/>
-          </a:effectRef>
-          <a:fontRef idx="minor">
-            <a:schemeClr val="lt1"/>
-          </a:fontRef>
-        </p:style>
-        <p:txBody>
-          <a:bodyPr rtlCol="0" anchor="ctr"/>
-          <a:lstStyle/>
-          <a:p>
-            <a:pPr algn="ctr"/>
-            <a:endParaRPr/>
-          </a:p>
-        </p:txBody>
-      </p:sp>
-      <p:sp>
-        <p:nvSpPr>
-          <p:cNvPr id="3" name="Rounded Rectangle 2"/>
-          <p:cNvSpPr/>
-          <p:nvPr/>
-        </p:nvSpPr>
-        <p:spPr>
-          <a:xfrm>
-            <a:off x="809625" y="2909887"/>
-            <a:ext cx="1619250" cy="266700"/>
-          </a:xfrm>
-          <a:prstGeom prst="roundRect">
-            <a:avLst>
-              <a:gd name="adj" fmla="val 50000"/>
-            </a:avLst>
-          </a:prstGeom>
-          <a:solidFill>
-            <a:srgbClr val="0D9488"/>
-          </a:solidFill>
-          <a:ln>
-            <a:noFill/>
-          </a:ln>
-          <a:effectLst/>
-        </p:spPr>
-        <p:style>
-          <a:lnRef idx="1">
-            <a:schemeClr val="accent1"/>
-          </a:lnRef>
-          <a:fillRef idx="3">
-            <a:schemeClr val="accent1"/>
-          </a:fillRef>
-          <a:effectRef idx="2">
-            <a:schemeClr val="accent1"/>
-          </a:effectRef>
-          <a:fontRef idx="minor">
-            <a:schemeClr val="lt1"/>
-          </a:fontRef>
-        </p:style>
-        <p:txBody>
-          <a:bodyPr rtlCol="0" anchor="ctr"/>
-          <a:lstStyle/>
-          <a:p>
-            <a:pPr algn="ctr"/>
-            <a:endParaRPr/>
-          </a:p>
-        </p:txBody>
-      </p:sp>
-      <p:sp>
-        <p:nvSpPr>
-          <p:cNvPr id="4" name="Rounded Rectangle 3"/>
-          <p:cNvSpPr/>
-          <p:nvPr/>
-        </p:nvSpPr>
-        <p:spPr>
-          <a:xfrm>
-            <a:off x="6562725" y="2686050"/>
-            <a:ext cx="5172075" cy="2238375"/>
-          </a:xfrm>
-          <a:prstGeom prst="roundRect">
-            <a:avLst>
-              <a:gd name="adj" fmla="val 5106"/>
-            </a:avLst>
-          </a:prstGeom>
-          <a:solidFill>
-            <a:srgbClr val="F8FAFC"/>
-          </a:solidFill>
-          <a:ln w="9525">
-            <a:solidFill>
-              <a:srgbClr val="E2E8F0"/>
-            </a:solidFill>
-          </a:ln>
-          <a:effectLst/>
-        </p:spPr>
-        <p:style>
-          <a:lnRef idx="1">
-            <a:schemeClr val="accent1"/>
-          </a:lnRef>
-          <a:fillRef idx="3">
-            <a:schemeClr val="accent1"/>
-          </a:fillRef>
-          <a:effectRef idx="2">
-            <a:schemeClr val="accent1"/>
-          </a:effectRef>
-          <a:fontRef idx="minor">
-            <a:schemeClr val="lt1"/>
-          </a:fontRef>
-        </p:style>
-        <p:txBody>
-          <a:bodyPr rtlCol="0" anchor="ctr"/>
-          <a:lstStyle/>
-          <a:p>
-            <a:pPr algn="ctr"/>
-            <a:endParaRPr/>
-          </a:p>
-        </p:txBody>
-      </p:sp>
-      <p:sp>
-        <p:nvSpPr>
-          <p:cNvPr id="5" name="Rectangle 4"/>
-          <p:cNvSpPr/>
-          <p:nvPr/>
-        </p:nvSpPr>
-        <p:spPr>
-          <a:xfrm>
-            <a:off x="2409825" y="4024312"/>
-            <a:ext cx="9525" cy="676275"/>
-          </a:xfrm>
-          <a:prstGeom prst="rect">
-            <a:avLst/>
-          </a:prstGeom>
-          <a:solidFill>
-            <a:srgbClr val="99F6E4"/>
-          </a:solidFill>
-          <a:ln>
-            <a:noFill/>
-          </a:ln>
-          <a:effectLst/>
-        </p:spPr>
-        <p:style>
-          <a:lnRef idx="1">
-            <a:schemeClr val="accent1"/>
-          </a:lnRef>
-          <a:fillRef idx="3">
-            <a:schemeClr val="accent1"/>
-          </a:fillRef>
-          <a:effectRef idx="2">
-            <a:schemeClr val="accent1"/>
-          </a:effectRef>
-          <a:fontRef idx="minor">
-            <a:schemeClr val="lt1"/>
-          </a:fontRef>
-        </p:style>
-        <p:txBody>
-          <a:bodyPr rtlCol="0" anchor="ctr"/>
-          <a:lstStyle/>
-          <a:p>
-            <a:pPr algn="ctr"/>
-            <a:endParaRPr/>
-          </a:p>
-        </p:txBody>
-      </p:sp>
       <p:pic>
         <p:nvPicPr>
-          <p:cNvPr id="6" name="Picture 5" descr="image.png"/>
+          <p:cNvPr id="2" name="Picture 1">
+            <a:extLst>
+              <a:ext uri="{FF2B5EF4-FFF2-40B4-BE49-F238E27FC236}">
+                <a16:creationId xmlns:a16="http://schemas.microsoft.com/office/drawing/2014/main" id="{75542558-570D-6F91-F839-DF2AFD3B72E7}"/>
+              </a:ext>
+            </a:extLst>
+          </p:cNvPr>
           <p:cNvPicPr>
             <a:picLocks noChangeAspect="1"/>
           </p:cNvPicPr>
@@ -13726,679 +13535,20 @@
         </p:blipFill>
         <p:spPr>
           <a:xfrm>
-            <a:off x="6762750" y="2924175"/>
-            <a:ext cx="171450" cy="171450"/>
+            <a:off x="615047" y="757571"/>
+            <a:ext cx="10961905" cy="5342857"/>
           </a:xfrm>
           <a:prstGeom prst="rect">
             <a:avLst/>
           </a:prstGeom>
         </p:spPr>
       </p:pic>
-      <p:sp>
-        <p:nvSpPr>
-          <p:cNvPr id="7" name="TextBox 6"/>
-          <p:cNvSpPr txBox="1"/>
-          <p:nvPr/>
-        </p:nvSpPr>
-        <p:spPr>
-          <a:xfrm>
-            <a:off x="457200" y="381000"/>
-            <a:ext cx="11734800" cy="171450"/>
-          </a:xfrm>
-          <a:prstGeom prst="rect">
-            <a:avLst/>
-          </a:prstGeom>
-          <a:noFill/>
-        </p:spPr>
-        <p:txBody>
-          <a:bodyPr wrap="none" lIns="0" tIns="0" rIns="0" bIns="0" anchor="t">
-            <a:spAutoFit/>
-          </a:bodyPr>
-          <a:lstStyle/>
-          <a:p>
-            <a:pPr algn="l"/>
-            <a:r>
-              <a:rPr sz="1050" b="1" i="0" u="none">
-                <a:solidFill>
-                  <a:srgbClr val="0D9488"/>
-                </a:solidFill>
-                <a:latin typeface="Plus Jakarta Sans"/>
-              </a:rPr>
-              <a:t>CHƯƠNG 3 — THỬ NGHIỆM &amp; SO SÁNH MÔ HÌNH</a:t>
-            </a:r>
-          </a:p>
-        </p:txBody>
-      </p:sp>
-      <p:sp>
-        <p:nvSpPr>
-          <p:cNvPr id="8" name="TextBox 7"/>
-          <p:cNvSpPr txBox="1"/>
-          <p:nvPr/>
-        </p:nvSpPr>
-        <p:spPr>
-          <a:xfrm>
-            <a:off x="457200" y="609600"/>
-            <a:ext cx="11734800" cy="333375"/>
-          </a:xfrm>
-          <a:prstGeom prst="rect">
-            <a:avLst/>
-          </a:prstGeom>
-          <a:noFill/>
-        </p:spPr>
-        <p:txBody>
-          <a:bodyPr wrap="none" lIns="0" tIns="0" rIns="0" bIns="0" anchor="t">
-            <a:spAutoFit/>
-          </a:bodyPr>
-          <a:lstStyle/>
-          <a:p>
-            <a:pPr algn="l">
-              <a:lnSpc>
-                <a:spcPts val="2625"/>
-              </a:lnSpc>
-            </a:pPr>
-            <a:r>
-              <a:rPr sz="2100" b="1" i="0" u="none">
-                <a:solidFill>
-                  <a:srgbClr val="0F172A"/>
-                </a:solidFill>
-                <a:latin typeface="Plus Jakarta Sans"/>
-              </a:rPr>
-              <a:t>Mô hình Tối ưu nhất — Support Vector Regression (SVR)</a:t>
-            </a:r>
-          </a:p>
-        </p:txBody>
-      </p:sp>
-      <p:sp>
-        <p:nvSpPr>
-          <p:cNvPr id="9" name="TextBox 8"/>
-          <p:cNvSpPr txBox="1"/>
-          <p:nvPr/>
-        </p:nvSpPr>
-        <p:spPr>
-          <a:xfrm>
-            <a:off x="942975" y="2967037"/>
-            <a:ext cx="1447800" cy="152400"/>
-          </a:xfrm>
-          <a:prstGeom prst="rect">
-            <a:avLst/>
-          </a:prstGeom>
-          <a:noFill/>
-        </p:spPr>
-        <p:txBody>
-          <a:bodyPr wrap="square" lIns="0" tIns="0" rIns="0" bIns="0" anchor="t">
-            <a:spAutoFit/>
-          </a:bodyPr>
-          <a:lstStyle/>
-          <a:p>
-            <a:pPr algn="l"/>
-            <a:r>
-              <a:rPr sz="975" b="1" i="0" u="none">
-                <a:solidFill>
-                  <a:srgbClr val="FFFFFF"/>
-                </a:solidFill>
-                <a:latin typeface="Plus Jakarta Sans"/>
-              </a:rPr>
-              <a:t>CHỌN LỰA TRIỂN KHAI</a:t>
-            </a:r>
-          </a:p>
-        </p:txBody>
-      </p:sp>
-      <p:sp>
-        <p:nvSpPr>
-          <p:cNvPr id="10" name="TextBox 9"/>
-          <p:cNvSpPr txBox="1"/>
-          <p:nvPr/>
-        </p:nvSpPr>
-        <p:spPr>
-          <a:xfrm>
-            <a:off x="809625" y="3367087"/>
-            <a:ext cx="6788348" cy="428625"/>
-          </a:xfrm>
-          <a:prstGeom prst="rect">
-            <a:avLst/>
-          </a:prstGeom>
-          <a:noFill/>
-        </p:spPr>
-        <p:txBody>
-          <a:bodyPr wrap="none" lIns="0" tIns="0" rIns="0" bIns="0" anchor="t">
-            <a:spAutoFit/>
-          </a:bodyPr>
-          <a:lstStyle/>
-          <a:p>
-            <a:pPr algn="l"/>
-            <a:r>
-              <a:rPr sz="2700" b="1" i="0" u="none">
-                <a:solidFill>
-                  <a:srgbClr val="0F766E"/>
-                </a:solidFill>
-                <a:latin typeface="Plus Jakarta Sans"/>
-              </a:rPr>
-              <a:t>Support Vector Regression</a:t>
-            </a:r>
-          </a:p>
-        </p:txBody>
-      </p:sp>
-      <p:sp>
-        <p:nvSpPr>
-          <p:cNvPr id="11" name="TextBox 10"/>
-          <p:cNvSpPr txBox="1"/>
-          <p:nvPr/>
-        </p:nvSpPr>
-        <p:spPr>
-          <a:xfrm>
-            <a:off x="6762750" y="2886075"/>
-            <a:ext cx="2485937" cy="200055"/>
-          </a:xfrm>
-          <a:prstGeom prst="rect">
-            <a:avLst/>
-          </a:prstGeom>
-          <a:noFill/>
-        </p:spPr>
-        <p:txBody>
-          <a:bodyPr wrap="none" lIns="171450" tIns="0" rIns="0" bIns="0" anchor="t">
-            <a:spAutoFit/>
-          </a:bodyPr>
-          <a:lstStyle/>
-          <a:p>
-            <a:pPr algn="l"/>
-            <a:r>
-              <a:rPr sz="1300" b="1" i="0" u="none">
-                <a:solidFill>
-                  <a:srgbClr val="0F766E"/>
-                </a:solidFill>
-                <a:latin typeface="Plus Jakarta Sans"/>
-              </a:rPr>
-              <a:t>Lý do lựa chọn theo Thực nghiệm</a:t>
-            </a:r>
-          </a:p>
-        </p:txBody>
-      </p:sp>
-      <p:sp>
-        <p:nvSpPr>
-          <p:cNvPr id="12" name="TextBox 11"/>
-          <p:cNvSpPr txBox="1"/>
-          <p:nvPr/>
-        </p:nvSpPr>
-        <p:spPr>
-          <a:xfrm>
-            <a:off x="809625" y="4024312"/>
-            <a:ext cx="1714500" cy="171450"/>
-          </a:xfrm>
-          <a:prstGeom prst="rect">
-            <a:avLst/>
-          </a:prstGeom>
-          <a:noFill/>
-        </p:spPr>
-        <p:txBody>
-          <a:bodyPr wrap="none" lIns="0" tIns="0" rIns="0" bIns="0" anchor="t">
-            <a:spAutoFit/>
-          </a:bodyPr>
-          <a:lstStyle/>
-          <a:p>
-            <a:pPr algn="l"/>
-            <a:r>
-              <a:rPr sz="1050" b="1" i="0" u="none">
-                <a:solidFill>
-                  <a:srgbClr val="115E59"/>
-                </a:solidFill>
-                <a:latin typeface="Plus Jakarta Sans"/>
-              </a:rPr>
-              <a:t>R² TEST SCORE</a:t>
-            </a:r>
-          </a:p>
-        </p:txBody>
-      </p:sp>
-      <p:sp>
-        <p:nvSpPr>
-          <p:cNvPr id="13" name="TextBox 12"/>
-          <p:cNvSpPr txBox="1"/>
-          <p:nvPr/>
-        </p:nvSpPr>
-        <p:spPr>
-          <a:xfrm>
-            <a:off x="809625" y="4195762"/>
-            <a:ext cx="1714500" cy="504825"/>
-          </a:xfrm>
-          <a:prstGeom prst="rect">
-            <a:avLst/>
-          </a:prstGeom>
-          <a:noFill/>
-        </p:spPr>
-        <p:txBody>
-          <a:bodyPr wrap="none" lIns="0" tIns="0" rIns="0" bIns="0" anchor="t">
-            <a:spAutoFit/>
-          </a:bodyPr>
-          <a:lstStyle/>
-          <a:p>
-            <a:pPr algn="l"/>
-            <a:r>
-              <a:rPr sz="3150" b="1" i="0" u="none">
-                <a:solidFill>
-                  <a:srgbClr val="0F766E"/>
-                </a:solidFill>
-                <a:latin typeface="Plus Jakarta Sans"/>
-              </a:rPr>
-              <a:t>0.9772</a:t>
-            </a:r>
-          </a:p>
-        </p:txBody>
-      </p:sp>
-      <p:sp>
-        <p:nvSpPr>
-          <p:cNvPr id="14" name="TextBox 13"/>
-          <p:cNvSpPr txBox="1"/>
-          <p:nvPr/>
-        </p:nvSpPr>
-        <p:spPr>
-          <a:xfrm>
-            <a:off x="2647950" y="4024312"/>
-            <a:ext cx="1738312" cy="171450"/>
-          </a:xfrm>
-          <a:prstGeom prst="rect">
-            <a:avLst/>
-          </a:prstGeom>
-          <a:noFill/>
-        </p:spPr>
-        <p:txBody>
-          <a:bodyPr wrap="none" lIns="0" tIns="0" rIns="0" bIns="0" anchor="t">
-            <a:spAutoFit/>
-          </a:bodyPr>
-          <a:lstStyle/>
-          <a:p>
-            <a:pPr algn="l"/>
-            <a:r>
-              <a:rPr sz="1050" b="1" i="0" u="none">
-                <a:solidFill>
-                  <a:srgbClr val="115E59"/>
-                </a:solidFill>
-                <a:latin typeface="Plus Jakarta Sans"/>
-              </a:rPr>
-              <a:t>SAI SỐ MAE</a:t>
-            </a:r>
-          </a:p>
-        </p:txBody>
-      </p:sp>
-      <p:sp>
-        <p:nvSpPr>
-          <p:cNvPr id="15" name="TextBox 14"/>
-          <p:cNvSpPr txBox="1"/>
-          <p:nvPr/>
-        </p:nvSpPr>
-        <p:spPr>
-          <a:xfrm>
-            <a:off x="2647950" y="4195762"/>
-            <a:ext cx="1738312" cy="504825"/>
-          </a:xfrm>
-          <a:prstGeom prst="rect">
-            <a:avLst/>
-          </a:prstGeom>
-          <a:noFill/>
-        </p:spPr>
-        <p:txBody>
-          <a:bodyPr wrap="none" lIns="0" tIns="0" rIns="0" bIns="0" anchor="t">
-            <a:spAutoFit/>
-          </a:bodyPr>
-          <a:lstStyle/>
-          <a:p>
-            <a:pPr algn="l"/>
-            <a:r>
-              <a:rPr sz="3150" b="1" i="0" u="none">
-                <a:solidFill>
-                  <a:srgbClr val="0F766E"/>
-                </a:solidFill>
-                <a:latin typeface="Plus Jakarta Sans"/>
-              </a:rPr>
-              <a:t>83.3 </a:t>
-            </a:r>
-            <a:r>
-              <a:rPr sz="1350" b="1" i="0" u="none">
-                <a:solidFill>
-                  <a:srgbClr val="0F766E"/>
-                </a:solidFill>
-                <a:latin typeface="Plus Jakarta Sans"/>
-              </a:rPr>
-              <a:t>triệu</a:t>
-            </a:r>
-          </a:p>
-        </p:txBody>
-      </p:sp>
-      <p:sp>
-        <p:nvSpPr>
-          <p:cNvPr id="16" name="TextBox 15"/>
-          <p:cNvSpPr txBox="1"/>
-          <p:nvPr/>
-        </p:nvSpPr>
-        <p:spPr>
-          <a:xfrm>
-            <a:off x="6762750" y="3181350"/>
-            <a:ext cx="4279505" cy="236347"/>
-          </a:xfrm>
-          <a:prstGeom prst="rect">
-            <a:avLst/>
-          </a:prstGeom>
-          <a:noFill/>
-        </p:spPr>
-        <p:txBody>
-          <a:bodyPr wrap="none" lIns="0" tIns="0" rIns="0" bIns="0" anchor="t">
-            <a:spAutoFit/>
-          </a:bodyPr>
-          <a:lstStyle/>
-          <a:p>
-            <a:pPr algn="l">
-              <a:lnSpc>
-                <a:spcPts val="2025"/>
-              </a:lnSpc>
-            </a:pPr>
-            <a:r>
-              <a:rPr sz="1300" b="1" i="0" u="none">
-                <a:solidFill>
-                  <a:srgbClr val="334155"/>
-                </a:solidFill>
-                <a:latin typeface="Plus Jakarta Sans"/>
-              </a:rPr>
-              <a:t>R² cao nhất (0.9772):</a:t>
-            </a:r>
-            <a:r>
-              <a:rPr sz="1300" b="0" i="0" u="none">
-                <a:solidFill>
-                  <a:srgbClr val="334155"/>
-                </a:solidFill>
-                <a:latin typeface="Plus Jakarta Sans"/>
-              </a:rPr>
-              <a:t> Giải thích tới 97.7% biến thiên của giá xe.</a:t>
-            </a:r>
-          </a:p>
-        </p:txBody>
-      </p:sp>
-      <p:sp>
-        <p:nvSpPr>
-          <p:cNvPr id="17" name="TextBox 16"/>
-          <p:cNvSpPr txBox="1"/>
-          <p:nvPr/>
-        </p:nvSpPr>
-        <p:spPr>
-          <a:xfrm>
-            <a:off x="6762750" y="3438525"/>
-            <a:ext cx="4440446" cy="236347"/>
-          </a:xfrm>
-          <a:prstGeom prst="rect">
-            <a:avLst/>
-          </a:prstGeom>
-          <a:noFill/>
-        </p:spPr>
-        <p:txBody>
-          <a:bodyPr wrap="none" lIns="0" tIns="0" rIns="0" bIns="0" anchor="t">
-            <a:spAutoFit/>
-          </a:bodyPr>
-          <a:lstStyle/>
-          <a:p>
-            <a:pPr algn="l">
-              <a:lnSpc>
-                <a:spcPts val="2025"/>
-              </a:lnSpc>
-            </a:pPr>
-            <a:r>
-              <a:rPr sz="1300" b="1" i="0" u="none">
-                <a:solidFill>
-                  <a:srgbClr val="334155"/>
-                </a:solidFill>
-                <a:latin typeface="Plus Jakarta Sans"/>
-              </a:rPr>
-              <a:t>MAE thấp nhất (83.3 triệu):</a:t>
-            </a:r>
-            <a:r>
-              <a:rPr sz="1300" b="0" i="0" u="none">
-                <a:solidFill>
-                  <a:srgbClr val="334155"/>
-                </a:solidFill>
-                <a:latin typeface="Plus Jakarta Sans"/>
-              </a:rPr>
-              <a:t> Độ lệch dự đoán trung bình tốt nhất.</a:t>
-            </a:r>
-          </a:p>
-        </p:txBody>
-      </p:sp>
-      <p:sp>
-        <p:nvSpPr>
-          <p:cNvPr id="18" name="TextBox 17"/>
-          <p:cNvSpPr txBox="1"/>
-          <p:nvPr/>
-        </p:nvSpPr>
-        <p:spPr>
-          <a:xfrm>
-            <a:off x="6762750" y="3695700"/>
-            <a:ext cx="5553075" cy="236347"/>
-          </a:xfrm>
-          <a:prstGeom prst="rect">
-            <a:avLst/>
-          </a:prstGeom>
-          <a:noFill/>
-        </p:spPr>
-        <p:txBody>
-          <a:bodyPr wrap="square" lIns="0" tIns="0" rIns="0" bIns="0" anchor="t">
-            <a:spAutoFit/>
-          </a:bodyPr>
-          <a:lstStyle/>
-          <a:p>
-            <a:pPr algn="l">
-              <a:lnSpc>
-                <a:spcPts val="2025"/>
-              </a:lnSpc>
-            </a:pPr>
-            <a:r>
-              <a:rPr sz="1300" b="1" i="0" u="none" dirty="0">
-                <a:solidFill>
-                  <a:srgbClr val="334155"/>
-                </a:solidFill>
-                <a:latin typeface="Plus Jakarta Sans"/>
-              </a:rPr>
-              <a:t>Dung </a:t>
-            </a:r>
-            <a:r>
-              <a:rPr sz="1300" b="1" i="0" u="none" dirty="0" err="1">
-                <a:solidFill>
-                  <a:srgbClr val="334155"/>
-                </a:solidFill>
-                <a:latin typeface="Plus Jakarta Sans"/>
-              </a:rPr>
-              <a:t>lượng</a:t>
-            </a:r>
-            <a:r>
-              <a:rPr sz="1300" b="1" i="0" u="none" dirty="0">
-                <a:solidFill>
-                  <a:srgbClr val="334155"/>
-                </a:solidFill>
-                <a:latin typeface="Plus Jakarta Sans"/>
-              </a:rPr>
-              <a:t> </a:t>
-            </a:r>
-            <a:r>
-              <a:rPr sz="1300" b="1" i="0" u="none" dirty="0" err="1">
-                <a:solidFill>
-                  <a:srgbClr val="334155"/>
-                </a:solidFill>
-                <a:latin typeface="Plus Jakarta Sans"/>
-              </a:rPr>
-              <a:t>cực</a:t>
-            </a:r>
-            <a:r>
-              <a:rPr sz="1300" b="1" i="0" u="none" dirty="0">
-                <a:solidFill>
-                  <a:srgbClr val="334155"/>
-                </a:solidFill>
-                <a:latin typeface="Plus Jakarta Sans"/>
-              </a:rPr>
-              <a:t> </a:t>
-            </a:r>
-            <a:r>
-              <a:rPr sz="1300" b="1" i="0" u="none" dirty="0" err="1">
-                <a:solidFill>
-                  <a:srgbClr val="334155"/>
-                </a:solidFill>
-                <a:latin typeface="Plus Jakarta Sans"/>
-              </a:rPr>
-              <a:t>nhẹ</a:t>
-            </a:r>
-            <a:r>
-              <a:rPr sz="1300" b="1" i="0" u="none" dirty="0">
-                <a:solidFill>
-                  <a:srgbClr val="334155"/>
-                </a:solidFill>
-                <a:latin typeface="Plus Jakarta Sans"/>
-              </a:rPr>
-              <a:t> (~0.18 MB):</a:t>
-            </a:r>
-            <a:r>
-              <a:rPr sz="1300" b="0" i="0" u="none" dirty="0">
-                <a:solidFill>
-                  <a:srgbClr val="334155"/>
-                </a:solidFill>
-                <a:latin typeface="Plus Jakarta Sans"/>
-              </a:rPr>
-              <a:t> </a:t>
-            </a:r>
-            <a:r>
-              <a:rPr sz="1300" b="0" i="0" u="none" dirty="0" err="1">
-                <a:solidFill>
-                  <a:srgbClr val="334155"/>
-                </a:solidFill>
-                <a:latin typeface="Plus Jakarta Sans"/>
-              </a:rPr>
-              <a:t>Dễ</a:t>
-            </a:r>
-            <a:r>
-              <a:rPr sz="1300" b="0" i="0" u="none" dirty="0">
-                <a:solidFill>
-                  <a:srgbClr val="334155"/>
-                </a:solidFill>
-                <a:latin typeface="Plus Jakarta Sans"/>
-              </a:rPr>
-              <a:t> </a:t>
-            </a:r>
-            <a:r>
-              <a:rPr sz="1300" b="0" i="0" u="none" dirty="0" err="1">
-                <a:solidFill>
-                  <a:srgbClr val="334155"/>
-                </a:solidFill>
-                <a:latin typeface="Plus Jakarta Sans"/>
-              </a:rPr>
-              <a:t>dàng</a:t>
-            </a:r>
-            <a:r>
-              <a:rPr sz="1300" b="0" i="0" u="none" dirty="0">
-                <a:solidFill>
-                  <a:srgbClr val="334155"/>
-                </a:solidFill>
-                <a:latin typeface="Plus Jakarta Sans"/>
-              </a:rPr>
-              <a:t> </a:t>
-            </a:r>
-            <a:r>
-              <a:rPr sz="1300" b="0" i="0" u="none" dirty="0" err="1">
-                <a:solidFill>
-                  <a:srgbClr val="334155"/>
-                </a:solidFill>
-                <a:latin typeface="Plus Jakarta Sans"/>
-              </a:rPr>
-              <a:t>đóng</a:t>
-            </a:r>
-            <a:r>
-              <a:rPr sz="1300" b="0" i="0" u="none" dirty="0">
-                <a:solidFill>
-                  <a:srgbClr val="334155"/>
-                </a:solidFill>
-                <a:latin typeface="Plus Jakarta Sans"/>
-              </a:rPr>
-              <a:t> </a:t>
-            </a:r>
-            <a:r>
-              <a:rPr sz="1300" b="0" i="0" u="none" dirty="0" err="1">
-                <a:solidFill>
-                  <a:srgbClr val="334155"/>
-                </a:solidFill>
-                <a:latin typeface="Plus Jakarta Sans"/>
-              </a:rPr>
-              <a:t>gói</a:t>
-            </a:r>
-            <a:r>
-              <a:rPr sz="1300" b="0" i="0" u="none" dirty="0">
-                <a:solidFill>
-                  <a:srgbClr val="334155"/>
-                </a:solidFill>
-                <a:latin typeface="Plus Jakarta Sans"/>
-              </a:rPr>
-              <a:t> </a:t>
-            </a:r>
-            <a:r>
-              <a:rPr sz="1300" b="0" i="0" u="none" dirty="0" err="1">
-                <a:solidFill>
-                  <a:srgbClr val="334155"/>
-                </a:solidFill>
-                <a:latin typeface="Plus Jakarta Sans"/>
-              </a:rPr>
-              <a:t>vào</a:t>
-            </a:r>
-            <a:r>
-              <a:rPr sz="1300" b="0" i="0" u="none" dirty="0">
-                <a:solidFill>
-                  <a:srgbClr val="334155"/>
-                </a:solidFill>
-                <a:latin typeface="Plus Jakarta Sans"/>
-              </a:rPr>
-              <a:t> Docker container.</a:t>
-            </a:r>
-          </a:p>
-        </p:txBody>
-      </p:sp>
-      <p:sp>
-        <p:nvSpPr>
-          <p:cNvPr id="19" name="TextBox 18"/>
-          <p:cNvSpPr txBox="1"/>
-          <p:nvPr/>
-        </p:nvSpPr>
-        <p:spPr>
-          <a:xfrm>
-            <a:off x="6762750" y="4210050"/>
-            <a:ext cx="4867275" cy="236347"/>
-          </a:xfrm>
-          <a:prstGeom prst="rect">
-            <a:avLst/>
-          </a:prstGeom>
-          <a:noFill/>
-        </p:spPr>
-        <p:txBody>
-          <a:bodyPr wrap="square" lIns="0" tIns="0" rIns="0" bIns="0" anchor="t">
-            <a:spAutoFit/>
-          </a:bodyPr>
-          <a:lstStyle/>
-          <a:p>
-            <a:pPr algn="l">
-              <a:lnSpc>
-                <a:spcPts val="2025"/>
-              </a:lnSpc>
-            </a:pPr>
-            <a:r>
-              <a:rPr sz="1300" b="1" i="0" u="none">
-                <a:solidFill>
-                  <a:srgbClr val="334155"/>
-                </a:solidFill>
-                <a:latin typeface="Plus Jakarta Sans"/>
-              </a:rPr>
-              <a:t>Suy luận siêu nhanh (~20 ms):</a:t>
-            </a:r>
-            <a:r>
-              <a:rPr sz="1300" b="0" i="0" u="none">
-                <a:solidFill>
-                  <a:srgbClr val="334155"/>
-                </a:solidFill>
-                <a:latin typeface="Plus Jakarta Sans"/>
-              </a:rPr>
-              <a:t> Sẵn sàng đáp ứng yêu cầu Real-time API.</a:t>
-            </a:r>
-          </a:p>
-        </p:txBody>
-      </p:sp>
     </p:spTree>
+    <p:extLst>
+      <p:ext uri="{BB962C8B-B14F-4D97-AF65-F5344CB8AC3E}">
+        <p14:creationId xmlns:p14="http://schemas.microsoft.com/office/powerpoint/2010/main" val="1938735884"/>
+      </p:ext>
+    </p:extLst>
   </p:cSld>
   <p:clrMapOvr>
     <a:masterClrMapping/>
@@ -14439,12 +13589,108 @@
         </p:nvSpPr>
         <p:spPr>
           <a:xfrm>
-            <a:off x="457200" y="2933700"/>
-            <a:ext cx="3228975" cy="1743075"/>
+            <a:off x="457200" y="2557462"/>
+            <a:ext cx="5876925" cy="2495550"/>
           </a:xfrm>
           <a:prstGeom prst="roundRect">
             <a:avLst>
-              <a:gd name="adj" fmla="val 6557"/>
+              <a:gd name="adj" fmla="val 4580"/>
+            </a:avLst>
+          </a:prstGeom>
+          <a:solidFill>
+            <a:srgbClr val="F0FDFA"/>
+          </a:solidFill>
+          <a:ln w="9525">
+            <a:solidFill>
+              <a:srgbClr val="99F6E4"/>
+            </a:solidFill>
+          </a:ln>
+          <a:effectLst/>
+        </p:spPr>
+        <p:style>
+          <a:lnRef idx="1">
+            <a:schemeClr val="accent1"/>
+          </a:lnRef>
+          <a:fillRef idx="3">
+            <a:schemeClr val="accent1"/>
+          </a:fillRef>
+          <a:effectRef idx="2">
+            <a:schemeClr val="accent1"/>
+          </a:effectRef>
+          <a:fontRef idx="minor">
+            <a:schemeClr val="lt1"/>
+          </a:fontRef>
+        </p:style>
+        <p:txBody>
+          <a:bodyPr rtlCol="0" anchor="ctr"/>
+          <a:lstStyle/>
+          <a:p>
+            <a:pPr algn="ctr"/>
+            <a:endParaRPr/>
+          </a:p>
+        </p:txBody>
+      </p:sp>
+      <p:sp>
+        <p:nvSpPr>
+          <p:cNvPr id="3" name="Rounded Rectangle 2"/>
+          <p:cNvSpPr/>
+          <p:nvPr/>
+        </p:nvSpPr>
+        <p:spPr>
+          <a:xfrm>
+            <a:off x="809625" y="2909887"/>
+            <a:ext cx="1619250" cy="266700"/>
+          </a:xfrm>
+          <a:prstGeom prst="roundRect">
+            <a:avLst>
+              <a:gd name="adj" fmla="val 50000"/>
+            </a:avLst>
+          </a:prstGeom>
+          <a:solidFill>
+            <a:srgbClr val="0D9488"/>
+          </a:solidFill>
+          <a:ln>
+            <a:noFill/>
+          </a:ln>
+          <a:effectLst/>
+        </p:spPr>
+        <p:style>
+          <a:lnRef idx="1">
+            <a:schemeClr val="accent1"/>
+          </a:lnRef>
+          <a:fillRef idx="3">
+            <a:schemeClr val="accent1"/>
+          </a:fillRef>
+          <a:effectRef idx="2">
+            <a:schemeClr val="accent1"/>
+          </a:effectRef>
+          <a:fontRef idx="minor">
+            <a:schemeClr val="lt1"/>
+          </a:fontRef>
+        </p:style>
+        <p:txBody>
+          <a:bodyPr rtlCol="0" anchor="ctr"/>
+          <a:lstStyle/>
+          <a:p>
+            <a:pPr algn="ctr"/>
+            <a:endParaRPr/>
+          </a:p>
+        </p:txBody>
+      </p:sp>
+      <p:sp>
+        <p:nvSpPr>
+          <p:cNvPr id="4" name="Rounded Rectangle 3"/>
+          <p:cNvSpPr/>
+          <p:nvPr/>
+        </p:nvSpPr>
+        <p:spPr>
+          <a:xfrm>
+            <a:off x="6562725" y="2686050"/>
+            <a:ext cx="5172075" cy="2238375"/>
+          </a:xfrm>
+          <a:prstGeom prst="roundRect">
+            <a:avLst>
+              <a:gd name="adj" fmla="val 5106"/>
             </a:avLst>
           </a:prstGeom>
           <a:solidFill>
@@ -14482,27 +13728,23 @@
       </p:sp>
       <p:sp>
         <p:nvSpPr>
-          <p:cNvPr id="3" name="Rounded Rectangle 2"/>
+          <p:cNvPr id="5" name="Rectangle 4"/>
           <p:cNvSpPr/>
           <p:nvPr/>
         </p:nvSpPr>
         <p:spPr>
           <a:xfrm>
-            <a:off x="4191000" y="2933700"/>
-            <a:ext cx="3228975" cy="1743075"/>
-          </a:xfrm>
-          <a:prstGeom prst="roundRect">
-            <a:avLst>
-              <a:gd name="adj" fmla="val 6557"/>
-            </a:avLst>
+            <a:off x="2409825" y="4024312"/>
+            <a:ext cx="9525" cy="676275"/>
+          </a:xfrm>
+          <a:prstGeom prst="rect">
+            <a:avLst/>
           </a:prstGeom>
           <a:solidFill>
-            <a:srgbClr val="F8FAFC"/>
+            <a:srgbClr val="99F6E4"/>
           </a:solidFill>
-          <a:ln w="9525">
-            <a:solidFill>
-              <a:srgbClr val="E2E8F0"/>
-            </a:solidFill>
+          <a:ln>
+            <a:noFill/>
           </a:ln>
           <a:effectLst/>
         </p:spPr>
@@ -14529,58 +13771,9 @@
           </a:p>
         </p:txBody>
       </p:sp>
-      <p:sp>
-        <p:nvSpPr>
-          <p:cNvPr id="4" name="Rounded Rectangle 3"/>
-          <p:cNvSpPr/>
-          <p:nvPr/>
-        </p:nvSpPr>
-        <p:spPr>
-          <a:xfrm>
-            <a:off x="7924800" y="2933700"/>
-            <a:ext cx="3810000" cy="1743075"/>
-          </a:xfrm>
-          <a:prstGeom prst="roundRect">
-            <a:avLst>
-              <a:gd name="adj" fmla="val 6557"/>
-            </a:avLst>
-          </a:prstGeom>
-          <a:solidFill>
-            <a:srgbClr val="F0FDFA"/>
-          </a:solidFill>
-          <a:ln w="9525">
-            <a:solidFill>
-              <a:srgbClr val="99F6E4"/>
-            </a:solidFill>
-          </a:ln>
-          <a:effectLst/>
-        </p:spPr>
-        <p:style>
-          <a:lnRef idx="1">
-            <a:schemeClr val="accent1"/>
-          </a:lnRef>
-          <a:fillRef idx="3">
-            <a:schemeClr val="accent1"/>
-          </a:fillRef>
-          <a:effectRef idx="2">
-            <a:schemeClr val="accent1"/>
-          </a:effectRef>
-          <a:fontRef idx="minor">
-            <a:schemeClr val="lt1"/>
-          </a:fontRef>
-        </p:style>
-        <p:txBody>
-          <a:bodyPr rtlCol="0" anchor="ctr"/>
-          <a:lstStyle/>
-          <a:p>
-            <a:pPr algn="ctr"/>
-            <a:endParaRPr/>
-          </a:p>
-        </p:txBody>
-      </p:sp>
       <p:pic>
         <p:nvPicPr>
-          <p:cNvPr id="5" name="Picture 4" descr="image.png"/>
+          <p:cNvPr id="6" name="Picture 5" descr="image.png"/>
           <p:cNvPicPr>
             <a:picLocks noChangeAspect="1"/>
           </p:cNvPicPr>
@@ -14594,185 +13787,17 @@
         </p:blipFill>
         <p:spPr>
           <a:xfrm>
-            <a:off x="3838575" y="3690937"/>
-            <a:ext cx="200025" cy="228600"/>
+            <a:off x="6762750" y="2924175"/>
+            <a:ext cx="171450" cy="171450"/>
           </a:xfrm>
           <a:prstGeom prst="rect">
             <a:avLst/>
           </a:prstGeom>
         </p:spPr>
       </p:pic>
-      <p:pic>
-        <p:nvPicPr>
-          <p:cNvPr id="6" name="Picture 5" descr="image.png"/>
-          <p:cNvPicPr>
-            <a:picLocks noChangeAspect="1"/>
-          </p:cNvPicPr>
-          <p:nvPr/>
-        </p:nvPicPr>
-        <p:blipFill>
-          <a:blip r:embed="rId2"/>
-          <a:stretch>
-            <a:fillRect/>
-          </a:stretch>
-        </p:blipFill>
-        <p:spPr>
-          <a:xfrm>
-            <a:off x="7572375" y="3690937"/>
-            <a:ext cx="200025" cy="228600"/>
-          </a:xfrm>
-          <a:prstGeom prst="rect">
-            <a:avLst/>
-          </a:prstGeom>
-        </p:spPr>
-      </p:pic>
-      <p:pic>
-        <p:nvPicPr>
-          <p:cNvPr id="7" name="Picture 6" descr="image.png"/>
-          <p:cNvPicPr>
-            <a:picLocks noChangeAspect="1"/>
-          </p:cNvPicPr>
-          <p:nvPr/>
-        </p:nvPicPr>
-        <p:blipFill>
-          <a:blip r:embed="rId3"/>
-          <a:stretch>
-            <a:fillRect/>
-          </a:stretch>
-        </p:blipFill>
-        <p:spPr>
-          <a:xfrm>
-            <a:off x="1881187" y="3171825"/>
-            <a:ext cx="381000" cy="381000"/>
-          </a:xfrm>
-          <a:prstGeom prst="rect">
-            <a:avLst/>
-          </a:prstGeom>
-        </p:spPr>
-      </p:pic>
-      <p:pic>
-        <p:nvPicPr>
-          <p:cNvPr id="8" name="Picture 7" descr="image.png"/>
-          <p:cNvPicPr>
-            <a:picLocks noChangeAspect="1"/>
-          </p:cNvPicPr>
-          <p:nvPr/>
-        </p:nvPicPr>
-        <p:blipFill>
-          <a:blip r:embed="rId4"/>
-          <a:stretch>
-            <a:fillRect/>
-          </a:stretch>
-        </p:blipFill>
-        <p:spPr>
-          <a:xfrm>
-            <a:off x="5614987" y="3171825"/>
-            <a:ext cx="381000" cy="381000"/>
-          </a:xfrm>
-          <a:prstGeom prst="rect">
-            <a:avLst/>
-          </a:prstGeom>
-        </p:spPr>
-      </p:pic>
-      <p:pic>
-        <p:nvPicPr>
-          <p:cNvPr id="9" name="Picture 8" descr="image.png"/>
-          <p:cNvPicPr>
-            <a:picLocks noChangeAspect="1"/>
-          </p:cNvPicPr>
-          <p:nvPr/>
-        </p:nvPicPr>
-        <p:blipFill>
-          <a:blip r:embed="rId5"/>
-          <a:stretch>
-            <a:fillRect/>
-          </a:stretch>
-        </p:blipFill>
-        <p:spPr>
-          <a:xfrm>
-            <a:off x="9639300" y="3171825"/>
-            <a:ext cx="381000" cy="381000"/>
-          </a:xfrm>
-          <a:prstGeom prst="rect">
-            <a:avLst/>
-          </a:prstGeom>
-        </p:spPr>
-      </p:pic>
-      <p:pic>
-        <p:nvPicPr>
-          <p:cNvPr id="10" name="Picture 9" descr="image.png"/>
-          <p:cNvPicPr>
-            <a:picLocks noChangeAspect="1"/>
-          </p:cNvPicPr>
-          <p:nvPr/>
-        </p:nvPicPr>
-        <p:blipFill>
-          <a:blip r:embed="rId6"/>
-          <a:stretch>
-            <a:fillRect/>
-          </a:stretch>
-        </p:blipFill>
-        <p:spPr>
-          <a:xfrm>
-            <a:off x="1976437" y="3276600"/>
-            <a:ext cx="190500" cy="171450"/>
-          </a:xfrm>
-          <a:prstGeom prst="rect">
-            <a:avLst/>
-          </a:prstGeom>
-        </p:spPr>
-      </p:pic>
-      <p:pic>
-        <p:nvPicPr>
-          <p:cNvPr id="11" name="Picture 10" descr="image.png"/>
-          <p:cNvPicPr>
-            <a:picLocks noChangeAspect="1"/>
-          </p:cNvPicPr>
-          <p:nvPr/>
-        </p:nvPicPr>
-        <p:blipFill>
-          <a:blip r:embed="rId7"/>
-          <a:stretch>
-            <a:fillRect/>
-          </a:stretch>
-        </p:blipFill>
-        <p:spPr>
-          <a:xfrm>
-            <a:off x="5719762" y="3276600"/>
-            <a:ext cx="171450" cy="171450"/>
-          </a:xfrm>
-          <a:prstGeom prst="rect">
-            <a:avLst/>
-          </a:prstGeom>
-        </p:spPr>
-      </p:pic>
-      <p:pic>
-        <p:nvPicPr>
-          <p:cNvPr id="12" name="Picture 11" descr="image.png"/>
-          <p:cNvPicPr>
-            <a:picLocks noChangeAspect="1"/>
-          </p:cNvPicPr>
-          <p:nvPr/>
-        </p:nvPicPr>
-        <p:blipFill>
-          <a:blip r:embed="rId8"/>
-          <a:stretch>
-            <a:fillRect/>
-          </a:stretch>
-        </p:blipFill>
-        <p:spPr>
-          <a:xfrm>
-            <a:off x="9744075" y="3276600"/>
-            <a:ext cx="171450" cy="171450"/>
-          </a:xfrm>
-          <a:prstGeom prst="rect">
-            <a:avLst/>
-          </a:prstGeom>
-        </p:spPr>
-      </p:pic>
-      <p:sp>
-        <p:nvSpPr>
-          <p:cNvPr id="13" name="TextBox 12"/>
+      <p:sp>
+        <p:nvSpPr>
+          <p:cNvPr id="7" name="TextBox 6"/>
           <p:cNvSpPr txBox="1"/>
           <p:nvPr/>
         </p:nvSpPr>
@@ -14800,14 +13825,14 @@
                 </a:solidFill>
                 <a:latin typeface="Plus Jakarta Sans"/>
               </a:rPr>
-              <a:t>CHƯƠNG 3 — TRIỂN KHAI HỆ THỐNG</a:t>
-            </a:r>
-          </a:p>
-        </p:txBody>
-      </p:sp>
-      <p:sp>
-        <p:nvSpPr>
-          <p:cNvPr id="14" name="TextBox 13"/>
+              <a:t>CHƯƠNG 3 — THỬ NGHIỆM &amp; SO SÁNH MÔ HÌNH</a:t>
+            </a:r>
+          </a:p>
+        </p:txBody>
+      </p:sp>
+      <p:sp>
+        <p:nvSpPr>
+          <p:cNvPr id="8" name="TextBox 7"/>
           <p:cNvSpPr txBox="1"/>
           <p:nvPr/>
         </p:nvSpPr>
@@ -14839,21 +13864,56 @@
                 </a:solidFill>
                 <a:latin typeface="Plus Jakarta Sans"/>
               </a:rPr>
-              <a:t>Kiến trúc Hệ thống — 3 Container Docker</a:t>
-            </a:r>
-          </a:p>
-        </p:txBody>
-      </p:sp>
-      <p:sp>
-        <p:nvSpPr>
-          <p:cNvPr id="15" name="TextBox 14"/>
+              <a:t>Mô hình Tối ưu nhất — Support Vector Regression (SVR)</a:t>
+            </a:r>
+          </a:p>
+        </p:txBody>
+      </p:sp>
+      <p:sp>
+        <p:nvSpPr>
+          <p:cNvPr id="9" name="TextBox 8"/>
           <p:cNvSpPr txBox="1"/>
           <p:nvPr/>
         </p:nvSpPr>
         <p:spPr>
           <a:xfrm>
-            <a:off x="255984" y="3667125"/>
-            <a:ext cx="3631406" cy="171450"/>
+            <a:off x="942975" y="2967037"/>
+            <a:ext cx="1447800" cy="152400"/>
+          </a:xfrm>
+          <a:prstGeom prst="rect">
+            <a:avLst/>
+          </a:prstGeom>
+          <a:noFill/>
+        </p:spPr>
+        <p:txBody>
+          <a:bodyPr wrap="square" lIns="0" tIns="0" rIns="0" bIns="0" anchor="t">
+            <a:spAutoFit/>
+          </a:bodyPr>
+          <a:lstStyle/>
+          <a:p>
+            <a:pPr algn="l"/>
+            <a:r>
+              <a:rPr sz="975" b="1" i="0" u="none">
+                <a:solidFill>
+                  <a:srgbClr val="FFFFFF"/>
+                </a:solidFill>
+                <a:latin typeface="Plus Jakarta Sans"/>
+              </a:rPr>
+              <a:t>CHỌN LỰA TRIỂN KHAI</a:t>
+            </a:r>
+          </a:p>
+        </p:txBody>
+      </p:sp>
+      <p:sp>
+        <p:nvSpPr>
+          <p:cNvPr id="10" name="TextBox 9"/>
+          <p:cNvSpPr txBox="1"/>
+          <p:nvPr/>
+        </p:nvSpPr>
+        <p:spPr>
+          <a:xfrm>
+            <a:off x="809625" y="3367087"/>
+            <a:ext cx="6788348" cy="428625"/>
           </a:xfrm>
           <a:prstGeom prst="rect">
             <a:avLst/>
@@ -14866,29 +13926,64 @@
           </a:bodyPr>
           <a:lstStyle/>
           <a:p>
-            <a:pPr algn="ctr"/>
-            <a:r>
-              <a:rPr sz="1050" b="1" i="0" u="none">
-                <a:solidFill>
-                  <a:srgbClr val="0284C7"/>
-                </a:solidFill>
-                <a:latin typeface="Plus Jakarta Sans"/>
-              </a:rPr>
-              <a:t>FRONTEND CONTAINER</a:t>
-            </a:r>
-          </a:p>
-        </p:txBody>
-      </p:sp>
-      <p:sp>
-        <p:nvSpPr>
-          <p:cNvPr id="16" name="TextBox 15"/>
+            <a:pPr algn="l"/>
+            <a:r>
+              <a:rPr sz="2700" b="1" i="0" u="none">
+                <a:solidFill>
+                  <a:srgbClr val="0F766E"/>
+                </a:solidFill>
+                <a:latin typeface="Plus Jakarta Sans"/>
+              </a:rPr>
+              <a:t>Support Vector Regression</a:t>
+            </a:r>
+          </a:p>
+        </p:txBody>
+      </p:sp>
+      <p:sp>
+        <p:nvSpPr>
+          <p:cNvPr id="11" name="TextBox 10"/>
           <p:cNvSpPr txBox="1"/>
           <p:nvPr/>
         </p:nvSpPr>
         <p:spPr>
           <a:xfrm>
-            <a:off x="255984" y="3876675"/>
-            <a:ext cx="3631406" cy="219075"/>
+            <a:off x="6762750" y="2886075"/>
+            <a:ext cx="2485937" cy="200055"/>
+          </a:xfrm>
+          <a:prstGeom prst="rect">
+            <a:avLst/>
+          </a:prstGeom>
+          <a:noFill/>
+        </p:spPr>
+        <p:txBody>
+          <a:bodyPr wrap="none" lIns="171450" tIns="0" rIns="0" bIns="0" anchor="t">
+            <a:spAutoFit/>
+          </a:bodyPr>
+          <a:lstStyle/>
+          <a:p>
+            <a:pPr algn="l"/>
+            <a:r>
+              <a:rPr sz="1300" b="1" i="0" u="none">
+                <a:solidFill>
+                  <a:srgbClr val="0F766E"/>
+                </a:solidFill>
+                <a:latin typeface="Plus Jakarta Sans"/>
+              </a:rPr>
+              <a:t>Lý do lựa chọn theo Thực nghiệm</a:t>
+            </a:r>
+          </a:p>
+        </p:txBody>
+      </p:sp>
+      <p:sp>
+        <p:nvSpPr>
+          <p:cNvPr id="12" name="TextBox 11"/>
+          <p:cNvSpPr txBox="1"/>
+          <p:nvPr/>
+        </p:nvSpPr>
+        <p:spPr>
+          <a:xfrm>
+            <a:off x="809625" y="4024312"/>
+            <a:ext cx="1714500" cy="171450"/>
           </a:xfrm>
           <a:prstGeom prst="rect">
             <a:avLst/>
@@ -14901,15 +13996,177 @@
           </a:bodyPr>
           <a:lstStyle/>
           <a:p>
-            <a:pPr algn="ctr"/>
+            <a:pPr algn="l"/>
+            <a:r>
+              <a:rPr sz="1050" b="1" i="0" u="none">
+                <a:solidFill>
+                  <a:srgbClr val="115E59"/>
+                </a:solidFill>
+                <a:latin typeface="Plus Jakarta Sans"/>
+              </a:rPr>
+              <a:t>R² TEST SCORE</a:t>
+            </a:r>
+          </a:p>
+        </p:txBody>
+      </p:sp>
+      <p:sp>
+        <p:nvSpPr>
+          <p:cNvPr id="13" name="TextBox 12"/>
+          <p:cNvSpPr txBox="1"/>
+          <p:nvPr/>
+        </p:nvSpPr>
+        <p:spPr>
+          <a:xfrm>
+            <a:off x="809625" y="4195762"/>
+            <a:ext cx="1714500" cy="504825"/>
+          </a:xfrm>
+          <a:prstGeom prst="rect">
+            <a:avLst/>
+          </a:prstGeom>
+          <a:noFill/>
+        </p:spPr>
+        <p:txBody>
+          <a:bodyPr wrap="none" lIns="0" tIns="0" rIns="0" bIns="0" anchor="t">
+            <a:spAutoFit/>
+          </a:bodyPr>
+          <a:lstStyle/>
+          <a:p>
+            <a:pPr algn="l"/>
+            <a:r>
+              <a:rPr sz="3150" b="1" i="0" u="none">
+                <a:solidFill>
+                  <a:srgbClr val="0F766E"/>
+                </a:solidFill>
+                <a:latin typeface="Plus Jakarta Sans"/>
+              </a:rPr>
+              <a:t>0.9772</a:t>
+            </a:r>
+          </a:p>
+        </p:txBody>
+      </p:sp>
+      <p:sp>
+        <p:nvSpPr>
+          <p:cNvPr id="14" name="TextBox 13"/>
+          <p:cNvSpPr txBox="1"/>
+          <p:nvPr/>
+        </p:nvSpPr>
+        <p:spPr>
+          <a:xfrm>
+            <a:off x="2647950" y="4024312"/>
+            <a:ext cx="1738312" cy="171450"/>
+          </a:xfrm>
+          <a:prstGeom prst="rect">
+            <a:avLst/>
+          </a:prstGeom>
+          <a:noFill/>
+        </p:spPr>
+        <p:txBody>
+          <a:bodyPr wrap="none" lIns="0" tIns="0" rIns="0" bIns="0" anchor="t">
+            <a:spAutoFit/>
+          </a:bodyPr>
+          <a:lstStyle/>
+          <a:p>
+            <a:pPr algn="l"/>
+            <a:r>
+              <a:rPr sz="1050" b="1" i="0" u="none">
+                <a:solidFill>
+                  <a:srgbClr val="115E59"/>
+                </a:solidFill>
+                <a:latin typeface="Plus Jakarta Sans"/>
+              </a:rPr>
+              <a:t>SAI SỐ MAE</a:t>
+            </a:r>
+          </a:p>
+        </p:txBody>
+      </p:sp>
+      <p:sp>
+        <p:nvSpPr>
+          <p:cNvPr id="15" name="TextBox 14"/>
+          <p:cNvSpPr txBox="1"/>
+          <p:nvPr/>
+        </p:nvSpPr>
+        <p:spPr>
+          <a:xfrm>
+            <a:off x="2647950" y="4195762"/>
+            <a:ext cx="1738312" cy="504825"/>
+          </a:xfrm>
+          <a:prstGeom prst="rect">
+            <a:avLst/>
+          </a:prstGeom>
+          <a:noFill/>
+        </p:spPr>
+        <p:txBody>
+          <a:bodyPr wrap="none" lIns="0" tIns="0" rIns="0" bIns="0" anchor="t">
+            <a:spAutoFit/>
+          </a:bodyPr>
+          <a:lstStyle/>
+          <a:p>
+            <a:pPr algn="l"/>
+            <a:r>
+              <a:rPr sz="3150" b="1" i="0" u="none">
+                <a:solidFill>
+                  <a:srgbClr val="0F766E"/>
+                </a:solidFill>
+                <a:latin typeface="Plus Jakarta Sans"/>
+              </a:rPr>
+              <a:t>83.3 </a:t>
+            </a:r>
             <a:r>
               <a:rPr sz="1350" b="1" i="0" u="none">
                 <a:solidFill>
-                  <a:srgbClr val="0F172A"/>
-                </a:solidFill>
-                <a:latin typeface="Plus Jakarta Sans"/>
-              </a:rPr>
-              <a:t>Nginx :3000</a:t>
+                  <a:srgbClr val="0F766E"/>
+                </a:solidFill>
+                <a:latin typeface="Plus Jakarta Sans"/>
+              </a:rPr>
+              <a:t>triệu</a:t>
+            </a:r>
+          </a:p>
+        </p:txBody>
+      </p:sp>
+      <p:sp>
+        <p:nvSpPr>
+          <p:cNvPr id="16" name="TextBox 15"/>
+          <p:cNvSpPr txBox="1"/>
+          <p:nvPr/>
+        </p:nvSpPr>
+        <p:spPr>
+          <a:xfrm>
+            <a:off x="6762750" y="3181350"/>
+            <a:ext cx="4279505" cy="236347"/>
+          </a:xfrm>
+          <a:prstGeom prst="rect">
+            <a:avLst/>
+          </a:prstGeom>
+          <a:noFill/>
+        </p:spPr>
+        <p:txBody>
+          <a:bodyPr wrap="none" lIns="0" tIns="0" rIns="0" bIns="0" anchor="t">
+            <a:spAutoFit/>
+          </a:bodyPr>
+          <a:lstStyle/>
+          <a:p>
+            <a:pPr algn="l">
+              <a:lnSpc>
+                <a:spcPts val="2025"/>
+              </a:lnSpc>
+            </a:pPr>
+            <a:r>
+              <a:rPr sz="1300" b="1" i="0" u="none">
+                <a:solidFill>
+                  <a:srgbClr val="334155"/>
+                </a:solidFill>
+                <a:latin typeface="Plus Jakarta Sans"/>
+              </a:rPr>
+              <a:t>R² cao nhất (0.9772):</a:t>
+            </a:r>
+            <a:r>
+              <a:rPr sz="1300" b="0" i="0" u="none">
+                <a:solidFill>
+                  <a:srgbClr val="334155"/>
+                </a:solidFill>
+                <a:latin typeface="Plus Jakarta Sans"/>
+              </a:rPr>
+              <a:t> Giải thích tới 97.7% biến thiên của giá xe.</a:t>
             </a:r>
           </a:p>
         </p:txBody>
@@ -14922,8 +14179,56 @@
         </p:nvSpPr>
         <p:spPr>
           <a:xfrm>
-            <a:off x="255984" y="4133850"/>
-            <a:ext cx="3631406" cy="304800"/>
+            <a:off x="6762750" y="3438525"/>
+            <a:ext cx="4440446" cy="236347"/>
+          </a:xfrm>
+          <a:prstGeom prst="rect">
+            <a:avLst/>
+          </a:prstGeom>
+          <a:noFill/>
+        </p:spPr>
+        <p:txBody>
+          <a:bodyPr wrap="none" lIns="0" tIns="0" rIns="0" bIns="0" anchor="t">
+            <a:spAutoFit/>
+          </a:bodyPr>
+          <a:lstStyle/>
+          <a:p>
+            <a:pPr algn="l">
+              <a:lnSpc>
+                <a:spcPts val="2025"/>
+              </a:lnSpc>
+            </a:pPr>
+            <a:r>
+              <a:rPr sz="1300" b="1" i="0" u="none">
+                <a:solidFill>
+                  <a:srgbClr val="334155"/>
+                </a:solidFill>
+                <a:latin typeface="Plus Jakarta Sans"/>
+              </a:rPr>
+              <a:t>MAE thấp nhất (83.3 triệu):</a:t>
+            </a:r>
+            <a:r>
+              <a:rPr sz="1300" b="0" i="0" u="none">
+                <a:solidFill>
+                  <a:srgbClr val="334155"/>
+                </a:solidFill>
+                <a:latin typeface="Plus Jakarta Sans"/>
+              </a:rPr>
+              <a:t> Độ lệch dự đoán trung bình tốt nhất.</a:t>
+            </a:r>
+          </a:p>
+        </p:txBody>
+      </p:sp>
+      <p:sp>
+        <p:nvSpPr>
+          <p:cNvPr id="18" name="TextBox 17"/>
+          <p:cNvSpPr txBox="1"/>
+          <p:nvPr/>
+        </p:nvSpPr>
+        <p:spPr>
+          <a:xfrm>
+            <a:off x="6762750" y="3695700"/>
+            <a:ext cx="5553075" cy="236347"/>
           </a:xfrm>
           <a:prstGeom prst="rect">
             <a:avLst/>
@@ -14936,63 +14241,172 @@
           </a:bodyPr>
           <a:lstStyle/>
           <a:p>
-            <a:pPr algn="ctr"/>
-            <a:r>
-              <a:rPr sz="975" b="0" i="0" u="none">
-                <a:solidFill>
-                  <a:srgbClr val="64748B"/>
-                </a:solidFill>
-                <a:latin typeface="Plus Jakarta Sans"/>
-              </a:rPr>
-              <a:t>HTML / CSS / JS</a:t>
-            </a:r>
-            <a:r>
-              <a:t>
-</a:t>
-            </a:r>
-            <a:r>
-              <a:rPr sz="975" b="0" i="0" u="none">
-                <a:solidFill>
-                  <a:srgbClr val="64748B"/>
-                </a:solidFill>
-                <a:latin typeface="Plus Jakarta Sans"/>
-              </a:rPr>
-              <a:t> Form nhập thông tin xe</a:t>
-            </a:r>
-          </a:p>
-        </p:txBody>
-      </p:sp>
-      <p:sp>
-        <p:nvSpPr>
-          <p:cNvPr id="18" name="TextBox 17"/>
-          <p:cNvSpPr txBox="1"/>
-          <p:nvPr/>
-        </p:nvSpPr>
-        <p:spPr>
-          <a:xfrm>
-            <a:off x="3989784" y="3667125"/>
-            <a:ext cx="3631406" cy="171450"/>
-          </a:xfrm>
-          <a:prstGeom prst="rect">
-            <a:avLst/>
-          </a:prstGeom>
-          <a:noFill/>
-        </p:spPr>
-        <p:txBody>
-          <a:bodyPr wrap="none" lIns="0" tIns="0" rIns="0" bIns="0" anchor="t">
-            <a:spAutoFit/>
-          </a:bodyPr>
-          <a:lstStyle/>
-          <a:p>
-            <a:pPr algn="ctr"/>
-            <a:r>
-              <a:rPr sz="1050" b="1" i="0" u="none">
-                <a:solidFill>
-                  <a:srgbClr val="4F46E5"/>
-                </a:solidFill>
-                <a:latin typeface="Plus Jakarta Sans"/>
-              </a:rPr>
-              <a:t>BACKEND GATEWAY</a:t>
+            <a:pPr algn="l">
+              <a:lnSpc>
+                <a:spcPts val="2025"/>
+              </a:lnSpc>
+            </a:pPr>
+            <a:r>
+              <a:rPr sz="1300" b="1" i="0" u="none" dirty="0">
+                <a:solidFill>
+                  <a:srgbClr val="334155"/>
+                </a:solidFill>
+                <a:latin typeface="Plus Jakarta Sans"/>
+              </a:rPr>
+              <a:t>Dung </a:t>
+            </a:r>
+            <a:r>
+              <a:rPr sz="1300" b="1" i="0" u="none" dirty="0" err="1">
+                <a:solidFill>
+                  <a:srgbClr val="334155"/>
+                </a:solidFill>
+                <a:latin typeface="Plus Jakarta Sans"/>
+              </a:rPr>
+              <a:t>lượng</a:t>
+            </a:r>
+            <a:r>
+              <a:rPr sz="1300" b="1" i="0" u="none" dirty="0">
+                <a:solidFill>
+                  <a:srgbClr val="334155"/>
+                </a:solidFill>
+                <a:latin typeface="Plus Jakarta Sans"/>
+              </a:rPr>
+              <a:t> </a:t>
+            </a:r>
+            <a:r>
+              <a:rPr sz="1300" b="1" i="0" u="none" dirty="0" err="1">
+                <a:solidFill>
+                  <a:srgbClr val="334155"/>
+                </a:solidFill>
+                <a:latin typeface="Plus Jakarta Sans"/>
+              </a:rPr>
+              <a:t>cực</a:t>
+            </a:r>
+            <a:r>
+              <a:rPr sz="1300" b="1" i="0" u="none" dirty="0">
+                <a:solidFill>
+                  <a:srgbClr val="334155"/>
+                </a:solidFill>
+                <a:latin typeface="Plus Jakarta Sans"/>
+              </a:rPr>
+              <a:t> </a:t>
+            </a:r>
+            <a:r>
+              <a:rPr sz="1300" b="1" i="0" u="none" dirty="0" err="1">
+                <a:solidFill>
+                  <a:srgbClr val="334155"/>
+                </a:solidFill>
+                <a:latin typeface="Plus Jakarta Sans"/>
+              </a:rPr>
+              <a:t>nhẹ</a:t>
+            </a:r>
+            <a:r>
+              <a:rPr sz="1300" b="1" i="0" u="none" dirty="0">
+                <a:solidFill>
+                  <a:srgbClr val="334155"/>
+                </a:solidFill>
+                <a:latin typeface="Plus Jakarta Sans"/>
+              </a:rPr>
+              <a:t> (~0.18 MB):</a:t>
+            </a:r>
+            <a:r>
+              <a:rPr sz="1300" b="0" i="0" u="none" dirty="0">
+                <a:solidFill>
+                  <a:srgbClr val="334155"/>
+                </a:solidFill>
+                <a:latin typeface="Plus Jakarta Sans"/>
+              </a:rPr>
+              <a:t> </a:t>
+            </a:r>
+            <a:r>
+              <a:rPr sz="1300" b="0" i="0" u="none" dirty="0" err="1">
+                <a:solidFill>
+                  <a:srgbClr val="334155"/>
+                </a:solidFill>
+                <a:latin typeface="Plus Jakarta Sans"/>
+              </a:rPr>
+              <a:t>Dễ</a:t>
+            </a:r>
+            <a:r>
+              <a:rPr sz="1300" b="0" i="0" u="none" dirty="0">
+                <a:solidFill>
+                  <a:srgbClr val="334155"/>
+                </a:solidFill>
+                <a:latin typeface="Plus Jakarta Sans"/>
+              </a:rPr>
+              <a:t> </a:t>
+            </a:r>
+            <a:r>
+              <a:rPr sz="1300" b="0" i="0" u="none" dirty="0" err="1">
+                <a:solidFill>
+                  <a:srgbClr val="334155"/>
+                </a:solidFill>
+                <a:latin typeface="Plus Jakarta Sans"/>
+              </a:rPr>
+              <a:t>dàng</a:t>
+            </a:r>
+            <a:r>
+              <a:rPr sz="1300" b="0" i="0" u="none" dirty="0">
+                <a:solidFill>
+                  <a:srgbClr val="334155"/>
+                </a:solidFill>
+                <a:latin typeface="Plus Jakarta Sans"/>
+              </a:rPr>
+              <a:t> </a:t>
+            </a:r>
+            <a:r>
+              <a:rPr sz="1300" b="0" i="0" u="none" dirty="0" err="1">
+                <a:solidFill>
+                  <a:srgbClr val="334155"/>
+                </a:solidFill>
+                <a:latin typeface="Plus Jakarta Sans"/>
+              </a:rPr>
+              <a:t>đóng</a:t>
+            </a:r>
+            <a:r>
+              <a:rPr sz="1300" b="0" i="0" u="none" dirty="0">
+                <a:solidFill>
+                  <a:srgbClr val="334155"/>
+                </a:solidFill>
+                <a:latin typeface="Plus Jakarta Sans"/>
+              </a:rPr>
+              <a:t> </a:t>
+            </a:r>
+            <a:r>
+              <a:rPr sz="1300" b="0" i="0" u="none" dirty="0" err="1">
+                <a:solidFill>
+                  <a:srgbClr val="334155"/>
+                </a:solidFill>
+                <a:latin typeface="Plus Jakarta Sans"/>
+              </a:rPr>
+              <a:t>gói</a:t>
+            </a:r>
+            <a:r>
+              <a:rPr sz="1300" b="0" i="0" u="none" dirty="0">
+                <a:solidFill>
+                  <a:srgbClr val="334155"/>
+                </a:solidFill>
+                <a:latin typeface="Plus Jakarta Sans"/>
+              </a:rPr>
+              <a:t> </a:t>
+            </a:r>
+            <a:r>
+              <a:rPr sz="1300" b="0" i="0" u="none" dirty="0" err="1">
+                <a:solidFill>
+                  <a:srgbClr val="334155"/>
+                </a:solidFill>
+                <a:latin typeface="Plus Jakarta Sans"/>
+              </a:rPr>
+              <a:t>vào</a:t>
+            </a:r>
+            <a:r>
+              <a:rPr sz="1300" b="0" i="0" u="none" dirty="0">
+                <a:solidFill>
+                  <a:srgbClr val="334155"/>
+                </a:solidFill>
+                <a:latin typeface="Plus Jakarta Sans"/>
+              </a:rPr>
+              <a:t> Docker container.</a:t>
             </a:r>
           </a:p>
         </p:txBody>
@@ -15005,43 +14419,8 @@
         </p:nvSpPr>
         <p:spPr>
           <a:xfrm>
-            <a:off x="3989784" y="3876675"/>
-            <a:ext cx="3631406" cy="219075"/>
-          </a:xfrm>
-          <a:prstGeom prst="rect">
-            <a:avLst/>
-          </a:prstGeom>
-          <a:noFill/>
-        </p:spPr>
-        <p:txBody>
-          <a:bodyPr wrap="none" lIns="0" tIns="0" rIns="0" bIns="0" anchor="t">
-            <a:spAutoFit/>
-          </a:bodyPr>
-          <a:lstStyle/>
-          <a:p>
-            <a:pPr algn="ctr"/>
-            <a:r>
-              <a:rPr sz="1350" b="1" i="0" u="none">
-                <a:solidFill>
-                  <a:srgbClr val="0F172A"/>
-                </a:solidFill>
-                <a:latin typeface="Plus Jakarta Sans"/>
-              </a:rPr>
-              <a:t>FastAPI / Flask :8000</a:t>
-            </a:r>
-          </a:p>
-        </p:txBody>
-      </p:sp>
-      <p:sp>
-        <p:nvSpPr>
-          <p:cNvPr id="20" name="TextBox 19"/>
-          <p:cNvSpPr txBox="1"/>
-          <p:nvPr/>
-        </p:nvSpPr>
-        <p:spPr>
-          <a:xfrm>
-            <a:off x="3989784" y="4133850"/>
-            <a:ext cx="3631406" cy="304800"/>
+            <a:off x="6762750" y="4210050"/>
+            <a:ext cx="4867275" cy="236347"/>
           </a:xfrm>
           <a:prstGeom prst="rect">
             <a:avLst/>
@@ -15054,146 +14433,28 @@
           </a:bodyPr>
           <a:lstStyle/>
           <a:p>
-            <a:pPr algn="ctr"/>
-            <a:r>
-              <a:rPr sz="975" b="0" i="0" u="none">
-                <a:solidFill>
-                  <a:srgbClr val="64748B"/>
-                </a:solidFill>
-                <a:latin typeface="Plus Jakarta Sans"/>
-              </a:rPr>
-              <a:t>Validate schema · Logging</a:t>
-            </a:r>
-            <a:r>
-              <a:t>
-</a:t>
-            </a:r>
-            <a:r>
-              <a:rPr sz="975" b="0" i="0" u="none">
-                <a:solidFill>
-                  <a:srgbClr val="64748B"/>
-                </a:solidFill>
-                <a:latin typeface="Plus Jakarta Sans"/>
-              </a:rPr>
-              <a:t> Tạo request_id · Forward request</a:t>
-            </a:r>
-          </a:p>
-        </p:txBody>
-      </p:sp>
-      <p:sp>
-        <p:nvSpPr>
-          <p:cNvPr id="21" name="TextBox 20"/>
-          <p:cNvSpPr txBox="1"/>
-          <p:nvPr/>
-        </p:nvSpPr>
-        <p:spPr>
-          <a:xfrm>
-            <a:off x="7650956" y="3667125"/>
-            <a:ext cx="4357687" cy="171450"/>
-          </a:xfrm>
-          <a:prstGeom prst="rect">
-            <a:avLst/>
-          </a:prstGeom>
-          <a:noFill/>
-        </p:spPr>
-        <p:txBody>
-          <a:bodyPr wrap="none" lIns="0" tIns="0" rIns="0" bIns="0" anchor="t">
-            <a:spAutoFit/>
-          </a:bodyPr>
-          <a:lstStyle/>
-          <a:p>
-            <a:pPr algn="ctr"/>
-            <a:r>
-              <a:rPr sz="1050" b="1" i="0" u="none">
-                <a:solidFill>
-                  <a:srgbClr val="0F766E"/>
-                </a:solidFill>
-                <a:latin typeface="Plus Jakarta Sans"/>
-              </a:rPr>
-              <a:t>AI SERVICE CONTAINER</a:t>
-            </a:r>
-          </a:p>
-        </p:txBody>
-      </p:sp>
-      <p:sp>
-        <p:nvSpPr>
-          <p:cNvPr id="22" name="TextBox 21"/>
-          <p:cNvSpPr txBox="1"/>
-          <p:nvPr/>
-        </p:nvSpPr>
-        <p:spPr>
-          <a:xfrm>
-            <a:off x="7650956" y="3876675"/>
-            <a:ext cx="4357687" cy="219075"/>
-          </a:xfrm>
-          <a:prstGeom prst="rect">
-            <a:avLst/>
-          </a:prstGeom>
-          <a:noFill/>
-        </p:spPr>
-        <p:txBody>
-          <a:bodyPr wrap="none" lIns="0" tIns="0" rIns="0" bIns="0" anchor="t">
-            <a:spAutoFit/>
-          </a:bodyPr>
-          <a:lstStyle/>
-          <a:p>
-            <a:pPr algn="ctr"/>
-            <a:r>
-              <a:rPr sz="1350" b="1" i="0" u="none">
-                <a:solidFill>
-                  <a:srgbClr val="0F172A"/>
-                </a:solidFill>
-                <a:latin typeface="Plus Jakarta Sans"/>
-              </a:rPr>
-              <a:t>AI Engine :8001</a:t>
-            </a:r>
-          </a:p>
-        </p:txBody>
-      </p:sp>
-      <p:sp>
-        <p:nvSpPr>
-          <p:cNvPr id="23" name="TextBox 22"/>
-          <p:cNvSpPr txBox="1"/>
-          <p:nvPr/>
-        </p:nvSpPr>
-        <p:spPr>
-          <a:xfrm>
-            <a:off x="7650956" y="4133850"/>
-            <a:ext cx="4357687" cy="304800"/>
-          </a:xfrm>
-          <a:prstGeom prst="rect">
-            <a:avLst/>
-          </a:prstGeom>
-          <a:noFill/>
-        </p:spPr>
-        <p:txBody>
-          <a:bodyPr wrap="square" lIns="0" tIns="0" rIns="0" bIns="0" anchor="t">
-            <a:spAutoFit/>
-          </a:bodyPr>
-          <a:lstStyle/>
-          <a:p>
-            <a:pPr algn="ctr"/>
-            <a:r>
-              <a:rPr sz="975" b="0" i="0" u="none">
-                <a:solidFill>
-                  <a:srgbClr val="0F766E"/>
-                </a:solidFill>
-                <a:latin typeface="Plus Jakarta Sans"/>
-              </a:rPr>
-              <a:t>Load 4 model .joblib</a:t>
-            </a:r>
-            <a:r>
-              <a:t>
-</a:t>
-            </a:r>
-            <a:r>
-              <a:rPr sz="975" b="0" i="0" u="none">
-                <a:solidFill>
-                  <a:srgbClr val="0F766E"/>
-                </a:solidFill>
-                <a:latin typeface="Plus Jakarta Sans"/>
-              </a:rPr>
-              <a:t> SVR · Linear · RF · Decision Tree</a:t>
+            <a:pPr algn="l">
+              <a:lnSpc>
+                <a:spcPts val="2025"/>
+              </a:lnSpc>
+            </a:pPr>
+            <a:r>
+              <a:rPr sz="1300" b="1" i="0" u="none">
+                <a:solidFill>
+                  <a:srgbClr val="334155"/>
+                </a:solidFill>
+                <a:latin typeface="Plus Jakarta Sans"/>
+              </a:rPr>
+              <a:t>Suy luận siêu nhanh (~20 ms):</a:t>
+            </a:r>
+            <a:r>
+              <a:rPr sz="1300" b="0" i="0" u="none">
+                <a:solidFill>
+                  <a:srgbClr val="334155"/>
+                </a:solidFill>
+                <a:latin typeface="Plus Jakarta Sans"/>
+              </a:rPr>
+              <a:t> Sẵn sàng đáp ứng yêu cầu Real-time API.</a:t>
             </a:r>
           </a:p>
         </p:txBody>
@@ -15239,108 +14500,12 @@
         </p:nvSpPr>
         <p:spPr>
           <a:xfrm>
-            <a:off x="457200" y="2839491"/>
-            <a:ext cx="6277867" cy="1931491"/>
+            <a:off x="457200" y="2933700"/>
+            <a:ext cx="3228975" cy="1743075"/>
           </a:xfrm>
           <a:prstGeom prst="roundRect">
             <a:avLst>
-              <a:gd name="adj" fmla="val 5917"/>
-            </a:avLst>
-          </a:prstGeom>
-          <a:solidFill>
-            <a:srgbClr val="0F172A"/>
-          </a:solidFill>
-          <a:ln w="9525">
-            <a:solidFill>
-              <a:srgbClr val="E2E8F0"/>
-            </a:solidFill>
-          </a:ln>
-          <a:effectLst/>
-        </p:spPr>
-        <p:style>
-          <a:lnRef idx="1">
-            <a:schemeClr val="accent1"/>
-          </a:lnRef>
-          <a:fillRef idx="3">
-            <a:schemeClr val="accent1"/>
-          </a:fillRef>
-          <a:effectRef idx="2">
-            <a:schemeClr val="accent1"/>
-          </a:effectRef>
-          <a:fontRef idx="minor">
-            <a:schemeClr val="lt1"/>
-          </a:fontRef>
-        </p:style>
-        <p:txBody>
-          <a:bodyPr rtlCol="0" anchor="ctr"/>
-          <a:lstStyle/>
-          <a:p>
-            <a:pPr algn="ctr"/>
-            <a:endParaRPr/>
-          </a:p>
-        </p:txBody>
-      </p:sp>
-      <p:sp>
-        <p:nvSpPr>
-          <p:cNvPr id="3" name="Rounded Rectangle 2"/>
-          <p:cNvSpPr/>
-          <p:nvPr/>
-        </p:nvSpPr>
-        <p:spPr>
-          <a:xfrm>
-            <a:off x="733425" y="3401466"/>
-            <a:ext cx="5725417" cy="504825"/>
-          </a:xfrm>
-          <a:prstGeom prst="roundRect">
-            <a:avLst>
-              <a:gd name="adj" fmla="val 15094"/>
-            </a:avLst>
-          </a:prstGeom>
-          <a:solidFill>
-            <a:srgbClr val="1E293B"/>
-          </a:solidFill>
-          <a:ln>
-            <a:noFill/>
-          </a:ln>
-          <a:effectLst/>
-        </p:spPr>
-        <p:style>
-          <a:lnRef idx="1">
-            <a:schemeClr val="accent1"/>
-          </a:lnRef>
-          <a:fillRef idx="3">
-            <a:schemeClr val="accent1"/>
-          </a:fillRef>
-          <a:effectRef idx="2">
-            <a:schemeClr val="accent1"/>
-          </a:effectRef>
-          <a:fontRef idx="minor">
-            <a:schemeClr val="lt1"/>
-          </a:fontRef>
-        </p:style>
-        <p:txBody>
-          <a:bodyPr rtlCol="0" anchor="ctr"/>
-          <a:lstStyle/>
-          <a:p>
-            <a:pPr algn="ctr"/>
-            <a:endParaRPr sz="1300"/>
-          </a:p>
-        </p:txBody>
-      </p:sp>
-      <p:sp>
-        <p:nvSpPr>
-          <p:cNvPr id="4" name="Rounded Rectangle 3"/>
-          <p:cNvSpPr/>
-          <p:nvPr/>
-        </p:nvSpPr>
-        <p:spPr>
-          <a:xfrm>
-            <a:off x="6963667" y="2600325"/>
-            <a:ext cx="4771132" cy="1123950"/>
-          </a:xfrm>
-          <a:prstGeom prst="roundRect">
-            <a:avLst>
-              <a:gd name="adj" fmla="val 10169"/>
+              <a:gd name="adj" fmla="val 6557"/>
             </a:avLst>
           </a:prstGeom>
           <a:solidFill>
@@ -15372,24 +14537,24 @@
           <a:lstStyle/>
           <a:p>
             <a:pPr algn="ctr"/>
-            <a:endParaRPr sz="1300"/>
-          </a:p>
-        </p:txBody>
-      </p:sp>
-      <p:sp>
-        <p:nvSpPr>
-          <p:cNvPr id="5" name="Rounded Rectangle 4"/>
+            <a:endParaRPr/>
+          </a:p>
+        </p:txBody>
+      </p:sp>
+      <p:sp>
+        <p:nvSpPr>
+          <p:cNvPr id="3" name="Rounded Rectangle 2"/>
           <p:cNvSpPr/>
           <p:nvPr/>
         </p:nvSpPr>
         <p:spPr>
           <a:xfrm>
-            <a:off x="6963667" y="3876675"/>
-            <a:ext cx="4771132" cy="1133475"/>
+            <a:off x="4191000" y="2933700"/>
+            <a:ext cx="3228975" cy="1743075"/>
           </a:xfrm>
           <a:prstGeom prst="roundRect">
             <a:avLst>
-              <a:gd name="adj" fmla="val 10084"/>
+              <a:gd name="adj" fmla="val 6557"/>
             </a:avLst>
           </a:prstGeom>
           <a:solidFill>
@@ -15421,13 +14586,62 @@
           <a:lstStyle/>
           <a:p>
             <a:pPr algn="ctr"/>
-            <a:endParaRPr sz="1300"/>
+            <a:endParaRPr/>
+          </a:p>
+        </p:txBody>
+      </p:sp>
+      <p:sp>
+        <p:nvSpPr>
+          <p:cNvPr id="4" name="Rounded Rectangle 3"/>
+          <p:cNvSpPr/>
+          <p:nvPr/>
+        </p:nvSpPr>
+        <p:spPr>
+          <a:xfrm>
+            <a:off x="7924800" y="2933700"/>
+            <a:ext cx="3810000" cy="1743075"/>
+          </a:xfrm>
+          <a:prstGeom prst="roundRect">
+            <a:avLst>
+              <a:gd name="adj" fmla="val 6557"/>
+            </a:avLst>
+          </a:prstGeom>
+          <a:solidFill>
+            <a:srgbClr val="F0FDFA"/>
+          </a:solidFill>
+          <a:ln w="9525">
+            <a:solidFill>
+              <a:srgbClr val="99F6E4"/>
+            </a:solidFill>
+          </a:ln>
+          <a:effectLst/>
+        </p:spPr>
+        <p:style>
+          <a:lnRef idx="1">
+            <a:schemeClr val="accent1"/>
+          </a:lnRef>
+          <a:fillRef idx="3">
+            <a:schemeClr val="accent1"/>
+          </a:fillRef>
+          <a:effectRef idx="2">
+            <a:schemeClr val="accent1"/>
+          </a:effectRef>
+          <a:fontRef idx="minor">
+            <a:schemeClr val="lt1"/>
+          </a:fontRef>
+        </p:style>
+        <p:txBody>
+          <a:bodyPr rtlCol="0" anchor="ctr"/>
+          <a:lstStyle/>
+          <a:p>
+            <a:pPr algn="ctr"/>
+            <a:endParaRPr/>
           </a:p>
         </p:txBody>
       </p:sp>
       <p:pic>
         <p:nvPicPr>
-          <p:cNvPr id="6" name="Picture 5" descr="image.png"/>
+          <p:cNvPr id="5" name="Picture 4" descr="image.png"/>
           <p:cNvPicPr>
             <a:picLocks noChangeAspect="1"/>
           </p:cNvPicPr>
@@ -15441,8 +14655,32 @@
         </p:blipFill>
         <p:spPr>
           <a:xfrm>
-            <a:off x="733425" y="3115716"/>
-            <a:ext cx="219075" cy="171450"/>
+            <a:off x="3838575" y="3690937"/>
+            <a:ext cx="200025" cy="228600"/>
+          </a:xfrm>
+          <a:prstGeom prst="rect">
+            <a:avLst/>
+          </a:prstGeom>
+        </p:spPr>
+      </p:pic>
+      <p:pic>
+        <p:nvPicPr>
+          <p:cNvPr id="6" name="Picture 5" descr="image.png"/>
+          <p:cNvPicPr>
+            <a:picLocks noChangeAspect="1"/>
+          </p:cNvPicPr>
+          <p:nvPr/>
+        </p:nvPicPr>
+        <p:blipFill>
+          <a:blip r:embed="rId2"/>
+          <a:stretch>
+            <a:fillRect/>
+          </a:stretch>
+        </p:blipFill>
+        <p:spPr>
+          <a:xfrm>
+            <a:off x="7572375" y="3690937"/>
+            <a:ext cx="200025" cy="228600"/>
           </a:xfrm>
           <a:prstGeom prst="rect">
             <a:avLst/>
@@ -15465,8 +14703,8 @@
         </p:blipFill>
         <p:spPr>
           <a:xfrm>
-            <a:off x="7163692" y="2838450"/>
-            <a:ext cx="171450" cy="171450"/>
+            <a:off x="1881187" y="3171825"/>
+            <a:ext cx="381000" cy="381000"/>
           </a:xfrm>
           <a:prstGeom prst="rect">
             <a:avLst/>
@@ -15489,17 +14727,113 @@
         </p:blipFill>
         <p:spPr>
           <a:xfrm>
-            <a:off x="7163692" y="4114800"/>
-            <a:ext cx="133350" cy="171450"/>
+            <a:off x="5614987" y="3171825"/>
+            <a:ext cx="381000" cy="381000"/>
           </a:xfrm>
           <a:prstGeom prst="rect">
             <a:avLst/>
           </a:prstGeom>
         </p:spPr>
       </p:pic>
-      <p:sp>
-        <p:nvSpPr>
-          <p:cNvPr id="9" name="TextBox 8"/>
+      <p:pic>
+        <p:nvPicPr>
+          <p:cNvPr id="9" name="Picture 8" descr="image.png"/>
+          <p:cNvPicPr>
+            <a:picLocks noChangeAspect="1"/>
+          </p:cNvPicPr>
+          <p:nvPr/>
+        </p:nvPicPr>
+        <p:blipFill>
+          <a:blip r:embed="rId5"/>
+          <a:stretch>
+            <a:fillRect/>
+          </a:stretch>
+        </p:blipFill>
+        <p:spPr>
+          <a:xfrm>
+            <a:off x="9639300" y="3171825"/>
+            <a:ext cx="381000" cy="381000"/>
+          </a:xfrm>
+          <a:prstGeom prst="rect">
+            <a:avLst/>
+          </a:prstGeom>
+        </p:spPr>
+      </p:pic>
+      <p:pic>
+        <p:nvPicPr>
+          <p:cNvPr id="10" name="Picture 9" descr="image.png"/>
+          <p:cNvPicPr>
+            <a:picLocks noChangeAspect="1"/>
+          </p:cNvPicPr>
+          <p:nvPr/>
+        </p:nvPicPr>
+        <p:blipFill>
+          <a:blip r:embed="rId6"/>
+          <a:stretch>
+            <a:fillRect/>
+          </a:stretch>
+        </p:blipFill>
+        <p:spPr>
+          <a:xfrm>
+            <a:off x="1976437" y="3276600"/>
+            <a:ext cx="190500" cy="171450"/>
+          </a:xfrm>
+          <a:prstGeom prst="rect">
+            <a:avLst/>
+          </a:prstGeom>
+        </p:spPr>
+      </p:pic>
+      <p:pic>
+        <p:nvPicPr>
+          <p:cNvPr id="11" name="Picture 10" descr="image.png"/>
+          <p:cNvPicPr>
+            <a:picLocks noChangeAspect="1"/>
+          </p:cNvPicPr>
+          <p:nvPr/>
+        </p:nvPicPr>
+        <p:blipFill>
+          <a:blip r:embed="rId7"/>
+          <a:stretch>
+            <a:fillRect/>
+          </a:stretch>
+        </p:blipFill>
+        <p:spPr>
+          <a:xfrm>
+            <a:off x="5719762" y="3276600"/>
+            <a:ext cx="171450" cy="171450"/>
+          </a:xfrm>
+          <a:prstGeom prst="rect">
+            <a:avLst/>
+          </a:prstGeom>
+        </p:spPr>
+      </p:pic>
+      <p:pic>
+        <p:nvPicPr>
+          <p:cNvPr id="12" name="Picture 11" descr="image.png"/>
+          <p:cNvPicPr>
+            <a:picLocks noChangeAspect="1"/>
+          </p:cNvPicPr>
+          <p:nvPr/>
+        </p:nvPicPr>
+        <p:blipFill>
+          <a:blip r:embed="rId8"/>
+          <a:stretch>
+            <a:fillRect/>
+          </a:stretch>
+        </p:blipFill>
+        <p:spPr>
+          <a:xfrm>
+            <a:off x="9744075" y="3276600"/>
+            <a:ext cx="171450" cy="171450"/>
+          </a:xfrm>
+          <a:prstGeom prst="rect">
+            <a:avLst/>
+          </a:prstGeom>
+        </p:spPr>
+      </p:pic>
+      <p:sp>
+        <p:nvSpPr>
+          <p:cNvPr id="13" name="TextBox 12"/>
           <p:cNvSpPr txBox="1"/>
           <p:nvPr/>
         </p:nvSpPr>
@@ -15534,7 +14868,7 @@
       </p:sp>
       <p:sp>
         <p:nvSpPr>
-          <p:cNvPr id="10" name="TextBox 9"/>
+          <p:cNvPr id="14" name="TextBox 13"/>
           <p:cNvSpPr txBox="1"/>
           <p:nvPr/>
         </p:nvSpPr>
@@ -15566,21 +14900,21 @@
                 </a:solidFill>
                 <a:latin typeface="Plus Jakarta Sans"/>
               </a:rPr>
-              <a:t>Đóng gói Docker &amp; Public Deployment</a:t>
-            </a:r>
-          </a:p>
-        </p:txBody>
-      </p:sp>
-      <p:sp>
-        <p:nvSpPr>
-          <p:cNvPr id="11" name="TextBox 10"/>
+              <a:t>Kiến trúc Hệ thống — 3 Container Docker</a:t>
+            </a:r>
+          </a:p>
+        </p:txBody>
+      </p:sp>
+      <p:sp>
+        <p:nvSpPr>
+          <p:cNvPr id="15" name="TextBox 14"/>
           <p:cNvSpPr txBox="1"/>
           <p:nvPr/>
         </p:nvSpPr>
         <p:spPr>
           <a:xfrm>
-            <a:off x="733425" y="3115716"/>
-            <a:ext cx="2292422" cy="200055"/>
+            <a:off x="255984" y="3667125"/>
+            <a:ext cx="3631406" cy="171450"/>
           </a:xfrm>
           <a:prstGeom prst="rect">
             <a:avLst/>
@@ -15588,34 +14922,69 @@
           <a:noFill/>
         </p:spPr>
         <p:txBody>
-          <a:bodyPr wrap="none" lIns="276225" tIns="0" rIns="0" bIns="0" anchor="t">
+          <a:bodyPr wrap="none" lIns="0" tIns="0" rIns="0" bIns="0" anchor="t">
             <a:spAutoFit/>
           </a:bodyPr>
           <a:lstStyle/>
           <a:p>
-            <a:pPr algn="l"/>
-            <a:r>
-              <a:rPr sz="1300" b="1" i="0" u="none">
-                <a:solidFill>
-                  <a:srgbClr val="94A3B8"/>
-                </a:solidFill>
-                <a:latin typeface="Plus Jakarta Sans"/>
-              </a:rPr>
-              <a:t> DOCKER COMPOSE STARTUP</a:t>
-            </a:r>
-          </a:p>
-        </p:txBody>
-      </p:sp>
-      <p:sp>
-        <p:nvSpPr>
-          <p:cNvPr id="12" name="TextBox 11"/>
+            <a:pPr algn="ctr"/>
+            <a:r>
+              <a:rPr sz="1050" b="1" i="0" u="none">
+                <a:solidFill>
+                  <a:srgbClr val="0284C7"/>
+                </a:solidFill>
+                <a:latin typeface="Plus Jakarta Sans"/>
+              </a:rPr>
+              <a:t>FRONTEND CONTAINER</a:t>
+            </a:r>
+          </a:p>
+        </p:txBody>
+      </p:sp>
+      <p:sp>
+        <p:nvSpPr>
+          <p:cNvPr id="16" name="TextBox 15"/>
           <p:cNvSpPr txBox="1"/>
           <p:nvPr/>
         </p:nvSpPr>
         <p:spPr>
           <a:xfrm>
-            <a:off x="885825" y="3553866"/>
-            <a:ext cx="5515867" cy="200025"/>
+            <a:off x="255984" y="3876675"/>
+            <a:ext cx="3631406" cy="219075"/>
+          </a:xfrm>
+          <a:prstGeom prst="rect">
+            <a:avLst/>
+          </a:prstGeom>
+          <a:noFill/>
+        </p:spPr>
+        <p:txBody>
+          <a:bodyPr wrap="none" lIns="0" tIns="0" rIns="0" bIns="0" anchor="t">
+            <a:spAutoFit/>
+          </a:bodyPr>
+          <a:lstStyle/>
+          <a:p>
+            <a:pPr algn="ctr"/>
+            <a:r>
+              <a:rPr sz="1350" b="1" i="0" u="none">
+                <a:solidFill>
+                  <a:srgbClr val="0F172A"/>
+                </a:solidFill>
+                <a:latin typeface="Plus Jakarta Sans"/>
+              </a:rPr>
+              <a:t>Nginx :3000</a:t>
+            </a:r>
+          </a:p>
+        </p:txBody>
+      </p:sp>
+      <p:sp>
+        <p:nvSpPr>
+          <p:cNvPr id="17" name="TextBox 16"/>
+          <p:cNvSpPr txBox="1"/>
+          <p:nvPr/>
+        </p:nvSpPr>
+        <p:spPr>
+          <a:xfrm>
+            <a:off x="255984" y="4133850"/>
+            <a:ext cx="3631406" cy="304800"/>
           </a:xfrm>
           <a:prstGeom prst="rect">
             <a:avLst/>
@@ -15628,29 +14997,112 @@
           </a:bodyPr>
           <a:lstStyle/>
           <a:p>
-            <a:pPr algn="l"/>
-            <a:r>
-              <a:rPr sz="1300" b="0" i="0" u="none">
-                <a:solidFill>
-                  <a:srgbClr val="38BDF8"/>
-                </a:solidFill>
-                <a:latin typeface="JetBrains Mono"/>
-              </a:rPr>
-              <a:t>$ docker compose up --build -d</a:t>
-            </a:r>
-          </a:p>
-        </p:txBody>
-      </p:sp>
-      <p:sp>
-        <p:nvSpPr>
-          <p:cNvPr id="13" name="TextBox 12"/>
+            <a:pPr algn="ctr"/>
+            <a:r>
+              <a:rPr sz="975" b="0" i="0" u="none">
+                <a:solidFill>
+                  <a:srgbClr val="64748B"/>
+                </a:solidFill>
+                <a:latin typeface="Plus Jakarta Sans"/>
+              </a:rPr>
+              <a:t>HTML / CSS / JS</a:t>
+            </a:r>
+            <a:r>
+              <a:t>
+</a:t>
+            </a:r>
+            <a:r>
+              <a:rPr sz="975" b="0" i="0" u="none">
+                <a:solidFill>
+                  <a:srgbClr val="64748B"/>
+                </a:solidFill>
+                <a:latin typeface="Plus Jakarta Sans"/>
+              </a:rPr>
+              <a:t> Form nhập thông tin xe</a:t>
+            </a:r>
+          </a:p>
+        </p:txBody>
+      </p:sp>
+      <p:sp>
+        <p:nvSpPr>
+          <p:cNvPr id="18" name="TextBox 17"/>
           <p:cNvSpPr txBox="1"/>
           <p:nvPr/>
         </p:nvSpPr>
         <p:spPr>
           <a:xfrm>
-            <a:off x="733425" y="4058691"/>
-            <a:ext cx="5820667" cy="436066"/>
+            <a:off x="3989784" y="3667125"/>
+            <a:ext cx="3631406" cy="171450"/>
+          </a:xfrm>
+          <a:prstGeom prst="rect">
+            <a:avLst/>
+          </a:prstGeom>
+          <a:noFill/>
+        </p:spPr>
+        <p:txBody>
+          <a:bodyPr wrap="none" lIns="0" tIns="0" rIns="0" bIns="0" anchor="t">
+            <a:spAutoFit/>
+          </a:bodyPr>
+          <a:lstStyle/>
+          <a:p>
+            <a:pPr algn="ctr"/>
+            <a:r>
+              <a:rPr sz="1050" b="1" i="0" u="none">
+                <a:solidFill>
+                  <a:srgbClr val="4F46E5"/>
+                </a:solidFill>
+                <a:latin typeface="Plus Jakarta Sans"/>
+              </a:rPr>
+              <a:t>BACKEND GATEWAY</a:t>
+            </a:r>
+          </a:p>
+        </p:txBody>
+      </p:sp>
+      <p:sp>
+        <p:nvSpPr>
+          <p:cNvPr id="19" name="TextBox 18"/>
+          <p:cNvSpPr txBox="1"/>
+          <p:nvPr/>
+        </p:nvSpPr>
+        <p:spPr>
+          <a:xfrm>
+            <a:off x="3989784" y="3876675"/>
+            <a:ext cx="3631406" cy="219075"/>
+          </a:xfrm>
+          <a:prstGeom prst="rect">
+            <a:avLst/>
+          </a:prstGeom>
+          <a:noFill/>
+        </p:spPr>
+        <p:txBody>
+          <a:bodyPr wrap="none" lIns="0" tIns="0" rIns="0" bIns="0" anchor="t">
+            <a:spAutoFit/>
+          </a:bodyPr>
+          <a:lstStyle/>
+          <a:p>
+            <a:pPr algn="ctr"/>
+            <a:r>
+              <a:rPr sz="1350" b="1" i="0" u="none">
+                <a:solidFill>
+                  <a:srgbClr val="0F172A"/>
+                </a:solidFill>
+                <a:latin typeface="Plus Jakarta Sans"/>
+              </a:rPr>
+              <a:t>FastAPI / Flask :8000</a:t>
+            </a:r>
+          </a:p>
+        </p:txBody>
+      </p:sp>
+      <p:sp>
+        <p:nvSpPr>
+          <p:cNvPr id="20" name="TextBox 19"/>
+          <p:cNvSpPr txBox="1"/>
+          <p:nvPr/>
+        </p:nvSpPr>
+        <p:spPr>
+          <a:xfrm>
+            <a:off x="3989784" y="4133850"/>
+            <a:ext cx="3631406" cy="304800"/>
           </a:xfrm>
           <a:prstGeom prst="rect">
             <a:avLst/>
@@ -15663,33 +15115,42 @@
           </a:bodyPr>
           <a:lstStyle/>
           <a:p>
-            <a:pPr algn="l">
-              <a:lnSpc>
-                <a:spcPts val="1679"/>
-              </a:lnSpc>
-            </a:pPr>
-            <a:r>
-              <a:rPr sz="1300" b="0" i="0" u="none">
-                <a:solidFill>
-                  <a:srgbClr val="CBD5E1"/>
-                </a:solidFill>
-                <a:latin typeface="Plus Jakarta Sans"/>
-              </a:rPr>
-              <a:t>Tự động khởi chạy đồng thời 3 container độc lập, thiết lập mạng nội bộ bridge network cho truyền nhận dữ liệu an toàn.</a:t>
-            </a:r>
-          </a:p>
-        </p:txBody>
-      </p:sp>
-      <p:sp>
-        <p:nvSpPr>
-          <p:cNvPr id="14" name="TextBox 13"/>
+            <a:pPr algn="ctr"/>
+            <a:r>
+              <a:rPr sz="975" b="0" i="0" u="none">
+                <a:solidFill>
+                  <a:srgbClr val="64748B"/>
+                </a:solidFill>
+                <a:latin typeface="Plus Jakarta Sans"/>
+              </a:rPr>
+              <a:t>Validate schema · Logging</a:t>
+            </a:r>
+            <a:r>
+              <a:t>
+</a:t>
+            </a:r>
+            <a:r>
+              <a:rPr sz="975" b="0" i="0" u="none">
+                <a:solidFill>
+                  <a:srgbClr val="64748B"/>
+                </a:solidFill>
+                <a:latin typeface="Plus Jakarta Sans"/>
+              </a:rPr>
+              <a:t> Tạo request_id · Forward request</a:t>
+            </a:r>
+          </a:p>
+        </p:txBody>
+      </p:sp>
+      <p:sp>
+        <p:nvSpPr>
+          <p:cNvPr id="21" name="TextBox 20"/>
           <p:cNvSpPr txBox="1"/>
           <p:nvPr/>
         </p:nvSpPr>
         <p:spPr>
           <a:xfrm>
-            <a:off x="7163692" y="2800350"/>
-            <a:ext cx="1905073" cy="200055"/>
+            <a:off x="7650956" y="3667125"/>
+            <a:ext cx="4357687" cy="171450"/>
           </a:xfrm>
           <a:prstGeom prst="rect">
             <a:avLst/>
@@ -15697,34 +15158,69 @@
           <a:noFill/>
         </p:spPr>
         <p:txBody>
-          <a:bodyPr wrap="none" lIns="171450" tIns="0" rIns="0" bIns="0" anchor="t">
+          <a:bodyPr wrap="none" lIns="0" tIns="0" rIns="0" bIns="0" anchor="t">
             <a:spAutoFit/>
           </a:bodyPr>
           <a:lstStyle/>
           <a:p>
-            <a:pPr algn="l"/>
-            <a:r>
-              <a:rPr sz="1300" b="1" i="0" u="none">
+            <a:pPr algn="ctr"/>
+            <a:r>
+              <a:rPr sz="1050" b="1" i="0" u="none">
+                <a:solidFill>
+                  <a:srgbClr val="0F766E"/>
+                </a:solidFill>
+                <a:latin typeface="Plus Jakarta Sans"/>
+              </a:rPr>
+              <a:t>AI SERVICE CONTAINER</a:t>
+            </a:r>
+          </a:p>
+        </p:txBody>
+      </p:sp>
+      <p:sp>
+        <p:nvSpPr>
+          <p:cNvPr id="22" name="TextBox 21"/>
+          <p:cNvSpPr txBox="1"/>
+          <p:nvPr/>
+        </p:nvSpPr>
+        <p:spPr>
+          <a:xfrm>
+            <a:off x="7650956" y="3876675"/>
+            <a:ext cx="4357687" cy="219075"/>
+          </a:xfrm>
+          <a:prstGeom prst="rect">
+            <a:avLst/>
+          </a:prstGeom>
+          <a:noFill/>
+        </p:spPr>
+        <p:txBody>
+          <a:bodyPr wrap="none" lIns="0" tIns="0" rIns="0" bIns="0" anchor="t">
+            <a:spAutoFit/>
+          </a:bodyPr>
+          <a:lstStyle/>
+          <a:p>
+            <a:pPr algn="ctr"/>
+            <a:r>
+              <a:rPr sz="1350" b="1" i="0" u="none">
                 <a:solidFill>
                   <a:srgbClr val="0F172A"/>
                 </a:solidFill>
                 <a:latin typeface="Plus Jakarta Sans"/>
               </a:rPr>
-              <a:t>Ngrok Internet Tunneling</a:t>
-            </a:r>
-          </a:p>
-        </p:txBody>
-      </p:sp>
-      <p:sp>
-        <p:nvSpPr>
-          <p:cNvPr id="15" name="TextBox 14"/>
+              <a:t>AI Engine :8001</a:t>
+            </a:r>
+          </a:p>
+        </p:txBody>
+      </p:sp>
+      <p:sp>
+        <p:nvSpPr>
+          <p:cNvPr id="23" name="TextBox 22"/>
           <p:cNvSpPr txBox="1"/>
           <p:nvPr/>
         </p:nvSpPr>
         <p:spPr>
           <a:xfrm>
-            <a:off x="7163692" y="3095625"/>
-            <a:ext cx="4466332" cy="428625"/>
+            <a:off x="7650956" y="4133850"/>
+            <a:ext cx="4357687" cy="304800"/>
           </a:xfrm>
           <a:prstGeom prst="rect">
             <a:avLst/>
@@ -15737,93 +15233,28 @@
           </a:bodyPr>
           <a:lstStyle/>
           <a:p>
-            <a:pPr algn="l">
-              <a:lnSpc>
-                <a:spcPts val="1687"/>
-              </a:lnSpc>
-            </a:pPr>
-            <a:r>
-              <a:rPr sz="1300" b="0" i="0" u="none">
-                <a:solidFill>
-                  <a:srgbClr val="334155"/>
-                </a:solidFill>
-                <a:latin typeface="Plus Jakarta Sans"/>
-              </a:rPr>
-              <a:t>Expose ứng dụng ra Internet công cộng giúp giảng viên và người dùng tra cứu trải nghiệm thực tế mọi lúc.</a:t>
-            </a:r>
-          </a:p>
-        </p:txBody>
-      </p:sp>
-      <p:sp>
-        <p:nvSpPr>
-          <p:cNvPr id="16" name="TextBox 15"/>
-          <p:cNvSpPr txBox="1"/>
-          <p:nvPr/>
-        </p:nvSpPr>
-        <p:spPr>
-          <a:xfrm>
-            <a:off x="7163692" y="4076700"/>
-            <a:ext cx="1194686" cy="200055"/>
-          </a:xfrm>
-          <a:prstGeom prst="rect">
-            <a:avLst/>
-          </a:prstGeom>
-          <a:noFill/>
-        </p:spPr>
-        <p:txBody>
-          <a:bodyPr wrap="none" lIns="133350" tIns="0" rIns="0" bIns="0" anchor="t">
-            <a:spAutoFit/>
-          </a:bodyPr>
-          <a:lstStyle/>
-          <a:p>
-            <a:pPr algn="l"/>
-            <a:r>
-              <a:rPr sz="1300" b="1" i="0" u="none">
-                <a:solidFill>
-                  <a:srgbClr val="0F172A"/>
-                </a:solidFill>
-                <a:latin typeface="Plus Jakarta Sans"/>
-              </a:rPr>
-              <a:t>System Logging</a:t>
-            </a:r>
-          </a:p>
-        </p:txBody>
-      </p:sp>
-      <p:sp>
-        <p:nvSpPr>
-          <p:cNvPr id="17" name="TextBox 16"/>
-          <p:cNvSpPr txBox="1"/>
-          <p:nvPr/>
-        </p:nvSpPr>
-        <p:spPr>
-          <a:xfrm>
-            <a:off x="7163692" y="4371975"/>
-            <a:ext cx="4466332" cy="438150"/>
-          </a:xfrm>
-          <a:prstGeom prst="rect">
-            <a:avLst/>
-          </a:prstGeom>
-          <a:noFill/>
-        </p:spPr>
-        <p:txBody>
-          <a:bodyPr wrap="square" lIns="0" tIns="0" rIns="0" bIns="0" anchor="t">
-            <a:spAutoFit/>
-          </a:bodyPr>
-          <a:lstStyle/>
-          <a:p>
-            <a:pPr algn="l">
-              <a:lnSpc>
-                <a:spcPts val="1687"/>
-              </a:lnSpc>
-            </a:pPr>
-            <a:r>
-              <a:rPr sz="1300" b="0" i="0" u="none">
-                <a:solidFill>
-                  <a:srgbClr val="334155"/>
-                </a:solidFill>
-                <a:latin typeface="Plus Jakarta Sans"/>
-              </a:rPr>
-              <a:t>Ghi nhận lịch sử thay đổi IP tunnel công cộng tại tệp: logs/tunnel-changes.log</a:t>
+            <a:pPr algn="ctr"/>
+            <a:r>
+              <a:rPr sz="975" b="0" i="0" u="none">
+                <a:solidFill>
+                  <a:srgbClr val="0F766E"/>
+                </a:solidFill>
+                <a:latin typeface="Plus Jakarta Sans"/>
+              </a:rPr>
+              <a:t>Load 4 model .joblib</a:t>
+            </a:r>
+            <a:r>
+              <a:t>
+</a:t>
+            </a:r>
+            <a:r>
+              <a:rPr sz="975" b="0" i="0" u="none">
+                <a:solidFill>
+                  <a:srgbClr val="0F766E"/>
+                </a:solidFill>
+                <a:latin typeface="Plus Jakarta Sans"/>
+              </a:rPr>
+              <a:t> SVR · Linear · RF · Decision Tree</a:t>
             </a:r>
           </a:p>
         </p:txBody>
@@ -18028,12 +17459,108 @@
         </p:nvSpPr>
         <p:spPr>
           <a:xfrm>
-            <a:off x="457200" y="3124200"/>
-            <a:ext cx="11277600" cy="1362075"/>
+            <a:off x="457200" y="2839491"/>
+            <a:ext cx="6277867" cy="1931491"/>
           </a:xfrm>
           <a:prstGeom prst="roundRect">
             <a:avLst>
-              <a:gd name="adj" fmla="val 8391"/>
+              <a:gd name="adj" fmla="val 5917"/>
+            </a:avLst>
+          </a:prstGeom>
+          <a:solidFill>
+            <a:srgbClr val="0F172A"/>
+          </a:solidFill>
+          <a:ln w="9525">
+            <a:solidFill>
+              <a:srgbClr val="E2E8F0"/>
+            </a:solidFill>
+          </a:ln>
+          <a:effectLst/>
+        </p:spPr>
+        <p:style>
+          <a:lnRef idx="1">
+            <a:schemeClr val="accent1"/>
+          </a:lnRef>
+          <a:fillRef idx="3">
+            <a:schemeClr val="accent1"/>
+          </a:fillRef>
+          <a:effectRef idx="2">
+            <a:schemeClr val="accent1"/>
+          </a:effectRef>
+          <a:fontRef idx="minor">
+            <a:schemeClr val="lt1"/>
+          </a:fontRef>
+        </p:style>
+        <p:txBody>
+          <a:bodyPr rtlCol="0" anchor="ctr"/>
+          <a:lstStyle/>
+          <a:p>
+            <a:pPr algn="ctr"/>
+            <a:endParaRPr/>
+          </a:p>
+        </p:txBody>
+      </p:sp>
+      <p:sp>
+        <p:nvSpPr>
+          <p:cNvPr id="3" name="Rounded Rectangle 2"/>
+          <p:cNvSpPr/>
+          <p:nvPr/>
+        </p:nvSpPr>
+        <p:spPr>
+          <a:xfrm>
+            <a:off x="733425" y="3401466"/>
+            <a:ext cx="5725417" cy="504825"/>
+          </a:xfrm>
+          <a:prstGeom prst="roundRect">
+            <a:avLst>
+              <a:gd name="adj" fmla="val 15094"/>
+            </a:avLst>
+          </a:prstGeom>
+          <a:solidFill>
+            <a:srgbClr val="1E293B"/>
+          </a:solidFill>
+          <a:ln>
+            <a:noFill/>
+          </a:ln>
+          <a:effectLst/>
+        </p:spPr>
+        <p:style>
+          <a:lnRef idx="1">
+            <a:schemeClr val="accent1"/>
+          </a:lnRef>
+          <a:fillRef idx="3">
+            <a:schemeClr val="accent1"/>
+          </a:fillRef>
+          <a:effectRef idx="2">
+            <a:schemeClr val="accent1"/>
+          </a:effectRef>
+          <a:fontRef idx="minor">
+            <a:schemeClr val="lt1"/>
+          </a:fontRef>
+        </p:style>
+        <p:txBody>
+          <a:bodyPr rtlCol="0" anchor="ctr"/>
+          <a:lstStyle/>
+          <a:p>
+            <a:pPr algn="ctr"/>
+            <a:endParaRPr sz="1300"/>
+          </a:p>
+        </p:txBody>
+      </p:sp>
+      <p:sp>
+        <p:nvSpPr>
+          <p:cNvPr id="4" name="Rounded Rectangle 3"/>
+          <p:cNvSpPr/>
+          <p:nvPr/>
+        </p:nvSpPr>
+        <p:spPr>
+          <a:xfrm>
+            <a:off x="6963667" y="2600325"/>
+            <a:ext cx="4771132" cy="1123950"/>
+          </a:xfrm>
+          <a:prstGeom prst="roundRect">
+            <a:avLst>
+              <a:gd name="adj" fmla="val 10169"/>
             </a:avLst>
           </a:prstGeom>
           <a:solidFill>
@@ -18065,31 +17592,33 @@
           <a:lstStyle/>
           <a:p>
             <a:pPr algn="ctr"/>
-            <a:endParaRPr/>
-          </a:p>
-        </p:txBody>
-      </p:sp>
-      <p:sp>
-        <p:nvSpPr>
-          <p:cNvPr id="3" name="Rounded Rectangle 2"/>
+            <a:endParaRPr sz="1300"/>
+          </a:p>
+        </p:txBody>
+      </p:sp>
+      <p:sp>
+        <p:nvSpPr>
+          <p:cNvPr id="5" name="Rounded Rectangle 4"/>
           <p:cNvSpPr/>
           <p:nvPr/>
         </p:nvSpPr>
         <p:spPr>
           <a:xfrm>
-            <a:off x="1000125" y="3438525"/>
-            <a:ext cx="342900" cy="342900"/>
+            <a:off x="6963667" y="3876675"/>
+            <a:ext cx="4771132" cy="1133475"/>
           </a:xfrm>
           <a:prstGeom prst="roundRect">
             <a:avLst>
-              <a:gd name="adj" fmla="val 50000"/>
+              <a:gd name="adj" fmla="val 10084"/>
             </a:avLst>
           </a:prstGeom>
           <a:solidFill>
-            <a:srgbClr val="0F172A"/>
+            <a:srgbClr val="F8FAFC"/>
           </a:solidFill>
-          <a:ln>
-            <a:noFill/>
+          <a:ln w="9525">
+            <a:solidFill>
+              <a:srgbClr val="E2E8F0"/>
+            </a:solidFill>
           </a:ln>
           <a:effectLst/>
         </p:spPr>
@@ -18112,201 +17641,13 @@
           <a:lstStyle/>
           <a:p>
             <a:pPr algn="ctr"/>
-            <a:endParaRPr sz="1500"/>
-          </a:p>
-        </p:txBody>
-      </p:sp>
-      <p:sp>
-        <p:nvSpPr>
-          <p:cNvPr id="4" name="Rounded Rectangle 3"/>
-          <p:cNvSpPr/>
-          <p:nvPr/>
-        </p:nvSpPr>
-        <p:spPr>
-          <a:xfrm>
-            <a:off x="3326606" y="3438525"/>
-            <a:ext cx="342900" cy="342900"/>
-          </a:xfrm>
-          <a:prstGeom prst="roundRect">
-            <a:avLst>
-              <a:gd name="adj" fmla="val 50000"/>
-            </a:avLst>
-          </a:prstGeom>
-          <a:solidFill>
-            <a:srgbClr val="0284C7"/>
-          </a:solidFill>
-          <a:ln>
-            <a:noFill/>
-          </a:ln>
-          <a:effectLst/>
-        </p:spPr>
-        <p:style>
-          <a:lnRef idx="1">
-            <a:schemeClr val="accent1"/>
-          </a:lnRef>
-          <a:fillRef idx="3">
-            <a:schemeClr val="accent1"/>
-          </a:fillRef>
-          <a:effectRef idx="2">
-            <a:schemeClr val="accent1"/>
-          </a:effectRef>
-          <a:fontRef idx="minor">
-            <a:schemeClr val="lt1"/>
-          </a:fontRef>
-        </p:style>
-        <p:txBody>
-          <a:bodyPr rtlCol="0" anchor="ctr"/>
-          <a:lstStyle/>
-          <a:p>
-            <a:pPr algn="ctr"/>
-            <a:endParaRPr sz="1500"/>
-          </a:p>
-        </p:txBody>
-      </p:sp>
-      <p:sp>
-        <p:nvSpPr>
-          <p:cNvPr id="5" name="Rounded Rectangle 4"/>
-          <p:cNvSpPr/>
-          <p:nvPr/>
-        </p:nvSpPr>
-        <p:spPr>
-          <a:xfrm>
-            <a:off x="5876925" y="3438525"/>
-            <a:ext cx="342900" cy="342900"/>
-          </a:xfrm>
-          <a:prstGeom prst="roundRect">
-            <a:avLst>
-              <a:gd name="adj" fmla="val 50000"/>
-            </a:avLst>
-          </a:prstGeom>
-          <a:solidFill>
-            <a:srgbClr val="4F46E5"/>
-          </a:solidFill>
-          <a:ln>
-            <a:noFill/>
-          </a:ln>
-          <a:effectLst/>
-        </p:spPr>
-        <p:style>
-          <a:lnRef idx="1">
-            <a:schemeClr val="accent1"/>
-          </a:lnRef>
-          <a:fillRef idx="3">
-            <a:schemeClr val="accent1"/>
-          </a:fillRef>
-          <a:effectRef idx="2">
-            <a:schemeClr val="accent1"/>
-          </a:effectRef>
-          <a:fontRef idx="minor">
-            <a:schemeClr val="lt1"/>
-          </a:fontRef>
-        </p:style>
-        <p:txBody>
-          <a:bodyPr rtlCol="0" anchor="ctr"/>
-          <a:lstStyle/>
-          <a:p>
-            <a:pPr algn="ctr"/>
-            <a:endParaRPr sz="1500"/>
-          </a:p>
-        </p:txBody>
-      </p:sp>
-      <p:sp>
-        <p:nvSpPr>
-          <p:cNvPr id="6" name="Rounded Rectangle 5"/>
-          <p:cNvSpPr/>
-          <p:nvPr/>
-        </p:nvSpPr>
-        <p:spPr>
-          <a:xfrm>
-            <a:off x="8451056" y="3438525"/>
-            <a:ext cx="342900" cy="342900"/>
-          </a:xfrm>
-          <a:prstGeom prst="roundRect">
-            <a:avLst>
-              <a:gd name="adj" fmla="val 50000"/>
-            </a:avLst>
-          </a:prstGeom>
-          <a:solidFill>
-            <a:srgbClr val="0D9488"/>
-          </a:solidFill>
-          <a:ln>
-            <a:noFill/>
-          </a:ln>
-          <a:effectLst/>
-        </p:spPr>
-        <p:style>
-          <a:lnRef idx="1">
-            <a:schemeClr val="accent1"/>
-          </a:lnRef>
-          <a:fillRef idx="3">
-            <a:schemeClr val="accent1"/>
-          </a:fillRef>
-          <a:effectRef idx="2">
-            <a:schemeClr val="accent1"/>
-          </a:effectRef>
-          <a:fontRef idx="minor">
-            <a:schemeClr val="lt1"/>
-          </a:fontRef>
-        </p:style>
-        <p:txBody>
-          <a:bodyPr rtlCol="0" anchor="ctr"/>
-          <a:lstStyle/>
-          <a:p>
-            <a:pPr algn="ctr"/>
-            <a:endParaRPr sz="1500"/>
-          </a:p>
-        </p:txBody>
-      </p:sp>
-      <p:sp>
-        <p:nvSpPr>
-          <p:cNvPr id="7" name="Rounded Rectangle 6"/>
-          <p:cNvSpPr/>
-          <p:nvPr/>
-        </p:nvSpPr>
-        <p:spPr>
-          <a:xfrm>
-            <a:off x="10825162" y="3438525"/>
-            <a:ext cx="342900" cy="342900"/>
-          </a:xfrm>
-          <a:prstGeom prst="roundRect">
-            <a:avLst>
-              <a:gd name="adj" fmla="val 50000"/>
-            </a:avLst>
-          </a:prstGeom>
-          <a:solidFill>
-            <a:srgbClr val="16A34A"/>
-          </a:solidFill>
-          <a:ln>
-            <a:noFill/>
-          </a:ln>
-          <a:effectLst/>
-        </p:spPr>
-        <p:style>
-          <a:lnRef idx="1">
-            <a:schemeClr val="accent1"/>
-          </a:lnRef>
-          <a:fillRef idx="3">
-            <a:schemeClr val="accent1"/>
-          </a:fillRef>
-          <a:effectRef idx="2">
-            <a:schemeClr val="accent1"/>
-          </a:effectRef>
-          <a:fontRef idx="minor">
-            <a:schemeClr val="lt1"/>
-          </a:fontRef>
-        </p:style>
-        <p:txBody>
-          <a:bodyPr rtlCol="0" anchor="ctr"/>
-          <a:lstStyle/>
-          <a:p>
-            <a:pPr algn="ctr"/>
-            <a:endParaRPr sz="1500"/>
+            <a:endParaRPr sz="1300"/>
           </a:p>
         </p:txBody>
       </p:sp>
       <p:pic>
         <p:nvPicPr>
-          <p:cNvPr id="8" name="Picture 7" descr="image.png"/>
+          <p:cNvPr id="6" name="Picture 5" descr="image.png"/>
           <p:cNvPicPr>
             <a:picLocks noChangeAspect="1"/>
           </p:cNvPicPr>
@@ -18320,8 +17661,8 @@
         </p:blipFill>
         <p:spPr>
           <a:xfrm>
-            <a:off x="2277665" y="3729037"/>
-            <a:ext cx="95250" cy="152400"/>
+            <a:off x="733425" y="3115716"/>
+            <a:ext cx="219075" cy="171450"/>
           </a:xfrm>
           <a:prstGeom prst="rect">
             <a:avLst/>
@@ -18330,31 +17671,7 @@
       </p:pic>
       <p:pic>
         <p:nvPicPr>
-          <p:cNvPr id="9" name="Picture 8" descr="image.png"/>
-          <p:cNvPicPr>
-            <a:picLocks noChangeAspect="1"/>
-          </p:cNvPicPr>
-          <p:nvPr/>
-        </p:nvPicPr>
-        <p:blipFill>
-          <a:blip r:embed="rId2"/>
-          <a:stretch>
-            <a:fillRect/>
-          </a:stretch>
-        </p:blipFill>
-        <p:spPr>
-          <a:xfrm>
-            <a:off x="4623196" y="3729037"/>
-            <a:ext cx="95250" cy="152400"/>
-          </a:xfrm>
-          <a:prstGeom prst="rect">
-            <a:avLst/>
-          </a:prstGeom>
-        </p:spPr>
-      </p:pic>
-      <p:pic>
-        <p:nvPicPr>
-          <p:cNvPr id="10" name="Picture 9" descr="image.png"/>
+          <p:cNvPr id="7" name="Picture 6" descr="image.png"/>
           <p:cNvPicPr>
             <a:picLocks noChangeAspect="1"/>
           </p:cNvPicPr>
@@ -18368,8 +17685,8 @@
         </p:blipFill>
         <p:spPr>
           <a:xfrm>
-            <a:off x="7378303" y="3729037"/>
-            <a:ext cx="95250" cy="152400"/>
+            <a:off x="7163692" y="2838450"/>
+            <a:ext cx="171450" cy="171450"/>
           </a:xfrm>
           <a:prstGeom prst="rect">
             <a:avLst/>
@@ -18378,22 +17695,22 @@
       </p:pic>
       <p:pic>
         <p:nvPicPr>
-          <p:cNvPr id="11" name="Picture 10" descr="image.png"/>
+          <p:cNvPr id="8" name="Picture 7" descr="image.png"/>
           <p:cNvPicPr>
             <a:picLocks noChangeAspect="1"/>
           </p:cNvPicPr>
           <p:nvPr/>
         </p:nvPicPr>
         <p:blipFill>
-          <a:blip r:embed="rId3"/>
+          <a:blip r:embed="rId4"/>
           <a:stretch>
             <a:fillRect/>
           </a:stretch>
         </p:blipFill>
         <p:spPr>
           <a:xfrm>
-            <a:off x="9771459" y="3729037"/>
-            <a:ext cx="95250" cy="152400"/>
+            <a:off x="7163692" y="4114800"/>
+            <a:ext cx="133350" cy="171450"/>
           </a:xfrm>
           <a:prstGeom prst="rect">
             <a:avLst/>
@@ -18402,7 +17719,7 @@
       </p:pic>
       <p:sp>
         <p:nvSpPr>
-          <p:cNvPr id="12" name="TextBox 11"/>
+          <p:cNvPr id="9" name="TextBox 8"/>
           <p:cNvSpPr txBox="1"/>
           <p:nvPr/>
         </p:nvSpPr>
@@ -18430,14 +17747,14 @@
                 </a:solidFill>
                 <a:latin typeface="Plus Jakarta Sans"/>
               </a:rPr>
-              <a:t>CHƯƠNG 4 — LUỒNG XỬ LÝ &amp; DEMO</a:t>
-            </a:r>
-          </a:p>
-        </p:txBody>
-      </p:sp>
-      <p:sp>
-        <p:nvSpPr>
-          <p:cNvPr id="13" name="TextBox 12"/>
+              <a:t>CHƯƠNG 3 — TRIỂN KHAI HỆ THỐNG</a:t>
+            </a:r>
+          </a:p>
+        </p:txBody>
+      </p:sp>
+      <p:sp>
+        <p:nvSpPr>
+          <p:cNvPr id="10" name="TextBox 9"/>
           <p:cNvSpPr txBox="1"/>
           <p:nvPr/>
         </p:nvSpPr>
@@ -18463,130 +17780,122 @@
               </a:lnSpc>
             </a:pPr>
             <a:r>
-              <a:rPr sz="2100" b="1" i="0" u="none" dirty="0" err="1">
+              <a:rPr sz="2100" b="1" i="0" u="none">
                 <a:solidFill>
                   <a:srgbClr val="0F172A"/>
                 </a:solidFill>
                 <a:latin typeface="Plus Jakarta Sans"/>
               </a:rPr>
-              <a:t>Luồng</a:t>
-            </a:r>
-            <a:r>
-              <a:rPr sz="2100" b="1" i="0" u="none" dirty="0">
-                <a:solidFill>
-                  <a:srgbClr val="0F172A"/>
-                </a:solidFill>
-                <a:latin typeface="Plus Jakarta Sans"/>
-              </a:rPr>
-              <a:t> </a:t>
-            </a:r>
-            <a:r>
-              <a:rPr sz="2100" b="1" i="0" u="none" dirty="0" err="1">
-                <a:solidFill>
-                  <a:srgbClr val="0F172A"/>
-                </a:solidFill>
-                <a:latin typeface="Plus Jakarta Sans"/>
-              </a:rPr>
-              <a:t>Xử</a:t>
-            </a:r>
-            <a:r>
-              <a:rPr sz="2100" b="1" i="0" u="none" dirty="0">
-                <a:solidFill>
-                  <a:srgbClr val="0F172A"/>
-                </a:solidFill>
-                <a:latin typeface="Plus Jakarta Sans"/>
-              </a:rPr>
-              <a:t> </a:t>
-            </a:r>
-            <a:r>
-              <a:rPr sz="2100" b="1" i="0" u="none" dirty="0" err="1">
-                <a:solidFill>
-                  <a:srgbClr val="0F172A"/>
-                </a:solidFill>
-                <a:latin typeface="Plus Jakarta Sans"/>
-              </a:rPr>
-              <a:t>lý</a:t>
-            </a:r>
-            <a:r>
-              <a:rPr sz="2100" b="1" i="0" u="none" dirty="0">
-                <a:solidFill>
-                  <a:srgbClr val="0F172A"/>
-                </a:solidFill>
-                <a:latin typeface="Plus Jakarta Sans"/>
-              </a:rPr>
-              <a:t> </a:t>
-            </a:r>
-            <a:r>
-              <a:rPr sz="2100" b="1" i="0" u="none" dirty="0" err="1">
-                <a:solidFill>
-                  <a:srgbClr val="0F172A"/>
-                </a:solidFill>
-                <a:latin typeface="Plus Jakarta Sans"/>
-              </a:rPr>
-              <a:t>Yêu</a:t>
-            </a:r>
-            <a:r>
-              <a:rPr sz="2100" b="1" i="0" u="none" dirty="0">
-                <a:solidFill>
-                  <a:srgbClr val="0F172A"/>
-                </a:solidFill>
-                <a:latin typeface="Plus Jakarta Sans"/>
-              </a:rPr>
-              <a:t> </a:t>
-            </a:r>
-            <a:r>
-              <a:rPr sz="2100" b="1" i="0" u="none" dirty="0" err="1">
-                <a:solidFill>
-                  <a:srgbClr val="0F172A"/>
-                </a:solidFill>
-                <a:latin typeface="Plus Jakarta Sans"/>
-              </a:rPr>
-              <a:t>cầu</a:t>
-            </a:r>
-            <a:r>
-              <a:rPr sz="2100" b="1" i="0" u="none" dirty="0">
-                <a:solidFill>
-                  <a:srgbClr val="0F172A"/>
-                </a:solidFill>
-                <a:latin typeface="Plus Jakarta Sans"/>
-              </a:rPr>
-              <a:t> </a:t>
-            </a:r>
-            <a:r>
-              <a:rPr sz="2100" b="1" i="0" u="none" dirty="0" err="1">
-                <a:solidFill>
-                  <a:srgbClr val="0F172A"/>
-                </a:solidFill>
-                <a:latin typeface="Plus Jakarta Sans"/>
-              </a:rPr>
-              <a:t>Dự</a:t>
-            </a:r>
-            <a:r>
-              <a:rPr sz="2100" b="1" i="0" u="none" dirty="0">
-                <a:solidFill>
-                  <a:srgbClr val="0F172A"/>
-                </a:solidFill>
-                <a:latin typeface="Plus Jakarta Sans"/>
-              </a:rPr>
-              <a:t> </a:t>
-            </a:r>
-            <a:r>
-              <a:rPr sz="2100" b="1" i="0" u="none" dirty="0" err="1">
-                <a:solidFill>
-                  <a:srgbClr val="0F172A"/>
-                </a:solidFill>
-                <a:latin typeface="Plus Jakarta Sans"/>
-              </a:rPr>
-              <a:t>đoán</a:t>
-            </a:r>
-            <a:r>
-              <a:rPr sz="2100" b="1" i="0" u="none" dirty="0">
-                <a:solidFill>
-                  <a:srgbClr val="0F172A"/>
-                </a:solidFill>
-                <a:latin typeface="Plus Jakarta Sans"/>
-              </a:rPr>
-              <a:t> (Prediction Pipeline)</a:t>
+              <a:t>Đóng gói Docker &amp; Public Deployment</a:t>
+            </a:r>
+          </a:p>
+        </p:txBody>
+      </p:sp>
+      <p:sp>
+        <p:nvSpPr>
+          <p:cNvPr id="11" name="TextBox 10"/>
+          <p:cNvSpPr txBox="1"/>
+          <p:nvPr/>
+        </p:nvSpPr>
+        <p:spPr>
+          <a:xfrm>
+            <a:off x="733425" y="3115716"/>
+            <a:ext cx="2292422" cy="200055"/>
+          </a:xfrm>
+          <a:prstGeom prst="rect">
+            <a:avLst/>
+          </a:prstGeom>
+          <a:noFill/>
+        </p:spPr>
+        <p:txBody>
+          <a:bodyPr wrap="none" lIns="276225" tIns="0" rIns="0" bIns="0" anchor="t">
+            <a:spAutoFit/>
+          </a:bodyPr>
+          <a:lstStyle/>
+          <a:p>
+            <a:pPr algn="l"/>
+            <a:r>
+              <a:rPr sz="1300" b="1" i="0" u="none">
+                <a:solidFill>
+                  <a:srgbClr val="94A3B8"/>
+                </a:solidFill>
+                <a:latin typeface="Plus Jakarta Sans"/>
+              </a:rPr>
+              <a:t> DOCKER COMPOSE STARTUP</a:t>
+            </a:r>
+          </a:p>
+        </p:txBody>
+      </p:sp>
+      <p:sp>
+        <p:nvSpPr>
+          <p:cNvPr id="12" name="TextBox 11"/>
+          <p:cNvSpPr txBox="1"/>
+          <p:nvPr/>
+        </p:nvSpPr>
+        <p:spPr>
+          <a:xfrm>
+            <a:off x="885825" y="3553866"/>
+            <a:ext cx="5515867" cy="200025"/>
+          </a:xfrm>
+          <a:prstGeom prst="rect">
+            <a:avLst/>
+          </a:prstGeom>
+          <a:noFill/>
+        </p:spPr>
+        <p:txBody>
+          <a:bodyPr wrap="square" lIns="0" tIns="0" rIns="0" bIns="0" anchor="t">
+            <a:spAutoFit/>
+          </a:bodyPr>
+          <a:lstStyle/>
+          <a:p>
+            <a:pPr algn="l"/>
+            <a:r>
+              <a:rPr sz="1300" b="0" i="0" u="none">
+                <a:solidFill>
+                  <a:srgbClr val="38BDF8"/>
+                </a:solidFill>
+                <a:latin typeface="JetBrains Mono"/>
+              </a:rPr>
+              <a:t>$ docker compose up --build -d</a:t>
+            </a:r>
+          </a:p>
+        </p:txBody>
+      </p:sp>
+      <p:sp>
+        <p:nvSpPr>
+          <p:cNvPr id="13" name="TextBox 12"/>
+          <p:cNvSpPr txBox="1"/>
+          <p:nvPr/>
+        </p:nvSpPr>
+        <p:spPr>
+          <a:xfrm>
+            <a:off x="733425" y="4058691"/>
+            <a:ext cx="5820667" cy="436066"/>
+          </a:xfrm>
+          <a:prstGeom prst="rect">
+            <a:avLst/>
+          </a:prstGeom>
+          <a:noFill/>
+        </p:spPr>
+        <p:txBody>
+          <a:bodyPr wrap="square" lIns="0" tIns="0" rIns="0" bIns="0" anchor="t">
+            <a:spAutoFit/>
+          </a:bodyPr>
+          <a:lstStyle/>
+          <a:p>
+            <a:pPr algn="l">
+              <a:lnSpc>
+                <a:spcPts val="1679"/>
+              </a:lnSpc>
+            </a:pPr>
+            <a:r>
+              <a:rPr sz="1300" b="0" i="0" u="none">
+                <a:solidFill>
+                  <a:srgbClr val="CBD5E1"/>
+                </a:solidFill>
+                <a:latin typeface="Plus Jakarta Sans"/>
+              </a:rPr>
+              <a:t>Tự động khởi chạy đồng thời 3 container độc lập, thiết lập mạng nội bộ bridge network cho truyền nhận dữ liệu an toàn.</a:t>
             </a:r>
           </a:p>
         </p:txBody>
@@ -18599,8 +17908,8 @@
         </p:nvSpPr>
         <p:spPr>
           <a:xfrm>
-            <a:off x="857250" y="3494559"/>
-            <a:ext cx="628650" cy="230832"/>
+            <a:off x="7163692" y="2800350"/>
+            <a:ext cx="1905073" cy="200055"/>
           </a:xfrm>
           <a:prstGeom prst="rect">
             <a:avLst/>
@@ -18608,20 +17917,20 @@
           <a:noFill/>
         </p:spPr>
         <p:txBody>
-          <a:bodyPr wrap="square" lIns="0" tIns="0" rIns="0" bIns="0" anchor="ctr">
+          <a:bodyPr wrap="none" lIns="171450" tIns="0" rIns="0" bIns="0" anchor="t">
             <a:spAutoFit/>
           </a:bodyPr>
           <a:lstStyle/>
           <a:p>
-            <a:pPr algn="ctr"/>
-            <a:r>
-              <a:rPr sz="1500" b="1" i="0" u="none">
-                <a:solidFill>
-                  <a:srgbClr val="FFFFFF"/>
-                </a:solidFill>
-                <a:latin typeface="Plus Jakarta Sans"/>
-              </a:rPr>
-              <a:t>1</a:t>
+            <a:pPr algn="l"/>
+            <a:r>
+              <a:rPr sz="1300" b="1" i="0" u="none">
+                <a:solidFill>
+                  <a:srgbClr val="0F172A"/>
+                </a:solidFill>
+                <a:latin typeface="Plus Jakarta Sans"/>
+              </a:rPr>
+              <a:t>Ngrok Internet Tunneling</a:t>
             </a:r>
           </a:p>
         </p:txBody>
@@ -18634,8 +17943,8 @@
         </p:nvSpPr>
         <p:spPr>
           <a:xfrm>
-            <a:off x="694681" y="3857625"/>
-            <a:ext cx="953787" cy="230832"/>
+            <a:off x="7163692" y="3095625"/>
+            <a:ext cx="4466332" cy="428625"/>
           </a:xfrm>
           <a:prstGeom prst="rect">
             <a:avLst/>
@@ -18643,20 +17952,24 @@
           <a:noFill/>
         </p:spPr>
         <p:txBody>
-          <a:bodyPr wrap="none" lIns="0" tIns="0" rIns="0" bIns="0" anchor="t">
+          <a:bodyPr wrap="square" lIns="0" tIns="0" rIns="0" bIns="0" anchor="t">
             <a:spAutoFit/>
           </a:bodyPr>
           <a:lstStyle/>
           <a:p>
-            <a:pPr algn="ctr"/>
-            <a:r>
-              <a:rPr sz="1500" b="1" i="0" u="none">
-                <a:solidFill>
-                  <a:srgbClr val="0F172A"/>
-                </a:solidFill>
-                <a:latin typeface="Plus Jakarta Sans"/>
-              </a:rPr>
-              <a:t>Người dùng</a:t>
+            <a:pPr algn="l">
+              <a:lnSpc>
+                <a:spcPts val="1687"/>
+              </a:lnSpc>
+            </a:pPr>
+            <a:r>
+              <a:rPr sz="1300" b="0" i="0" u="none">
+                <a:solidFill>
+                  <a:srgbClr val="334155"/>
+                </a:solidFill>
+                <a:latin typeface="Plus Jakarta Sans"/>
+              </a:rPr>
+              <a:t>Expose ứng dụng ra Internet công cộng giúp giảng viên và người dùng tra cứu trải nghiệm thực tế mọi lúc.</a:t>
             </a:r>
           </a:p>
         </p:txBody>
@@ -18669,8 +17982,8 @@
         </p:nvSpPr>
         <p:spPr>
           <a:xfrm>
-            <a:off x="477603" y="4029075"/>
-            <a:ext cx="1387945" cy="230832"/>
+            <a:off x="7163692" y="4076700"/>
+            <a:ext cx="1194686" cy="200055"/>
           </a:xfrm>
           <a:prstGeom prst="rect">
             <a:avLst/>
@@ -18678,20 +17991,20 @@
           <a:noFill/>
         </p:spPr>
         <p:txBody>
-          <a:bodyPr wrap="none" lIns="0" tIns="0" rIns="0" bIns="0" anchor="t">
+          <a:bodyPr wrap="none" lIns="133350" tIns="0" rIns="0" bIns="0" anchor="t">
             <a:spAutoFit/>
           </a:bodyPr>
           <a:lstStyle/>
           <a:p>
-            <a:pPr algn="ctr"/>
-            <a:r>
-              <a:rPr sz="1500" b="0" i="0" u="none">
-                <a:solidFill>
-                  <a:srgbClr val="64748B"/>
-                </a:solidFill>
-                <a:latin typeface="Plus Jakarta Sans"/>
-              </a:rPr>
-              <a:t>Nhập thông tin xe</a:t>
+            <a:pPr algn="l"/>
+            <a:r>
+              <a:rPr sz="1300" b="1" i="0" u="none">
+                <a:solidFill>
+                  <a:srgbClr val="0F172A"/>
+                </a:solidFill>
+                <a:latin typeface="Plus Jakarta Sans"/>
+              </a:rPr>
+              <a:t>System Logging</a:t>
             </a:r>
           </a:p>
         </p:txBody>
@@ -18704,8 +18017,8 @@
         </p:nvSpPr>
         <p:spPr>
           <a:xfrm>
-            <a:off x="3183731" y="3494559"/>
-            <a:ext cx="628650" cy="230832"/>
+            <a:off x="7163692" y="4371975"/>
+            <a:ext cx="4466332" cy="438150"/>
           </a:xfrm>
           <a:prstGeom prst="rect">
             <a:avLst/>
@@ -18713,405 +18026,24 @@
           <a:noFill/>
         </p:spPr>
         <p:txBody>
-          <a:bodyPr wrap="square" lIns="0" tIns="0" rIns="0" bIns="0" anchor="ctr">
+          <a:bodyPr wrap="square" lIns="0" tIns="0" rIns="0" bIns="0" anchor="t">
             <a:spAutoFit/>
           </a:bodyPr>
           <a:lstStyle/>
           <a:p>
-            <a:pPr algn="ctr"/>
-            <a:r>
-              <a:rPr sz="1500" b="1" i="0" u="none">
-                <a:solidFill>
-                  <a:srgbClr val="FFFFFF"/>
-                </a:solidFill>
-                <a:latin typeface="Plus Jakarta Sans"/>
-              </a:rPr>
-              <a:t>2</a:t>
-            </a:r>
-          </a:p>
-        </p:txBody>
-      </p:sp>
-      <p:sp>
-        <p:nvSpPr>
-          <p:cNvPr id="18" name="TextBox 17"/>
-          <p:cNvSpPr txBox="1"/>
-          <p:nvPr/>
-        </p:nvSpPr>
-        <p:spPr>
-          <a:xfrm>
-            <a:off x="3135039" y="3857625"/>
-            <a:ext cx="726033" cy="230832"/>
-          </a:xfrm>
-          <a:prstGeom prst="rect">
-            <a:avLst/>
-          </a:prstGeom>
-          <a:noFill/>
-        </p:spPr>
-        <p:txBody>
-          <a:bodyPr wrap="none" lIns="0" tIns="0" rIns="0" bIns="0" anchor="t">
-            <a:spAutoFit/>
-          </a:bodyPr>
-          <a:lstStyle/>
-          <a:p>
-            <a:pPr algn="ctr"/>
-            <a:r>
-              <a:rPr sz="1500" b="1" i="0" u="none">
-                <a:solidFill>
-                  <a:srgbClr val="0F172A"/>
-                </a:solidFill>
-                <a:latin typeface="Plus Jakarta Sans"/>
-              </a:rPr>
-              <a:t>Frontend</a:t>
-            </a:r>
-          </a:p>
-        </p:txBody>
-      </p:sp>
-      <p:sp>
-        <p:nvSpPr>
-          <p:cNvPr id="19" name="TextBox 18"/>
-          <p:cNvSpPr txBox="1"/>
-          <p:nvPr/>
-        </p:nvSpPr>
-        <p:spPr>
-          <a:xfrm>
-            <a:off x="2810207" y="4029075"/>
-            <a:ext cx="1375698" cy="230832"/>
-          </a:xfrm>
-          <a:prstGeom prst="rect">
-            <a:avLst/>
-          </a:prstGeom>
-          <a:noFill/>
-        </p:spPr>
-        <p:txBody>
-          <a:bodyPr wrap="none" lIns="0" tIns="0" rIns="0" bIns="0" anchor="t">
-            <a:spAutoFit/>
-          </a:bodyPr>
-          <a:lstStyle/>
-          <a:p>
-            <a:pPr algn="ctr"/>
-            <a:r>
-              <a:rPr sz="1500" b="0" i="0" u="none">
-                <a:solidFill>
-                  <a:srgbClr val="64748B"/>
-                </a:solidFill>
-                <a:latin typeface="Plus Jakarta Sans"/>
-              </a:rPr>
-              <a:t>Gửi JSON Payload</a:t>
-            </a:r>
-          </a:p>
-        </p:txBody>
-      </p:sp>
-      <p:sp>
-        <p:nvSpPr>
-          <p:cNvPr id="20" name="TextBox 19"/>
-          <p:cNvSpPr txBox="1"/>
-          <p:nvPr/>
-        </p:nvSpPr>
-        <p:spPr>
-          <a:xfrm>
-            <a:off x="5734050" y="3494559"/>
-            <a:ext cx="628650" cy="230832"/>
-          </a:xfrm>
-          <a:prstGeom prst="rect">
-            <a:avLst/>
-          </a:prstGeom>
-          <a:noFill/>
-        </p:spPr>
-        <p:txBody>
-          <a:bodyPr wrap="square" lIns="0" tIns="0" rIns="0" bIns="0" anchor="ctr">
-            <a:spAutoFit/>
-          </a:bodyPr>
-          <a:lstStyle/>
-          <a:p>
-            <a:pPr algn="ctr"/>
-            <a:r>
-              <a:rPr sz="1500" b="1" i="0" u="none">
-                <a:solidFill>
-                  <a:srgbClr val="FFFFFF"/>
-                </a:solidFill>
-                <a:latin typeface="Plus Jakarta Sans"/>
-              </a:rPr>
-              <a:t>3</a:t>
-            </a:r>
-          </a:p>
-        </p:txBody>
-      </p:sp>
-      <p:sp>
-        <p:nvSpPr>
-          <p:cNvPr id="21" name="TextBox 20"/>
-          <p:cNvSpPr txBox="1"/>
-          <p:nvPr/>
-        </p:nvSpPr>
-        <p:spPr>
-          <a:xfrm>
-            <a:off x="5342187" y="3857625"/>
-            <a:ext cx="1412373" cy="230832"/>
-          </a:xfrm>
-          <a:prstGeom prst="rect">
-            <a:avLst/>
-          </a:prstGeom>
-          <a:noFill/>
-        </p:spPr>
-        <p:txBody>
-          <a:bodyPr wrap="none" lIns="0" tIns="0" rIns="0" bIns="0" anchor="t">
-            <a:spAutoFit/>
-          </a:bodyPr>
-          <a:lstStyle/>
-          <a:p>
-            <a:pPr algn="ctr"/>
-            <a:r>
-              <a:rPr sz="1500" b="1" i="0" u="none">
-                <a:solidFill>
-                  <a:srgbClr val="0F172A"/>
-                </a:solidFill>
-                <a:latin typeface="Plus Jakarta Sans"/>
-              </a:rPr>
-              <a:t>Backend Gateway</a:t>
-            </a:r>
-          </a:p>
-        </p:txBody>
-      </p:sp>
-      <p:sp>
-        <p:nvSpPr>
-          <p:cNvPr id="22" name="TextBox 21"/>
-          <p:cNvSpPr txBox="1"/>
-          <p:nvPr/>
-        </p:nvSpPr>
-        <p:spPr>
-          <a:xfrm>
-            <a:off x="5048132" y="4029075"/>
-            <a:ext cx="2000484" cy="230832"/>
-          </a:xfrm>
-          <a:prstGeom prst="rect">
-            <a:avLst/>
-          </a:prstGeom>
-          <a:noFill/>
-        </p:spPr>
-        <p:txBody>
-          <a:bodyPr wrap="none" lIns="0" tIns="0" rIns="0" bIns="0" anchor="t">
-            <a:spAutoFit/>
-          </a:bodyPr>
-          <a:lstStyle/>
-          <a:p>
-            <a:pPr algn="ctr"/>
-            <a:r>
-              <a:rPr sz="1500" b="0" i="0" u="none">
-                <a:solidFill>
-                  <a:srgbClr val="64748B"/>
-                </a:solidFill>
-                <a:latin typeface="Plus Jakarta Sans"/>
-              </a:rPr>
-              <a:t>Validate &amp; cấp request_id</a:t>
-            </a:r>
-          </a:p>
-        </p:txBody>
-      </p:sp>
-      <p:sp>
-        <p:nvSpPr>
-          <p:cNvPr id="23" name="TextBox 22"/>
-          <p:cNvSpPr txBox="1"/>
-          <p:nvPr/>
-        </p:nvSpPr>
-        <p:spPr>
-          <a:xfrm>
-            <a:off x="8308181" y="3494559"/>
-            <a:ext cx="628650" cy="230832"/>
-          </a:xfrm>
-          <a:prstGeom prst="rect">
-            <a:avLst/>
-          </a:prstGeom>
-          <a:noFill/>
-        </p:spPr>
-        <p:txBody>
-          <a:bodyPr wrap="square" lIns="0" tIns="0" rIns="0" bIns="0" anchor="ctr">
-            <a:spAutoFit/>
-          </a:bodyPr>
-          <a:lstStyle/>
-          <a:p>
-            <a:pPr algn="ctr"/>
-            <a:r>
-              <a:rPr sz="1500" b="1" i="0" u="none">
-                <a:solidFill>
-                  <a:srgbClr val="FFFFFF"/>
-                </a:solidFill>
-                <a:latin typeface="Plus Jakarta Sans"/>
-              </a:rPr>
-              <a:t>4</a:t>
-            </a:r>
-          </a:p>
-        </p:txBody>
-      </p:sp>
-      <p:sp>
-        <p:nvSpPr>
-          <p:cNvPr id="24" name="TextBox 23"/>
-          <p:cNvSpPr txBox="1"/>
-          <p:nvPr/>
-        </p:nvSpPr>
-        <p:spPr>
-          <a:xfrm>
-            <a:off x="8230539" y="3857625"/>
-            <a:ext cx="783933" cy="230832"/>
-          </a:xfrm>
-          <a:prstGeom prst="rect">
-            <a:avLst/>
-          </a:prstGeom>
-          <a:noFill/>
-        </p:spPr>
-        <p:txBody>
-          <a:bodyPr wrap="none" lIns="0" tIns="0" rIns="0" bIns="0" anchor="t">
-            <a:spAutoFit/>
-          </a:bodyPr>
-          <a:lstStyle/>
-          <a:p>
-            <a:pPr algn="ctr"/>
-            <a:r>
-              <a:rPr sz="1500" b="1" i="0" u="none">
-                <a:solidFill>
-                  <a:srgbClr val="0F172A"/>
-                </a:solidFill>
-                <a:latin typeface="Plus Jakarta Sans"/>
-              </a:rPr>
-              <a:t>AI Service</a:t>
-            </a:r>
-          </a:p>
-        </p:txBody>
-      </p:sp>
-      <p:sp>
-        <p:nvSpPr>
-          <p:cNvPr id="25" name="TextBox 24"/>
-          <p:cNvSpPr txBox="1"/>
-          <p:nvPr/>
-        </p:nvSpPr>
-        <p:spPr>
-          <a:xfrm>
-            <a:off x="7832482" y="4029075"/>
-            <a:ext cx="1580048" cy="230832"/>
-          </a:xfrm>
-          <a:prstGeom prst="rect">
-            <a:avLst/>
-          </a:prstGeom>
-          <a:noFill/>
-        </p:spPr>
-        <p:txBody>
-          <a:bodyPr wrap="none" lIns="0" tIns="0" rIns="0" bIns="0" anchor="t">
-            <a:spAutoFit/>
-          </a:bodyPr>
-          <a:lstStyle/>
-          <a:p>
-            <a:pPr algn="ctr"/>
-            <a:r>
-              <a:rPr sz="1500" b="0" i="0" u="none">
-                <a:solidFill>
-                  <a:srgbClr val="64748B"/>
-                </a:solidFill>
-                <a:latin typeface="Plus Jakarta Sans"/>
-              </a:rPr>
-              <a:t>Inference 4 Mô hình</a:t>
-            </a:r>
-          </a:p>
-        </p:txBody>
-      </p:sp>
-      <p:sp>
-        <p:nvSpPr>
-          <p:cNvPr id="26" name="TextBox 25"/>
-          <p:cNvSpPr txBox="1"/>
-          <p:nvPr/>
-        </p:nvSpPr>
-        <p:spPr>
-          <a:xfrm>
-            <a:off x="10682287" y="3494559"/>
-            <a:ext cx="628650" cy="230832"/>
-          </a:xfrm>
-          <a:prstGeom prst="rect">
-            <a:avLst/>
-          </a:prstGeom>
-          <a:noFill/>
-        </p:spPr>
-        <p:txBody>
-          <a:bodyPr wrap="square" lIns="0" tIns="0" rIns="0" bIns="0" anchor="ctr">
-            <a:spAutoFit/>
-          </a:bodyPr>
-          <a:lstStyle/>
-          <a:p>
-            <a:pPr algn="ctr"/>
-            <a:r>
-              <a:rPr sz="1500" b="1" i="0" u="none">
-                <a:solidFill>
-                  <a:srgbClr val="FFFFFF"/>
-                </a:solidFill>
-                <a:latin typeface="Plus Jakarta Sans"/>
-              </a:rPr>
-              <a:t>5</a:t>
-            </a:r>
-          </a:p>
-        </p:txBody>
-      </p:sp>
-      <p:sp>
-        <p:nvSpPr>
-          <p:cNvPr id="27" name="TextBox 26"/>
-          <p:cNvSpPr txBox="1"/>
-          <p:nvPr/>
-        </p:nvSpPr>
-        <p:spPr>
-          <a:xfrm>
-            <a:off x="10363426" y="3857625"/>
-            <a:ext cx="1266372" cy="230832"/>
-          </a:xfrm>
-          <a:prstGeom prst="rect">
-            <a:avLst/>
-          </a:prstGeom>
-          <a:noFill/>
-        </p:spPr>
-        <p:txBody>
-          <a:bodyPr wrap="none" lIns="0" tIns="0" rIns="0" bIns="0" anchor="t">
-            <a:spAutoFit/>
-          </a:bodyPr>
-          <a:lstStyle/>
-          <a:p>
-            <a:pPr algn="ctr"/>
-            <a:r>
-              <a:rPr sz="1500" b="1" i="0" u="none">
-                <a:solidFill>
-                  <a:srgbClr val="0F172A"/>
-                </a:solidFill>
-                <a:latin typeface="Plus Jakarta Sans"/>
-              </a:rPr>
-              <a:t>Kết quả So sánh</a:t>
-            </a:r>
-          </a:p>
-        </p:txBody>
-      </p:sp>
-      <p:sp>
-        <p:nvSpPr>
-          <p:cNvPr id="28" name="TextBox 27"/>
-          <p:cNvSpPr txBox="1"/>
-          <p:nvPr/>
-        </p:nvSpPr>
-        <p:spPr>
-          <a:xfrm>
-            <a:off x="10438767" y="4029075"/>
-            <a:ext cx="1115690" cy="230832"/>
-          </a:xfrm>
-          <a:prstGeom prst="rect">
-            <a:avLst/>
-          </a:prstGeom>
-          <a:noFill/>
-        </p:spPr>
-        <p:txBody>
-          <a:bodyPr wrap="none" lIns="0" tIns="0" rIns="0" bIns="0" anchor="t">
-            <a:spAutoFit/>
-          </a:bodyPr>
-          <a:lstStyle/>
-          <a:p>
-            <a:pPr algn="ctr"/>
-            <a:r>
-              <a:rPr sz="1500" b="0" i="0" u="none">
-                <a:solidFill>
-                  <a:srgbClr val="64748B"/>
-                </a:solidFill>
-                <a:latin typeface="Plus Jakarta Sans"/>
-              </a:rPr>
-              <a:t>Hiển thị lên UI</a:t>
+            <a:pPr algn="l">
+              <a:lnSpc>
+                <a:spcPts val="1687"/>
+              </a:lnSpc>
+            </a:pPr>
+            <a:r>
+              <a:rPr sz="1300" b="0" i="0" u="none">
+                <a:solidFill>
+                  <a:srgbClr val="334155"/>
+                </a:solidFill>
+                <a:latin typeface="Plus Jakarta Sans"/>
+              </a:rPr>
+              <a:t>Ghi nhận lịch sử thay đổi IP tunnel công cộng tại tệp: logs/tunnel-changes.log</a:t>
             </a:r>
           </a:p>
         </p:txBody>
@@ -19157,12 +18089,12 @@
         </p:nvSpPr>
         <p:spPr>
           <a:xfrm>
-            <a:off x="8391701" y="2356770"/>
-            <a:ext cx="3343099" cy="2396353"/>
+            <a:off x="457200" y="3124200"/>
+            <a:ext cx="11277600" cy="1362075"/>
           </a:xfrm>
           <a:prstGeom prst="roundRect">
             <a:avLst>
-              <a:gd name="adj" fmla="val 4511"/>
+              <a:gd name="adj" fmla="val 8391"/>
             </a:avLst>
           </a:prstGeom>
           <a:solidFill>
@@ -19194,13 +18126,248 @@
           <a:lstStyle/>
           <a:p>
             <a:pPr algn="ctr"/>
+            <a:endParaRPr/>
+          </a:p>
+        </p:txBody>
+      </p:sp>
+      <p:sp>
+        <p:nvSpPr>
+          <p:cNvPr id="3" name="Rounded Rectangle 2"/>
+          <p:cNvSpPr/>
+          <p:nvPr/>
+        </p:nvSpPr>
+        <p:spPr>
+          <a:xfrm>
+            <a:off x="1000125" y="3438525"/>
+            <a:ext cx="342900" cy="342900"/>
+          </a:xfrm>
+          <a:prstGeom prst="roundRect">
+            <a:avLst>
+              <a:gd name="adj" fmla="val 50000"/>
+            </a:avLst>
+          </a:prstGeom>
+          <a:solidFill>
+            <a:srgbClr val="0F172A"/>
+          </a:solidFill>
+          <a:ln>
+            <a:noFill/>
+          </a:ln>
+          <a:effectLst/>
+        </p:spPr>
+        <p:style>
+          <a:lnRef idx="1">
+            <a:schemeClr val="accent1"/>
+          </a:lnRef>
+          <a:fillRef idx="3">
+            <a:schemeClr val="accent1"/>
+          </a:fillRef>
+          <a:effectRef idx="2">
+            <a:schemeClr val="accent1"/>
+          </a:effectRef>
+          <a:fontRef idx="minor">
+            <a:schemeClr val="lt1"/>
+          </a:fontRef>
+        </p:style>
+        <p:txBody>
+          <a:bodyPr rtlCol="0" anchor="ctr"/>
+          <a:lstStyle/>
+          <a:p>
+            <a:pPr algn="ctr"/>
+            <a:endParaRPr sz="1500"/>
+          </a:p>
+        </p:txBody>
+      </p:sp>
+      <p:sp>
+        <p:nvSpPr>
+          <p:cNvPr id="4" name="Rounded Rectangle 3"/>
+          <p:cNvSpPr/>
+          <p:nvPr/>
+        </p:nvSpPr>
+        <p:spPr>
+          <a:xfrm>
+            <a:off x="3326606" y="3438525"/>
+            <a:ext cx="342900" cy="342900"/>
+          </a:xfrm>
+          <a:prstGeom prst="roundRect">
+            <a:avLst>
+              <a:gd name="adj" fmla="val 50000"/>
+            </a:avLst>
+          </a:prstGeom>
+          <a:solidFill>
+            <a:srgbClr val="0284C7"/>
+          </a:solidFill>
+          <a:ln>
+            <a:noFill/>
+          </a:ln>
+          <a:effectLst/>
+        </p:spPr>
+        <p:style>
+          <a:lnRef idx="1">
+            <a:schemeClr val="accent1"/>
+          </a:lnRef>
+          <a:fillRef idx="3">
+            <a:schemeClr val="accent1"/>
+          </a:fillRef>
+          <a:effectRef idx="2">
+            <a:schemeClr val="accent1"/>
+          </a:effectRef>
+          <a:fontRef idx="minor">
+            <a:schemeClr val="lt1"/>
+          </a:fontRef>
+        </p:style>
+        <p:txBody>
+          <a:bodyPr rtlCol="0" anchor="ctr"/>
+          <a:lstStyle/>
+          <a:p>
+            <a:pPr algn="ctr"/>
+            <a:endParaRPr sz="1500"/>
+          </a:p>
+        </p:txBody>
+      </p:sp>
+      <p:sp>
+        <p:nvSpPr>
+          <p:cNvPr id="5" name="Rounded Rectangle 4"/>
+          <p:cNvSpPr/>
+          <p:nvPr/>
+        </p:nvSpPr>
+        <p:spPr>
+          <a:xfrm>
+            <a:off x="5876925" y="3438525"/>
+            <a:ext cx="342900" cy="342900"/>
+          </a:xfrm>
+          <a:prstGeom prst="roundRect">
+            <a:avLst>
+              <a:gd name="adj" fmla="val 50000"/>
+            </a:avLst>
+          </a:prstGeom>
+          <a:solidFill>
+            <a:srgbClr val="4F46E5"/>
+          </a:solidFill>
+          <a:ln>
+            <a:noFill/>
+          </a:ln>
+          <a:effectLst/>
+        </p:spPr>
+        <p:style>
+          <a:lnRef idx="1">
+            <a:schemeClr val="accent1"/>
+          </a:lnRef>
+          <a:fillRef idx="3">
+            <a:schemeClr val="accent1"/>
+          </a:fillRef>
+          <a:effectRef idx="2">
+            <a:schemeClr val="accent1"/>
+          </a:effectRef>
+          <a:fontRef idx="minor">
+            <a:schemeClr val="lt1"/>
+          </a:fontRef>
+        </p:style>
+        <p:txBody>
+          <a:bodyPr rtlCol="0" anchor="ctr"/>
+          <a:lstStyle/>
+          <a:p>
+            <a:pPr algn="ctr"/>
+            <a:endParaRPr sz="1500"/>
+          </a:p>
+        </p:txBody>
+      </p:sp>
+      <p:sp>
+        <p:nvSpPr>
+          <p:cNvPr id="6" name="Rounded Rectangle 5"/>
+          <p:cNvSpPr/>
+          <p:nvPr/>
+        </p:nvSpPr>
+        <p:spPr>
+          <a:xfrm>
+            <a:off x="8451056" y="3438525"/>
+            <a:ext cx="342900" cy="342900"/>
+          </a:xfrm>
+          <a:prstGeom prst="roundRect">
+            <a:avLst>
+              <a:gd name="adj" fmla="val 50000"/>
+            </a:avLst>
+          </a:prstGeom>
+          <a:solidFill>
+            <a:srgbClr val="0D9488"/>
+          </a:solidFill>
+          <a:ln>
+            <a:noFill/>
+          </a:ln>
+          <a:effectLst/>
+        </p:spPr>
+        <p:style>
+          <a:lnRef idx="1">
+            <a:schemeClr val="accent1"/>
+          </a:lnRef>
+          <a:fillRef idx="3">
+            <a:schemeClr val="accent1"/>
+          </a:fillRef>
+          <a:effectRef idx="2">
+            <a:schemeClr val="accent1"/>
+          </a:effectRef>
+          <a:fontRef idx="minor">
+            <a:schemeClr val="lt1"/>
+          </a:fontRef>
+        </p:style>
+        <p:txBody>
+          <a:bodyPr rtlCol="0" anchor="ctr"/>
+          <a:lstStyle/>
+          <a:p>
+            <a:pPr algn="ctr"/>
+            <a:endParaRPr sz="1500"/>
+          </a:p>
+        </p:txBody>
+      </p:sp>
+      <p:sp>
+        <p:nvSpPr>
+          <p:cNvPr id="7" name="Rounded Rectangle 6"/>
+          <p:cNvSpPr/>
+          <p:nvPr/>
+        </p:nvSpPr>
+        <p:spPr>
+          <a:xfrm>
+            <a:off x="10825162" y="3438525"/>
+            <a:ext cx="342900" cy="342900"/>
+          </a:xfrm>
+          <a:prstGeom prst="roundRect">
+            <a:avLst>
+              <a:gd name="adj" fmla="val 50000"/>
+            </a:avLst>
+          </a:prstGeom>
+          <a:solidFill>
+            <a:srgbClr val="16A34A"/>
+          </a:solidFill>
+          <a:ln>
+            <a:noFill/>
+          </a:ln>
+          <a:effectLst/>
+        </p:spPr>
+        <p:style>
+          <a:lnRef idx="1">
+            <a:schemeClr val="accent1"/>
+          </a:lnRef>
+          <a:fillRef idx="3">
+            <a:schemeClr val="accent1"/>
+          </a:fillRef>
+          <a:effectRef idx="2">
+            <a:schemeClr val="accent1"/>
+          </a:effectRef>
+          <a:fontRef idx="minor">
+            <a:schemeClr val="lt1"/>
+          </a:fontRef>
+        </p:style>
+        <p:txBody>
+          <a:bodyPr rtlCol="0" anchor="ctr"/>
+          <a:lstStyle/>
+          <a:p>
+            <a:pPr algn="ctr"/>
             <a:endParaRPr sz="1500"/>
           </a:p>
         </p:txBody>
       </p:sp>
       <p:pic>
         <p:nvPicPr>
-          <p:cNvPr id="3" name="Picture 2" descr="image.png"/>
+          <p:cNvPr id="8" name="Picture 7" descr="image.png"/>
           <p:cNvPicPr>
             <a:picLocks noChangeAspect="1"/>
           </p:cNvPicPr>
@@ -19214,600 +18381,41 @@
         </p:blipFill>
         <p:spPr>
           <a:xfrm>
-            <a:off x="457200" y="1614487"/>
-            <a:ext cx="6283374" cy="4381500"/>
+            <a:off x="2277665" y="3729037"/>
+            <a:ext cx="95250" cy="152400"/>
           </a:xfrm>
           <a:prstGeom prst="rect">
             <a:avLst/>
           </a:prstGeom>
         </p:spPr>
       </p:pic>
-      <p:sp>
-        <p:nvSpPr>
-          <p:cNvPr id="5" name="TextBox 4"/>
-          <p:cNvSpPr txBox="1"/>
-          <p:nvPr/>
-        </p:nvSpPr>
-        <p:spPr>
-          <a:xfrm>
-            <a:off x="457200" y="381000"/>
-            <a:ext cx="11734800" cy="171450"/>
-          </a:xfrm>
-          <a:prstGeom prst="rect">
-            <a:avLst/>
-          </a:prstGeom>
-          <a:noFill/>
-        </p:spPr>
-        <p:txBody>
-          <a:bodyPr wrap="none" lIns="0" tIns="0" rIns="0" bIns="0" anchor="t">
-            <a:spAutoFit/>
-          </a:bodyPr>
-          <a:lstStyle/>
-          <a:p>
-            <a:pPr algn="l"/>
-            <a:r>
-              <a:rPr sz="1050" b="1" i="0" u="none">
-                <a:solidFill>
-                  <a:srgbClr val="0D9488"/>
-                </a:solidFill>
-                <a:latin typeface="Plus Jakarta Sans"/>
-              </a:rPr>
-              <a:t>CHƯƠNG 4 — LUỒNG XỬ LÝ &amp; DEMO</a:t>
-            </a:r>
-          </a:p>
-        </p:txBody>
-      </p:sp>
-      <p:sp>
-        <p:nvSpPr>
-          <p:cNvPr id="6" name="TextBox 5"/>
-          <p:cNvSpPr txBox="1"/>
-          <p:nvPr/>
-        </p:nvSpPr>
-        <p:spPr>
-          <a:xfrm>
-            <a:off x="457200" y="609600"/>
-            <a:ext cx="11734800" cy="333375"/>
-          </a:xfrm>
-          <a:prstGeom prst="rect">
-            <a:avLst/>
-          </a:prstGeom>
-          <a:noFill/>
-        </p:spPr>
-        <p:txBody>
-          <a:bodyPr wrap="none" lIns="0" tIns="0" rIns="0" bIns="0" anchor="t">
-            <a:spAutoFit/>
-          </a:bodyPr>
-          <a:lstStyle/>
-          <a:p>
-            <a:pPr algn="l">
-              <a:lnSpc>
-                <a:spcPts val="2625"/>
-              </a:lnSpc>
-            </a:pPr>
-            <a:r>
-              <a:rPr sz="2100" b="1" i="0" u="none">
-                <a:solidFill>
-                  <a:srgbClr val="0F172A"/>
-                </a:solidFill>
-                <a:latin typeface="Plus Jakarta Sans"/>
-              </a:rPr>
-              <a:t>Demo Giao diện Nhập liệu &amp; Ước tính</a:t>
-            </a:r>
-          </a:p>
-        </p:txBody>
-      </p:sp>
-      <p:sp>
-        <p:nvSpPr>
-          <p:cNvPr id="7" name="TextBox 6"/>
-          <p:cNvSpPr txBox="1"/>
-          <p:nvPr/>
-        </p:nvSpPr>
-        <p:spPr>
-          <a:xfrm>
-            <a:off x="8591726" y="2374065"/>
-            <a:ext cx="3028774" cy="237037"/>
-          </a:xfrm>
-          <a:prstGeom prst="rect">
-            <a:avLst/>
-          </a:prstGeom>
-          <a:noFill/>
-        </p:spPr>
-        <p:txBody>
-          <a:bodyPr wrap="square" lIns="0" tIns="0" rIns="0" bIns="0" anchor="t">
-            <a:spAutoFit/>
-          </a:bodyPr>
-          <a:lstStyle/>
-          <a:p>
-            <a:pPr algn="l"/>
-            <a:r>
-              <a:rPr sz="1500" b="1" i="0" u="none">
-                <a:solidFill>
-                  <a:srgbClr val="0D9488"/>
-                </a:solidFill>
-                <a:latin typeface="Plus Jakarta Sans"/>
-              </a:rPr>
-              <a:t>Thông tin Test thử nghiệm</a:t>
-            </a:r>
-          </a:p>
-        </p:txBody>
-      </p:sp>
-      <p:sp>
-        <p:nvSpPr>
-          <p:cNvPr id="8" name="TextBox 7"/>
-          <p:cNvSpPr txBox="1"/>
-          <p:nvPr/>
-        </p:nvSpPr>
-        <p:spPr>
-          <a:xfrm>
-            <a:off x="8591726" y="2710449"/>
-            <a:ext cx="3028774" cy="249679"/>
-          </a:xfrm>
-          <a:prstGeom prst="rect">
-            <a:avLst/>
-          </a:prstGeom>
-          <a:noFill/>
-        </p:spPr>
-        <p:txBody>
-          <a:bodyPr wrap="square" lIns="0" tIns="0" rIns="0" bIns="0" anchor="t">
-            <a:spAutoFit/>
-          </a:bodyPr>
-          <a:lstStyle/>
-          <a:p>
-            <a:pPr algn="l">
-              <a:lnSpc>
-                <a:spcPts val="2025"/>
-              </a:lnSpc>
-            </a:pPr>
-            <a:r>
-              <a:rPr sz="1500" b="1" i="0" u="none">
-                <a:solidFill>
-                  <a:srgbClr val="334155"/>
-                </a:solidFill>
-                <a:latin typeface="Plus Jakarta Sans"/>
-              </a:rPr>
-              <a:t>Thương hiệu:</a:t>
-            </a:r>
-            <a:r>
-              <a:rPr sz="1500" b="0" i="0" u="none">
-                <a:solidFill>
-                  <a:srgbClr val="334155"/>
-                </a:solidFill>
-                <a:latin typeface="Plus Jakarta Sans"/>
-              </a:rPr>
-              <a:t> Toyota</a:t>
-            </a:r>
-          </a:p>
-        </p:txBody>
-      </p:sp>
-      <p:sp>
-        <p:nvSpPr>
-          <p:cNvPr id="9" name="TextBox 8"/>
-          <p:cNvSpPr txBox="1"/>
-          <p:nvPr/>
-        </p:nvSpPr>
-        <p:spPr>
-          <a:xfrm>
-            <a:off x="8591726" y="2967624"/>
-            <a:ext cx="3028774" cy="249679"/>
-          </a:xfrm>
-          <a:prstGeom prst="rect">
-            <a:avLst/>
-          </a:prstGeom>
-          <a:noFill/>
-        </p:spPr>
-        <p:txBody>
-          <a:bodyPr wrap="square" lIns="0" tIns="0" rIns="0" bIns="0" anchor="t">
-            <a:spAutoFit/>
-          </a:bodyPr>
-          <a:lstStyle/>
-          <a:p>
-            <a:pPr algn="l">
-              <a:lnSpc>
-                <a:spcPts val="2025"/>
-              </a:lnSpc>
-            </a:pPr>
-            <a:r>
-              <a:rPr sz="1500" b="1" i="0" u="none">
-                <a:solidFill>
-                  <a:srgbClr val="334155"/>
-                </a:solidFill>
-                <a:latin typeface="Plus Jakarta Sans"/>
-              </a:rPr>
-              <a:t>Dòng xe:</a:t>
-            </a:r>
-            <a:r>
-              <a:rPr sz="1500" b="0" i="0" u="none">
-                <a:solidFill>
-                  <a:srgbClr val="334155"/>
-                </a:solidFill>
-                <a:latin typeface="Plus Jakarta Sans"/>
-              </a:rPr>
-              <a:t> Camry 2.5Q</a:t>
-            </a:r>
-          </a:p>
-        </p:txBody>
-      </p:sp>
-      <p:sp>
-        <p:nvSpPr>
-          <p:cNvPr id="10" name="TextBox 9"/>
-          <p:cNvSpPr txBox="1"/>
-          <p:nvPr/>
-        </p:nvSpPr>
-        <p:spPr>
-          <a:xfrm>
-            <a:off x="8591726" y="3224799"/>
-            <a:ext cx="3028774" cy="249679"/>
-          </a:xfrm>
-          <a:prstGeom prst="rect">
-            <a:avLst/>
-          </a:prstGeom>
-          <a:noFill/>
-        </p:spPr>
-        <p:txBody>
-          <a:bodyPr wrap="square" lIns="0" tIns="0" rIns="0" bIns="0" anchor="t">
-            <a:spAutoFit/>
-          </a:bodyPr>
-          <a:lstStyle/>
-          <a:p>
-            <a:pPr algn="l">
-              <a:lnSpc>
-                <a:spcPts val="2025"/>
-              </a:lnSpc>
-            </a:pPr>
-            <a:r>
-              <a:rPr sz="1500" b="1" i="0" u="none">
-                <a:solidFill>
-                  <a:srgbClr val="334155"/>
-                </a:solidFill>
-                <a:latin typeface="Plus Jakarta Sans"/>
-              </a:rPr>
-              <a:t>Kiểu dáng:</a:t>
-            </a:r>
-            <a:r>
-              <a:rPr sz="1500" b="0" i="0" u="none">
-                <a:solidFill>
-                  <a:srgbClr val="334155"/>
-                </a:solidFill>
-                <a:latin typeface="Plus Jakarta Sans"/>
-              </a:rPr>
-              <a:t> Sedan</a:t>
-            </a:r>
-          </a:p>
-        </p:txBody>
-      </p:sp>
-      <p:sp>
-        <p:nvSpPr>
-          <p:cNvPr id="11" name="TextBox 10"/>
-          <p:cNvSpPr txBox="1"/>
-          <p:nvPr/>
-        </p:nvSpPr>
-        <p:spPr>
-          <a:xfrm>
-            <a:off x="8591726" y="3481974"/>
-            <a:ext cx="3028774" cy="249679"/>
-          </a:xfrm>
-          <a:prstGeom prst="rect">
-            <a:avLst/>
-          </a:prstGeom>
-          <a:noFill/>
-        </p:spPr>
-        <p:txBody>
-          <a:bodyPr wrap="square" lIns="0" tIns="0" rIns="0" bIns="0" anchor="t">
-            <a:spAutoFit/>
-          </a:bodyPr>
-          <a:lstStyle/>
-          <a:p>
-            <a:pPr algn="l">
-              <a:lnSpc>
-                <a:spcPts val="2025"/>
-              </a:lnSpc>
-            </a:pPr>
-            <a:r>
-              <a:rPr sz="1500" b="1" i="0" u="none">
-                <a:solidFill>
-                  <a:srgbClr val="334155"/>
-                </a:solidFill>
-                <a:latin typeface="Plus Jakarta Sans"/>
-              </a:rPr>
-              <a:t>Năm sản xuất:</a:t>
-            </a:r>
-            <a:r>
-              <a:rPr sz="1500" b="0" i="0" u="none">
-                <a:solidFill>
-                  <a:srgbClr val="334155"/>
-                </a:solidFill>
-                <a:latin typeface="Plus Jakarta Sans"/>
-              </a:rPr>
-              <a:t> 2018</a:t>
-            </a:r>
-          </a:p>
-        </p:txBody>
-      </p:sp>
-      <p:sp>
-        <p:nvSpPr>
-          <p:cNvPr id="12" name="TextBox 11"/>
-          <p:cNvSpPr txBox="1"/>
-          <p:nvPr/>
-        </p:nvSpPr>
-        <p:spPr>
-          <a:xfrm>
-            <a:off x="8591726" y="3739149"/>
-            <a:ext cx="3028774" cy="249679"/>
-          </a:xfrm>
-          <a:prstGeom prst="rect">
-            <a:avLst/>
-          </a:prstGeom>
-          <a:noFill/>
-        </p:spPr>
-        <p:txBody>
-          <a:bodyPr wrap="square" lIns="0" tIns="0" rIns="0" bIns="0" anchor="t">
-            <a:spAutoFit/>
-          </a:bodyPr>
-          <a:lstStyle/>
-          <a:p>
-            <a:pPr algn="l">
-              <a:lnSpc>
-                <a:spcPts val="2025"/>
-              </a:lnSpc>
-            </a:pPr>
-            <a:r>
-              <a:rPr sz="1500" b="1" i="0" u="none">
-                <a:solidFill>
-                  <a:srgbClr val="334155"/>
-                </a:solidFill>
-                <a:latin typeface="Plus Jakarta Sans"/>
-              </a:rPr>
-              <a:t>Số km đã đi:</a:t>
-            </a:r>
-            <a:r>
-              <a:rPr sz="1500" b="0" i="0" u="none">
-                <a:solidFill>
-                  <a:srgbClr val="334155"/>
-                </a:solidFill>
-                <a:latin typeface="Plus Jakarta Sans"/>
-              </a:rPr>
-              <a:t> 50.000 km</a:t>
-            </a:r>
-          </a:p>
-        </p:txBody>
-      </p:sp>
-      <p:sp>
-        <p:nvSpPr>
-          <p:cNvPr id="13" name="TextBox 12"/>
-          <p:cNvSpPr txBox="1"/>
-          <p:nvPr/>
-        </p:nvSpPr>
-        <p:spPr>
-          <a:xfrm>
-            <a:off x="8591726" y="3996324"/>
-            <a:ext cx="3028774" cy="249679"/>
-          </a:xfrm>
-          <a:prstGeom prst="rect">
-            <a:avLst/>
-          </a:prstGeom>
-          <a:noFill/>
-        </p:spPr>
-        <p:txBody>
-          <a:bodyPr wrap="square" lIns="0" tIns="0" rIns="0" bIns="0" anchor="t">
-            <a:spAutoFit/>
-          </a:bodyPr>
-          <a:lstStyle/>
-          <a:p>
-            <a:pPr algn="l">
-              <a:lnSpc>
-                <a:spcPts val="2025"/>
-              </a:lnSpc>
-            </a:pPr>
-            <a:r>
-              <a:rPr sz="1500" b="1" i="0" u="none">
-                <a:solidFill>
-                  <a:srgbClr val="334155"/>
-                </a:solidFill>
-                <a:latin typeface="Plus Jakarta Sans"/>
-              </a:rPr>
-              <a:t>Xuất xứ:</a:t>
-            </a:r>
-            <a:r>
-              <a:rPr sz="1500" b="0" i="0" u="none">
-                <a:solidFill>
-                  <a:srgbClr val="334155"/>
-                </a:solidFill>
-                <a:latin typeface="Plus Jakarta Sans"/>
-              </a:rPr>
-              <a:t> Nhập khẩu</a:t>
-            </a:r>
-          </a:p>
-        </p:txBody>
-      </p:sp>
-      <p:sp>
-        <p:nvSpPr>
-          <p:cNvPr id="14" name="TextBox 13"/>
-          <p:cNvSpPr txBox="1"/>
-          <p:nvPr/>
-        </p:nvSpPr>
-        <p:spPr>
-          <a:xfrm>
-            <a:off x="8591726" y="4253499"/>
-            <a:ext cx="3028774" cy="243143"/>
-          </a:xfrm>
-          <a:prstGeom prst="rect">
-            <a:avLst/>
-          </a:prstGeom>
-          <a:noFill/>
-        </p:spPr>
-        <p:txBody>
-          <a:bodyPr wrap="square" lIns="0" tIns="0" rIns="0" bIns="0" anchor="t">
-            <a:spAutoFit/>
-          </a:bodyPr>
-          <a:lstStyle/>
-          <a:p>
-            <a:pPr algn="l">
-              <a:lnSpc>
-                <a:spcPts val="2025"/>
-              </a:lnSpc>
-            </a:pPr>
-            <a:r>
-              <a:rPr sz="1500" b="1" i="0" u="none" dirty="0" err="1">
-                <a:solidFill>
-                  <a:srgbClr val="334155"/>
-                </a:solidFill>
-                <a:latin typeface="Plus Jakarta Sans"/>
-              </a:rPr>
-              <a:t>Nhiên</a:t>
-            </a:r>
-            <a:r>
-              <a:rPr sz="1500" b="1" i="0" u="none" dirty="0">
-                <a:solidFill>
-                  <a:srgbClr val="334155"/>
-                </a:solidFill>
-                <a:latin typeface="Plus Jakarta Sans"/>
-              </a:rPr>
-              <a:t> </a:t>
-            </a:r>
-            <a:r>
-              <a:rPr sz="1500" b="1" i="0" u="none" dirty="0" err="1">
-                <a:solidFill>
-                  <a:srgbClr val="334155"/>
-                </a:solidFill>
-                <a:latin typeface="Plus Jakarta Sans"/>
-              </a:rPr>
-              <a:t>liệu</a:t>
-            </a:r>
-            <a:r>
-              <a:rPr sz="1500" b="1" i="0" u="none" dirty="0">
-                <a:solidFill>
-                  <a:srgbClr val="334155"/>
-                </a:solidFill>
-                <a:latin typeface="Plus Jakarta Sans"/>
-              </a:rPr>
-              <a:t> / </a:t>
-            </a:r>
-            <a:r>
-              <a:rPr sz="1500" b="1" i="0" u="none" dirty="0" err="1">
-                <a:solidFill>
-                  <a:srgbClr val="334155"/>
-                </a:solidFill>
-                <a:latin typeface="Plus Jakarta Sans"/>
-              </a:rPr>
-              <a:t>Hộp</a:t>
-            </a:r>
-            <a:r>
-              <a:rPr sz="1500" b="1" i="0" u="none" dirty="0">
-                <a:solidFill>
-                  <a:srgbClr val="334155"/>
-                </a:solidFill>
-                <a:latin typeface="Plus Jakarta Sans"/>
-              </a:rPr>
-              <a:t> </a:t>
-            </a:r>
-            <a:r>
-              <a:rPr sz="1500" b="1" i="0" u="none" dirty="0" err="1">
-                <a:solidFill>
-                  <a:srgbClr val="334155"/>
-                </a:solidFill>
-                <a:latin typeface="Plus Jakarta Sans"/>
-              </a:rPr>
-              <a:t>số</a:t>
-            </a:r>
-            <a:r>
-              <a:rPr sz="1500" b="1" i="0" u="none" dirty="0">
-                <a:solidFill>
-                  <a:srgbClr val="334155"/>
-                </a:solidFill>
-                <a:latin typeface="Plus Jakarta Sans"/>
-              </a:rPr>
-              <a:t>:</a:t>
-            </a:r>
-            <a:r>
-              <a:rPr sz="1500" b="0" i="0" u="none" dirty="0">
-                <a:solidFill>
-                  <a:srgbClr val="334155"/>
-                </a:solidFill>
-                <a:latin typeface="Plus Jakarta Sans"/>
-              </a:rPr>
-              <a:t> </a:t>
-            </a:r>
-            <a:r>
-              <a:rPr sz="1500" b="0" i="0" u="none" dirty="0" err="1">
-                <a:solidFill>
-                  <a:srgbClr val="334155"/>
-                </a:solidFill>
-                <a:latin typeface="Plus Jakarta Sans"/>
-              </a:rPr>
-              <a:t>Xăng</a:t>
-            </a:r>
-            <a:r>
-              <a:rPr sz="1500" b="0" i="0" u="none" dirty="0">
-                <a:solidFill>
-                  <a:srgbClr val="334155"/>
-                </a:solidFill>
-                <a:latin typeface="Plus Jakarta Sans"/>
-              </a:rPr>
-              <a:t> / </a:t>
-            </a:r>
-            <a:r>
-              <a:rPr sz="1500" b="0" i="0" u="none" dirty="0" err="1">
-                <a:solidFill>
-                  <a:srgbClr val="334155"/>
-                </a:solidFill>
-                <a:latin typeface="Plus Jakarta Sans"/>
-              </a:rPr>
-              <a:t>Số</a:t>
-            </a:r>
-            <a:r>
-              <a:rPr sz="1500" b="0" i="0" u="none" dirty="0">
-                <a:solidFill>
-                  <a:srgbClr val="334155"/>
-                </a:solidFill>
-                <a:latin typeface="Plus Jakarta Sans"/>
-              </a:rPr>
-              <a:t> </a:t>
-            </a:r>
-            <a:r>
-              <a:rPr sz="1500" b="0" i="0" u="none" dirty="0" err="1">
-                <a:solidFill>
-                  <a:srgbClr val="334155"/>
-                </a:solidFill>
-                <a:latin typeface="Plus Jakarta Sans"/>
-              </a:rPr>
-              <a:t>tự</a:t>
-            </a:r>
-            <a:r>
-              <a:rPr sz="1500" b="0" i="0" u="none" dirty="0">
-                <a:solidFill>
-                  <a:srgbClr val="334155"/>
-                </a:solidFill>
-                <a:latin typeface="Plus Jakarta Sans"/>
-              </a:rPr>
-              <a:t> </a:t>
-            </a:r>
-            <a:r>
-              <a:rPr sz="1500" b="0" i="0" u="none" dirty="0" err="1">
-                <a:solidFill>
-                  <a:srgbClr val="334155"/>
-                </a:solidFill>
-                <a:latin typeface="Plus Jakarta Sans"/>
-              </a:rPr>
-              <a:t>động</a:t>
-            </a:r>
-            <a:endParaRPr sz="1500" b="0" i="0" u="none" dirty="0">
-              <a:solidFill>
-                <a:srgbClr val="334155"/>
-              </a:solidFill>
-              <a:latin typeface="Plus Jakarta Sans"/>
-            </a:endParaRPr>
-          </a:p>
-        </p:txBody>
-      </p:sp>
       <p:pic>
         <p:nvPicPr>
-          <p:cNvPr id="16" name="Picture 15">
-            <a:extLst>
-              <a:ext uri="{FF2B5EF4-FFF2-40B4-BE49-F238E27FC236}">
-                <a16:creationId xmlns:a16="http://schemas.microsoft.com/office/drawing/2014/main" id="{57695A4F-316F-8971-D8F1-F72A27D4F868}"/>
-              </a:ext>
-            </a:extLst>
-          </p:cNvPr>
+          <p:cNvPr id="9" name="Picture 8" descr="image.png"/>
+          <p:cNvPicPr>
+            <a:picLocks noChangeAspect="1"/>
+          </p:cNvPicPr>
+          <p:nvPr/>
+        </p:nvPicPr>
+        <p:blipFill>
+          <a:blip r:embed="rId2"/>
+          <a:stretch>
+            <a:fillRect/>
+          </a:stretch>
+        </p:blipFill>
+        <p:spPr>
+          <a:xfrm>
+            <a:off x="4623196" y="3729037"/>
+            <a:ext cx="95250" cy="152400"/>
+          </a:xfrm>
+          <a:prstGeom prst="rect">
+            <a:avLst/>
+          </a:prstGeom>
+        </p:spPr>
+      </p:pic>
+      <p:pic>
+        <p:nvPicPr>
+          <p:cNvPr id="10" name="Picture 9" descr="image.png"/>
           <p:cNvPicPr>
             <a:picLocks noChangeAspect="1"/>
           </p:cNvPicPr>
@@ -19821,14 +18429,754 @@
         </p:blipFill>
         <p:spPr>
           <a:xfrm>
-            <a:off x="457200" y="944835"/>
-            <a:ext cx="7547209" cy="5784497"/>
+            <a:off x="7378303" y="3729037"/>
+            <a:ext cx="95250" cy="152400"/>
           </a:xfrm>
           <a:prstGeom prst="rect">
             <a:avLst/>
           </a:prstGeom>
         </p:spPr>
       </p:pic>
+      <p:pic>
+        <p:nvPicPr>
+          <p:cNvPr id="11" name="Picture 10" descr="image.png"/>
+          <p:cNvPicPr>
+            <a:picLocks noChangeAspect="1"/>
+          </p:cNvPicPr>
+          <p:nvPr/>
+        </p:nvPicPr>
+        <p:blipFill>
+          <a:blip r:embed="rId3"/>
+          <a:stretch>
+            <a:fillRect/>
+          </a:stretch>
+        </p:blipFill>
+        <p:spPr>
+          <a:xfrm>
+            <a:off x="9771459" y="3729037"/>
+            <a:ext cx="95250" cy="152400"/>
+          </a:xfrm>
+          <a:prstGeom prst="rect">
+            <a:avLst/>
+          </a:prstGeom>
+        </p:spPr>
+      </p:pic>
+      <p:sp>
+        <p:nvSpPr>
+          <p:cNvPr id="12" name="TextBox 11"/>
+          <p:cNvSpPr txBox="1"/>
+          <p:nvPr/>
+        </p:nvSpPr>
+        <p:spPr>
+          <a:xfrm>
+            <a:off x="457200" y="381000"/>
+            <a:ext cx="11734800" cy="171450"/>
+          </a:xfrm>
+          <a:prstGeom prst="rect">
+            <a:avLst/>
+          </a:prstGeom>
+          <a:noFill/>
+        </p:spPr>
+        <p:txBody>
+          <a:bodyPr wrap="none" lIns="0" tIns="0" rIns="0" bIns="0" anchor="t">
+            <a:spAutoFit/>
+          </a:bodyPr>
+          <a:lstStyle/>
+          <a:p>
+            <a:pPr algn="l"/>
+            <a:r>
+              <a:rPr sz="1050" b="1" i="0" u="none">
+                <a:solidFill>
+                  <a:srgbClr val="0D9488"/>
+                </a:solidFill>
+                <a:latin typeface="Plus Jakarta Sans"/>
+              </a:rPr>
+              <a:t>CHƯƠNG 4 — LUỒNG XỬ LÝ &amp; DEMO</a:t>
+            </a:r>
+          </a:p>
+        </p:txBody>
+      </p:sp>
+      <p:sp>
+        <p:nvSpPr>
+          <p:cNvPr id="13" name="TextBox 12"/>
+          <p:cNvSpPr txBox="1"/>
+          <p:nvPr/>
+        </p:nvSpPr>
+        <p:spPr>
+          <a:xfrm>
+            <a:off x="457200" y="609600"/>
+            <a:ext cx="11734800" cy="333375"/>
+          </a:xfrm>
+          <a:prstGeom prst="rect">
+            <a:avLst/>
+          </a:prstGeom>
+          <a:noFill/>
+        </p:spPr>
+        <p:txBody>
+          <a:bodyPr wrap="none" lIns="0" tIns="0" rIns="0" bIns="0" anchor="t">
+            <a:spAutoFit/>
+          </a:bodyPr>
+          <a:lstStyle/>
+          <a:p>
+            <a:pPr algn="l">
+              <a:lnSpc>
+                <a:spcPts val="2625"/>
+              </a:lnSpc>
+            </a:pPr>
+            <a:r>
+              <a:rPr sz="2100" b="1" i="0" u="none" dirty="0" err="1">
+                <a:solidFill>
+                  <a:srgbClr val="0F172A"/>
+                </a:solidFill>
+                <a:latin typeface="Plus Jakarta Sans"/>
+              </a:rPr>
+              <a:t>Luồng</a:t>
+            </a:r>
+            <a:r>
+              <a:rPr sz="2100" b="1" i="0" u="none" dirty="0">
+                <a:solidFill>
+                  <a:srgbClr val="0F172A"/>
+                </a:solidFill>
+                <a:latin typeface="Plus Jakarta Sans"/>
+              </a:rPr>
+              <a:t> </a:t>
+            </a:r>
+            <a:r>
+              <a:rPr sz="2100" b="1" i="0" u="none" dirty="0" err="1">
+                <a:solidFill>
+                  <a:srgbClr val="0F172A"/>
+                </a:solidFill>
+                <a:latin typeface="Plus Jakarta Sans"/>
+              </a:rPr>
+              <a:t>Xử</a:t>
+            </a:r>
+            <a:r>
+              <a:rPr sz="2100" b="1" i="0" u="none" dirty="0">
+                <a:solidFill>
+                  <a:srgbClr val="0F172A"/>
+                </a:solidFill>
+                <a:latin typeface="Plus Jakarta Sans"/>
+              </a:rPr>
+              <a:t> </a:t>
+            </a:r>
+            <a:r>
+              <a:rPr sz="2100" b="1" i="0" u="none" dirty="0" err="1">
+                <a:solidFill>
+                  <a:srgbClr val="0F172A"/>
+                </a:solidFill>
+                <a:latin typeface="Plus Jakarta Sans"/>
+              </a:rPr>
+              <a:t>lý</a:t>
+            </a:r>
+            <a:r>
+              <a:rPr sz="2100" b="1" i="0" u="none" dirty="0">
+                <a:solidFill>
+                  <a:srgbClr val="0F172A"/>
+                </a:solidFill>
+                <a:latin typeface="Plus Jakarta Sans"/>
+              </a:rPr>
+              <a:t> </a:t>
+            </a:r>
+            <a:r>
+              <a:rPr sz="2100" b="1" i="0" u="none" dirty="0" err="1">
+                <a:solidFill>
+                  <a:srgbClr val="0F172A"/>
+                </a:solidFill>
+                <a:latin typeface="Plus Jakarta Sans"/>
+              </a:rPr>
+              <a:t>Yêu</a:t>
+            </a:r>
+            <a:r>
+              <a:rPr sz="2100" b="1" i="0" u="none" dirty="0">
+                <a:solidFill>
+                  <a:srgbClr val="0F172A"/>
+                </a:solidFill>
+                <a:latin typeface="Plus Jakarta Sans"/>
+              </a:rPr>
+              <a:t> </a:t>
+            </a:r>
+            <a:r>
+              <a:rPr sz="2100" b="1" i="0" u="none" dirty="0" err="1">
+                <a:solidFill>
+                  <a:srgbClr val="0F172A"/>
+                </a:solidFill>
+                <a:latin typeface="Plus Jakarta Sans"/>
+              </a:rPr>
+              <a:t>cầu</a:t>
+            </a:r>
+            <a:r>
+              <a:rPr sz="2100" b="1" i="0" u="none" dirty="0">
+                <a:solidFill>
+                  <a:srgbClr val="0F172A"/>
+                </a:solidFill>
+                <a:latin typeface="Plus Jakarta Sans"/>
+              </a:rPr>
+              <a:t> </a:t>
+            </a:r>
+            <a:r>
+              <a:rPr sz="2100" b="1" i="0" u="none" dirty="0" err="1">
+                <a:solidFill>
+                  <a:srgbClr val="0F172A"/>
+                </a:solidFill>
+                <a:latin typeface="Plus Jakarta Sans"/>
+              </a:rPr>
+              <a:t>Dự</a:t>
+            </a:r>
+            <a:r>
+              <a:rPr sz="2100" b="1" i="0" u="none" dirty="0">
+                <a:solidFill>
+                  <a:srgbClr val="0F172A"/>
+                </a:solidFill>
+                <a:latin typeface="Plus Jakarta Sans"/>
+              </a:rPr>
+              <a:t> </a:t>
+            </a:r>
+            <a:r>
+              <a:rPr sz="2100" b="1" i="0" u="none" dirty="0" err="1">
+                <a:solidFill>
+                  <a:srgbClr val="0F172A"/>
+                </a:solidFill>
+                <a:latin typeface="Plus Jakarta Sans"/>
+              </a:rPr>
+              <a:t>đoán</a:t>
+            </a:r>
+            <a:r>
+              <a:rPr sz="2100" b="1" i="0" u="none" dirty="0">
+                <a:solidFill>
+                  <a:srgbClr val="0F172A"/>
+                </a:solidFill>
+                <a:latin typeface="Plus Jakarta Sans"/>
+              </a:rPr>
+              <a:t> (Prediction Pipeline)</a:t>
+            </a:r>
+          </a:p>
+        </p:txBody>
+      </p:sp>
+      <p:sp>
+        <p:nvSpPr>
+          <p:cNvPr id="14" name="TextBox 13"/>
+          <p:cNvSpPr txBox="1"/>
+          <p:nvPr/>
+        </p:nvSpPr>
+        <p:spPr>
+          <a:xfrm>
+            <a:off x="857250" y="3494559"/>
+            <a:ext cx="628650" cy="230832"/>
+          </a:xfrm>
+          <a:prstGeom prst="rect">
+            <a:avLst/>
+          </a:prstGeom>
+          <a:noFill/>
+        </p:spPr>
+        <p:txBody>
+          <a:bodyPr wrap="square" lIns="0" tIns="0" rIns="0" bIns="0" anchor="ctr">
+            <a:spAutoFit/>
+          </a:bodyPr>
+          <a:lstStyle/>
+          <a:p>
+            <a:pPr algn="ctr"/>
+            <a:r>
+              <a:rPr sz="1500" b="1" i="0" u="none">
+                <a:solidFill>
+                  <a:srgbClr val="FFFFFF"/>
+                </a:solidFill>
+                <a:latin typeface="Plus Jakarta Sans"/>
+              </a:rPr>
+              <a:t>1</a:t>
+            </a:r>
+          </a:p>
+        </p:txBody>
+      </p:sp>
+      <p:sp>
+        <p:nvSpPr>
+          <p:cNvPr id="15" name="TextBox 14"/>
+          <p:cNvSpPr txBox="1"/>
+          <p:nvPr/>
+        </p:nvSpPr>
+        <p:spPr>
+          <a:xfrm>
+            <a:off x="694681" y="3857625"/>
+            <a:ext cx="953787" cy="230832"/>
+          </a:xfrm>
+          <a:prstGeom prst="rect">
+            <a:avLst/>
+          </a:prstGeom>
+          <a:noFill/>
+        </p:spPr>
+        <p:txBody>
+          <a:bodyPr wrap="none" lIns="0" tIns="0" rIns="0" bIns="0" anchor="t">
+            <a:spAutoFit/>
+          </a:bodyPr>
+          <a:lstStyle/>
+          <a:p>
+            <a:pPr algn="ctr"/>
+            <a:r>
+              <a:rPr sz="1500" b="1" i="0" u="none">
+                <a:solidFill>
+                  <a:srgbClr val="0F172A"/>
+                </a:solidFill>
+                <a:latin typeface="Plus Jakarta Sans"/>
+              </a:rPr>
+              <a:t>Người dùng</a:t>
+            </a:r>
+          </a:p>
+        </p:txBody>
+      </p:sp>
+      <p:sp>
+        <p:nvSpPr>
+          <p:cNvPr id="16" name="TextBox 15"/>
+          <p:cNvSpPr txBox="1"/>
+          <p:nvPr/>
+        </p:nvSpPr>
+        <p:spPr>
+          <a:xfrm>
+            <a:off x="477603" y="4029075"/>
+            <a:ext cx="1387945" cy="230832"/>
+          </a:xfrm>
+          <a:prstGeom prst="rect">
+            <a:avLst/>
+          </a:prstGeom>
+          <a:noFill/>
+        </p:spPr>
+        <p:txBody>
+          <a:bodyPr wrap="none" lIns="0" tIns="0" rIns="0" bIns="0" anchor="t">
+            <a:spAutoFit/>
+          </a:bodyPr>
+          <a:lstStyle/>
+          <a:p>
+            <a:pPr algn="ctr"/>
+            <a:r>
+              <a:rPr sz="1500" b="0" i="0" u="none">
+                <a:solidFill>
+                  <a:srgbClr val="64748B"/>
+                </a:solidFill>
+                <a:latin typeface="Plus Jakarta Sans"/>
+              </a:rPr>
+              <a:t>Nhập thông tin xe</a:t>
+            </a:r>
+          </a:p>
+        </p:txBody>
+      </p:sp>
+      <p:sp>
+        <p:nvSpPr>
+          <p:cNvPr id="17" name="TextBox 16"/>
+          <p:cNvSpPr txBox="1"/>
+          <p:nvPr/>
+        </p:nvSpPr>
+        <p:spPr>
+          <a:xfrm>
+            <a:off x="3183731" y="3494559"/>
+            <a:ext cx="628650" cy="230832"/>
+          </a:xfrm>
+          <a:prstGeom prst="rect">
+            <a:avLst/>
+          </a:prstGeom>
+          <a:noFill/>
+        </p:spPr>
+        <p:txBody>
+          <a:bodyPr wrap="square" lIns="0" tIns="0" rIns="0" bIns="0" anchor="ctr">
+            <a:spAutoFit/>
+          </a:bodyPr>
+          <a:lstStyle/>
+          <a:p>
+            <a:pPr algn="ctr"/>
+            <a:r>
+              <a:rPr sz="1500" b="1" i="0" u="none">
+                <a:solidFill>
+                  <a:srgbClr val="FFFFFF"/>
+                </a:solidFill>
+                <a:latin typeface="Plus Jakarta Sans"/>
+              </a:rPr>
+              <a:t>2</a:t>
+            </a:r>
+          </a:p>
+        </p:txBody>
+      </p:sp>
+      <p:sp>
+        <p:nvSpPr>
+          <p:cNvPr id="18" name="TextBox 17"/>
+          <p:cNvSpPr txBox="1"/>
+          <p:nvPr/>
+        </p:nvSpPr>
+        <p:spPr>
+          <a:xfrm>
+            <a:off x="3135039" y="3857625"/>
+            <a:ext cx="726033" cy="230832"/>
+          </a:xfrm>
+          <a:prstGeom prst="rect">
+            <a:avLst/>
+          </a:prstGeom>
+          <a:noFill/>
+        </p:spPr>
+        <p:txBody>
+          <a:bodyPr wrap="none" lIns="0" tIns="0" rIns="0" bIns="0" anchor="t">
+            <a:spAutoFit/>
+          </a:bodyPr>
+          <a:lstStyle/>
+          <a:p>
+            <a:pPr algn="ctr"/>
+            <a:r>
+              <a:rPr sz="1500" b="1" i="0" u="none">
+                <a:solidFill>
+                  <a:srgbClr val="0F172A"/>
+                </a:solidFill>
+                <a:latin typeface="Plus Jakarta Sans"/>
+              </a:rPr>
+              <a:t>Frontend</a:t>
+            </a:r>
+          </a:p>
+        </p:txBody>
+      </p:sp>
+      <p:sp>
+        <p:nvSpPr>
+          <p:cNvPr id="19" name="TextBox 18"/>
+          <p:cNvSpPr txBox="1"/>
+          <p:nvPr/>
+        </p:nvSpPr>
+        <p:spPr>
+          <a:xfrm>
+            <a:off x="2810207" y="4029075"/>
+            <a:ext cx="1375698" cy="230832"/>
+          </a:xfrm>
+          <a:prstGeom prst="rect">
+            <a:avLst/>
+          </a:prstGeom>
+          <a:noFill/>
+        </p:spPr>
+        <p:txBody>
+          <a:bodyPr wrap="none" lIns="0" tIns="0" rIns="0" bIns="0" anchor="t">
+            <a:spAutoFit/>
+          </a:bodyPr>
+          <a:lstStyle/>
+          <a:p>
+            <a:pPr algn="ctr"/>
+            <a:r>
+              <a:rPr sz="1500" b="0" i="0" u="none">
+                <a:solidFill>
+                  <a:srgbClr val="64748B"/>
+                </a:solidFill>
+                <a:latin typeface="Plus Jakarta Sans"/>
+              </a:rPr>
+              <a:t>Gửi JSON Payload</a:t>
+            </a:r>
+          </a:p>
+        </p:txBody>
+      </p:sp>
+      <p:sp>
+        <p:nvSpPr>
+          <p:cNvPr id="20" name="TextBox 19"/>
+          <p:cNvSpPr txBox="1"/>
+          <p:nvPr/>
+        </p:nvSpPr>
+        <p:spPr>
+          <a:xfrm>
+            <a:off x="5734050" y="3494559"/>
+            <a:ext cx="628650" cy="230832"/>
+          </a:xfrm>
+          <a:prstGeom prst="rect">
+            <a:avLst/>
+          </a:prstGeom>
+          <a:noFill/>
+        </p:spPr>
+        <p:txBody>
+          <a:bodyPr wrap="square" lIns="0" tIns="0" rIns="0" bIns="0" anchor="ctr">
+            <a:spAutoFit/>
+          </a:bodyPr>
+          <a:lstStyle/>
+          <a:p>
+            <a:pPr algn="ctr"/>
+            <a:r>
+              <a:rPr sz="1500" b="1" i="0" u="none">
+                <a:solidFill>
+                  <a:srgbClr val="FFFFFF"/>
+                </a:solidFill>
+                <a:latin typeface="Plus Jakarta Sans"/>
+              </a:rPr>
+              <a:t>3</a:t>
+            </a:r>
+          </a:p>
+        </p:txBody>
+      </p:sp>
+      <p:sp>
+        <p:nvSpPr>
+          <p:cNvPr id="21" name="TextBox 20"/>
+          <p:cNvSpPr txBox="1"/>
+          <p:nvPr/>
+        </p:nvSpPr>
+        <p:spPr>
+          <a:xfrm>
+            <a:off x="5342187" y="3857625"/>
+            <a:ext cx="1412373" cy="230832"/>
+          </a:xfrm>
+          <a:prstGeom prst="rect">
+            <a:avLst/>
+          </a:prstGeom>
+          <a:noFill/>
+        </p:spPr>
+        <p:txBody>
+          <a:bodyPr wrap="none" lIns="0" tIns="0" rIns="0" bIns="0" anchor="t">
+            <a:spAutoFit/>
+          </a:bodyPr>
+          <a:lstStyle/>
+          <a:p>
+            <a:pPr algn="ctr"/>
+            <a:r>
+              <a:rPr sz="1500" b="1" i="0" u="none">
+                <a:solidFill>
+                  <a:srgbClr val="0F172A"/>
+                </a:solidFill>
+                <a:latin typeface="Plus Jakarta Sans"/>
+              </a:rPr>
+              <a:t>Backend Gateway</a:t>
+            </a:r>
+          </a:p>
+        </p:txBody>
+      </p:sp>
+      <p:sp>
+        <p:nvSpPr>
+          <p:cNvPr id="22" name="TextBox 21"/>
+          <p:cNvSpPr txBox="1"/>
+          <p:nvPr/>
+        </p:nvSpPr>
+        <p:spPr>
+          <a:xfrm>
+            <a:off x="5048132" y="4029075"/>
+            <a:ext cx="2000484" cy="230832"/>
+          </a:xfrm>
+          <a:prstGeom prst="rect">
+            <a:avLst/>
+          </a:prstGeom>
+          <a:noFill/>
+        </p:spPr>
+        <p:txBody>
+          <a:bodyPr wrap="none" lIns="0" tIns="0" rIns="0" bIns="0" anchor="t">
+            <a:spAutoFit/>
+          </a:bodyPr>
+          <a:lstStyle/>
+          <a:p>
+            <a:pPr algn="ctr"/>
+            <a:r>
+              <a:rPr sz="1500" b="0" i="0" u="none">
+                <a:solidFill>
+                  <a:srgbClr val="64748B"/>
+                </a:solidFill>
+                <a:latin typeface="Plus Jakarta Sans"/>
+              </a:rPr>
+              <a:t>Validate &amp; cấp request_id</a:t>
+            </a:r>
+          </a:p>
+        </p:txBody>
+      </p:sp>
+      <p:sp>
+        <p:nvSpPr>
+          <p:cNvPr id="23" name="TextBox 22"/>
+          <p:cNvSpPr txBox="1"/>
+          <p:nvPr/>
+        </p:nvSpPr>
+        <p:spPr>
+          <a:xfrm>
+            <a:off x="8308181" y="3494559"/>
+            <a:ext cx="628650" cy="230832"/>
+          </a:xfrm>
+          <a:prstGeom prst="rect">
+            <a:avLst/>
+          </a:prstGeom>
+          <a:noFill/>
+        </p:spPr>
+        <p:txBody>
+          <a:bodyPr wrap="square" lIns="0" tIns="0" rIns="0" bIns="0" anchor="ctr">
+            <a:spAutoFit/>
+          </a:bodyPr>
+          <a:lstStyle/>
+          <a:p>
+            <a:pPr algn="ctr"/>
+            <a:r>
+              <a:rPr sz="1500" b="1" i="0" u="none">
+                <a:solidFill>
+                  <a:srgbClr val="FFFFFF"/>
+                </a:solidFill>
+                <a:latin typeface="Plus Jakarta Sans"/>
+              </a:rPr>
+              <a:t>4</a:t>
+            </a:r>
+          </a:p>
+        </p:txBody>
+      </p:sp>
+      <p:sp>
+        <p:nvSpPr>
+          <p:cNvPr id="24" name="TextBox 23"/>
+          <p:cNvSpPr txBox="1"/>
+          <p:nvPr/>
+        </p:nvSpPr>
+        <p:spPr>
+          <a:xfrm>
+            <a:off x="8230539" y="3857625"/>
+            <a:ext cx="783933" cy="230832"/>
+          </a:xfrm>
+          <a:prstGeom prst="rect">
+            <a:avLst/>
+          </a:prstGeom>
+          <a:noFill/>
+        </p:spPr>
+        <p:txBody>
+          <a:bodyPr wrap="none" lIns="0" tIns="0" rIns="0" bIns="0" anchor="t">
+            <a:spAutoFit/>
+          </a:bodyPr>
+          <a:lstStyle/>
+          <a:p>
+            <a:pPr algn="ctr"/>
+            <a:r>
+              <a:rPr sz="1500" b="1" i="0" u="none">
+                <a:solidFill>
+                  <a:srgbClr val="0F172A"/>
+                </a:solidFill>
+                <a:latin typeface="Plus Jakarta Sans"/>
+              </a:rPr>
+              <a:t>AI Service</a:t>
+            </a:r>
+          </a:p>
+        </p:txBody>
+      </p:sp>
+      <p:sp>
+        <p:nvSpPr>
+          <p:cNvPr id="25" name="TextBox 24"/>
+          <p:cNvSpPr txBox="1"/>
+          <p:nvPr/>
+        </p:nvSpPr>
+        <p:spPr>
+          <a:xfrm>
+            <a:off x="7832482" y="4029075"/>
+            <a:ext cx="1580048" cy="230832"/>
+          </a:xfrm>
+          <a:prstGeom prst="rect">
+            <a:avLst/>
+          </a:prstGeom>
+          <a:noFill/>
+        </p:spPr>
+        <p:txBody>
+          <a:bodyPr wrap="none" lIns="0" tIns="0" rIns="0" bIns="0" anchor="t">
+            <a:spAutoFit/>
+          </a:bodyPr>
+          <a:lstStyle/>
+          <a:p>
+            <a:pPr algn="ctr"/>
+            <a:r>
+              <a:rPr sz="1500" b="0" i="0" u="none">
+                <a:solidFill>
+                  <a:srgbClr val="64748B"/>
+                </a:solidFill>
+                <a:latin typeface="Plus Jakarta Sans"/>
+              </a:rPr>
+              <a:t>Inference 4 Mô hình</a:t>
+            </a:r>
+          </a:p>
+        </p:txBody>
+      </p:sp>
+      <p:sp>
+        <p:nvSpPr>
+          <p:cNvPr id="26" name="TextBox 25"/>
+          <p:cNvSpPr txBox="1"/>
+          <p:nvPr/>
+        </p:nvSpPr>
+        <p:spPr>
+          <a:xfrm>
+            <a:off x="10682287" y="3494559"/>
+            <a:ext cx="628650" cy="230832"/>
+          </a:xfrm>
+          <a:prstGeom prst="rect">
+            <a:avLst/>
+          </a:prstGeom>
+          <a:noFill/>
+        </p:spPr>
+        <p:txBody>
+          <a:bodyPr wrap="square" lIns="0" tIns="0" rIns="0" bIns="0" anchor="ctr">
+            <a:spAutoFit/>
+          </a:bodyPr>
+          <a:lstStyle/>
+          <a:p>
+            <a:pPr algn="ctr"/>
+            <a:r>
+              <a:rPr sz="1500" b="1" i="0" u="none">
+                <a:solidFill>
+                  <a:srgbClr val="FFFFFF"/>
+                </a:solidFill>
+                <a:latin typeface="Plus Jakarta Sans"/>
+              </a:rPr>
+              <a:t>5</a:t>
+            </a:r>
+          </a:p>
+        </p:txBody>
+      </p:sp>
+      <p:sp>
+        <p:nvSpPr>
+          <p:cNvPr id="27" name="TextBox 26"/>
+          <p:cNvSpPr txBox="1"/>
+          <p:nvPr/>
+        </p:nvSpPr>
+        <p:spPr>
+          <a:xfrm>
+            <a:off x="10363426" y="3857625"/>
+            <a:ext cx="1266372" cy="230832"/>
+          </a:xfrm>
+          <a:prstGeom prst="rect">
+            <a:avLst/>
+          </a:prstGeom>
+          <a:noFill/>
+        </p:spPr>
+        <p:txBody>
+          <a:bodyPr wrap="none" lIns="0" tIns="0" rIns="0" bIns="0" anchor="t">
+            <a:spAutoFit/>
+          </a:bodyPr>
+          <a:lstStyle/>
+          <a:p>
+            <a:pPr algn="ctr"/>
+            <a:r>
+              <a:rPr sz="1500" b="1" i="0" u="none">
+                <a:solidFill>
+                  <a:srgbClr val="0F172A"/>
+                </a:solidFill>
+                <a:latin typeface="Plus Jakarta Sans"/>
+              </a:rPr>
+              <a:t>Kết quả So sánh</a:t>
+            </a:r>
+          </a:p>
+        </p:txBody>
+      </p:sp>
+      <p:sp>
+        <p:nvSpPr>
+          <p:cNvPr id="28" name="TextBox 27"/>
+          <p:cNvSpPr txBox="1"/>
+          <p:nvPr/>
+        </p:nvSpPr>
+        <p:spPr>
+          <a:xfrm>
+            <a:off x="10438767" y="4029075"/>
+            <a:ext cx="1115690" cy="230832"/>
+          </a:xfrm>
+          <a:prstGeom prst="rect">
+            <a:avLst/>
+          </a:prstGeom>
+          <a:noFill/>
+        </p:spPr>
+        <p:txBody>
+          <a:bodyPr wrap="none" lIns="0" tIns="0" rIns="0" bIns="0" anchor="t">
+            <a:spAutoFit/>
+          </a:bodyPr>
+          <a:lstStyle/>
+          <a:p>
+            <a:pPr algn="ctr"/>
+            <a:r>
+              <a:rPr sz="1500" b="0" i="0" u="none">
+                <a:solidFill>
+                  <a:srgbClr val="64748B"/>
+                </a:solidFill>
+                <a:latin typeface="Plus Jakarta Sans"/>
+              </a:rPr>
+              <a:t>Hiển thị lên UI</a:t>
+            </a:r>
+          </a:p>
+        </p:txBody>
+      </p:sp>
     </p:spTree>
   </p:cSld>
   <p:clrMapOvr>
@@ -19870,61 +19218,12 @@
         </p:nvSpPr>
         <p:spPr>
           <a:xfrm>
-            <a:off x="457200" y="2481262"/>
-            <a:ext cx="5562600" cy="1247775"/>
+            <a:off x="8391701" y="2356770"/>
+            <a:ext cx="3343099" cy="2396353"/>
           </a:xfrm>
           <a:prstGeom prst="roundRect">
             <a:avLst>
-              <a:gd name="adj" fmla="val 9160"/>
-            </a:avLst>
-          </a:prstGeom>
-          <a:solidFill>
-            <a:srgbClr val="F0FDFA"/>
-          </a:solidFill>
-          <a:ln w="9525">
-            <a:solidFill>
-              <a:srgbClr val="0D9488"/>
-            </a:solidFill>
-          </a:ln>
-          <a:effectLst/>
-        </p:spPr>
-        <p:style>
-          <a:lnRef idx="1">
-            <a:schemeClr val="accent1"/>
-          </a:lnRef>
-          <a:fillRef idx="3">
-            <a:schemeClr val="accent1"/>
-          </a:fillRef>
-          <a:effectRef idx="2">
-            <a:schemeClr val="accent1"/>
-          </a:effectRef>
-          <a:fontRef idx="minor">
-            <a:schemeClr val="lt1"/>
-          </a:fontRef>
-        </p:style>
-        <p:txBody>
-          <a:bodyPr rtlCol="0" anchor="ctr"/>
-          <a:lstStyle/>
-          <a:p>
-            <a:pPr algn="ctr"/>
-            <a:endParaRPr/>
-          </a:p>
-        </p:txBody>
-      </p:sp>
-      <p:sp>
-        <p:nvSpPr>
-          <p:cNvPr id="3" name="Rounded Rectangle 2"/>
-          <p:cNvSpPr/>
-          <p:nvPr/>
-        </p:nvSpPr>
-        <p:spPr>
-          <a:xfrm>
-            <a:off x="6172200" y="2481262"/>
-            <a:ext cx="5562600" cy="1247775"/>
-          </a:xfrm>
-          <a:prstGeom prst="roundRect">
-            <a:avLst>
-              <a:gd name="adj" fmla="val 9160"/>
+              <a:gd name="adj" fmla="val 4511"/>
             </a:avLst>
           </a:prstGeom>
           <a:solidFill>
@@ -19956,299 +19255,37 @@
           <a:lstStyle/>
           <a:p>
             <a:pPr algn="ctr"/>
-            <a:endParaRPr/>
-          </a:p>
-        </p:txBody>
-      </p:sp>
-      <p:sp>
-        <p:nvSpPr>
-          <p:cNvPr id="4" name="Rounded Rectangle 3"/>
-          <p:cNvSpPr/>
-          <p:nvPr/>
-        </p:nvSpPr>
-        <p:spPr>
-          <a:xfrm>
-            <a:off x="457200" y="3881437"/>
-            <a:ext cx="5562600" cy="1247775"/>
-          </a:xfrm>
-          <a:prstGeom prst="roundRect">
-            <a:avLst>
-              <a:gd name="adj" fmla="val 9160"/>
-            </a:avLst>
-          </a:prstGeom>
-          <a:solidFill>
-            <a:srgbClr val="F8FAFC"/>
-          </a:solidFill>
-          <a:ln w="9525">
-            <a:solidFill>
-              <a:srgbClr val="E2E8F0"/>
-            </a:solidFill>
-          </a:ln>
-          <a:effectLst/>
-        </p:spPr>
-        <p:style>
-          <a:lnRef idx="1">
-            <a:schemeClr val="accent1"/>
-          </a:lnRef>
-          <a:fillRef idx="3">
-            <a:schemeClr val="accent1"/>
-          </a:fillRef>
-          <a:effectRef idx="2">
-            <a:schemeClr val="accent1"/>
-          </a:effectRef>
-          <a:fontRef idx="minor">
-            <a:schemeClr val="lt1"/>
-          </a:fontRef>
-        </p:style>
-        <p:txBody>
-          <a:bodyPr rtlCol="0" anchor="ctr"/>
-          <a:lstStyle/>
-          <a:p>
-            <a:pPr algn="ctr"/>
-            <a:endParaRPr/>
-          </a:p>
-        </p:txBody>
-      </p:sp>
-      <p:sp>
-        <p:nvSpPr>
-          <p:cNvPr id="5" name="Rounded Rectangle 4"/>
-          <p:cNvSpPr/>
-          <p:nvPr/>
-        </p:nvSpPr>
-        <p:spPr>
-          <a:xfrm>
-            <a:off x="6172200" y="3881437"/>
-            <a:ext cx="5562600" cy="1247775"/>
-          </a:xfrm>
-          <a:prstGeom prst="roundRect">
-            <a:avLst>
-              <a:gd name="adj" fmla="val 9160"/>
-            </a:avLst>
-          </a:prstGeom>
-          <a:solidFill>
-            <a:srgbClr val="F8FAFC"/>
-          </a:solidFill>
-          <a:ln w="9525">
-            <a:solidFill>
-              <a:srgbClr val="E2E8F0"/>
-            </a:solidFill>
-          </a:ln>
-          <a:effectLst/>
-        </p:spPr>
-        <p:style>
-          <a:lnRef idx="1">
-            <a:schemeClr val="accent1"/>
-          </a:lnRef>
-          <a:fillRef idx="3">
-            <a:schemeClr val="accent1"/>
-          </a:fillRef>
-          <a:effectRef idx="2">
-            <a:schemeClr val="accent1"/>
-          </a:effectRef>
-          <a:fontRef idx="minor">
-            <a:schemeClr val="lt1"/>
-          </a:fontRef>
-        </p:style>
-        <p:txBody>
-          <a:bodyPr rtlCol="0" anchor="ctr"/>
-          <a:lstStyle/>
-          <a:p>
-            <a:pPr algn="ctr"/>
-            <a:endParaRPr/>
-          </a:p>
-        </p:txBody>
-      </p:sp>
-      <p:sp>
-        <p:nvSpPr>
-          <p:cNvPr id="6" name="Rounded Rectangle 5"/>
-          <p:cNvSpPr/>
-          <p:nvPr/>
-        </p:nvSpPr>
-        <p:spPr>
-          <a:xfrm>
-            <a:off x="5191125" y="2690812"/>
-            <a:ext cx="628650" cy="180975"/>
-          </a:xfrm>
-          <a:prstGeom prst="roundRect">
-            <a:avLst>
-              <a:gd name="adj" fmla="val 21052"/>
-            </a:avLst>
-          </a:prstGeom>
-          <a:solidFill>
-            <a:srgbClr val="0D9488"/>
-          </a:solidFill>
-          <a:ln>
-            <a:noFill/>
-          </a:ln>
-          <a:effectLst/>
-        </p:spPr>
-        <p:style>
-          <a:lnRef idx="1">
-            <a:schemeClr val="accent1"/>
-          </a:lnRef>
-          <a:fillRef idx="3">
-            <a:schemeClr val="accent1"/>
-          </a:fillRef>
-          <a:effectRef idx="2">
-            <a:schemeClr val="accent1"/>
-          </a:effectRef>
-          <a:fontRef idx="minor">
-            <a:schemeClr val="lt1"/>
-          </a:fontRef>
-        </p:style>
-        <p:txBody>
-          <a:bodyPr rtlCol="0" anchor="ctr"/>
-          <a:lstStyle/>
-          <a:p>
-            <a:pPr algn="ctr"/>
-            <a:endParaRPr/>
-          </a:p>
-        </p:txBody>
-      </p:sp>
-      <p:sp>
-        <p:nvSpPr>
-          <p:cNvPr id="7" name="Rounded Rectangle 6"/>
-          <p:cNvSpPr/>
-          <p:nvPr/>
-        </p:nvSpPr>
-        <p:spPr>
-          <a:xfrm>
-            <a:off x="10848975" y="2690812"/>
-            <a:ext cx="685800" cy="180975"/>
-          </a:xfrm>
-          <a:prstGeom prst="roundRect">
-            <a:avLst>
-              <a:gd name="adj" fmla="val 21052"/>
-            </a:avLst>
-          </a:prstGeom>
-          <a:solidFill>
-            <a:srgbClr val="E0F2FE"/>
-          </a:solidFill>
-          <a:ln>
-            <a:noFill/>
-          </a:ln>
-          <a:effectLst/>
-        </p:spPr>
-        <p:style>
-          <a:lnRef idx="1">
-            <a:schemeClr val="accent1"/>
-          </a:lnRef>
-          <a:fillRef idx="3">
-            <a:schemeClr val="accent1"/>
-          </a:fillRef>
-          <a:effectRef idx="2">
-            <a:schemeClr val="accent1"/>
-          </a:effectRef>
-          <a:fontRef idx="minor">
-            <a:schemeClr val="lt1"/>
-          </a:fontRef>
-        </p:style>
-        <p:txBody>
-          <a:bodyPr rtlCol="0" anchor="ctr"/>
-          <a:lstStyle/>
-          <a:p>
-            <a:pPr algn="ctr"/>
-            <a:endParaRPr/>
-          </a:p>
-        </p:txBody>
-      </p:sp>
-      <p:sp>
-        <p:nvSpPr>
-          <p:cNvPr id="8" name="Rounded Rectangle 7"/>
-          <p:cNvSpPr/>
-          <p:nvPr/>
-        </p:nvSpPr>
-        <p:spPr>
-          <a:xfrm>
-            <a:off x="5143500" y="4090987"/>
-            <a:ext cx="676275" cy="180975"/>
-          </a:xfrm>
-          <a:prstGeom prst="roundRect">
-            <a:avLst>
-              <a:gd name="adj" fmla="val 21052"/>
-            </a:avLst>
-          </a:prstGeom>
-          <a:solidFill>
-            <a:srgbClr val="F1F5F9"/>
-          </a:solidFill>
-          <a:ln>
-            <a:noFill/>
-          </a:ln>
-          <a:effectLst/>
-        </p:spPr>
-        <p:style>
-          <a:lnRef idx="1">
-            <a:schemeClr val="accent1"/>
-          </a:lnRef>
-          <a:fillRef idx="3">
-            <a:schemeClr val="accent1"/>
-          </a:fillRef>
-          <a:effectRef idx="2">
-            <a:schemeClr val="accent1"/>
-          </a:effectRef>
-          <a:fontRef idx="minor">
-            <a:schemeClr val="lt1"/>
-          </a:fontRef>
-        </p:style>
-        <p:txBody>
-          <a:bodyPr rtlCol="0" anchor="ctr"/>
-          <a:lstStyle/>
-          <a:p>
-            <a:pPr algn="ctr"/>
-            <a:endParaRPr/>
-          </a:p>
-        </p:txBody>
-      </p:sp>
-      <p:sp>
-        <p:nvSpPr>
-          <p:cNvPr id="9" name="Rounded Rectangle 8"/>
-          <p:cNvSpPr/>
-          <p:nvPr/>
-        </p:nvSpPr>
-        <p:spPr>
-          <a:xfrm>
-            <a:off x="10915650" y="4090987"/>
-            <a:ext cx="619125" cy="180975"/>
-          </a:xfrm>
-          <a:prstGeom prst="roundRect">
-            <a:avLst>
-              <a:gd name="adj" fmla="val 21052"/>
-            </a:avLst>
-          </a:prstGeom>
-          <a:solidFill>
-            <a:srgbClr val="F1F5F9"/>
-          </a:solidFill>
-          <a:ln>
-            <a:noFill/>
-          </a:ln>
-          <a:effectLst/>
-        </p:spPr>
-        <p:style>
-          <a:lnRef idx="1">
-            <a:schemeClr val="accent1"/>
-          </a:lnRef>
-          <a:fillRef idx="3">
-            <a:schemeClr val="accent1"/>
-          </a:fillRef>
-          <a:effectRef idx="2">
-            <a:schemeClr val="accent1"/>
-          </a:effectRef>
-          <a:fontRef idx="minor">
-            <a:schemeClr val="lt1"/>
-          </a:fontRef>
-        </p:style>
-        <p:txBody>
-          <a:bodyPr rtlCol="0" anchor="ctr"/>
-          <a:lstStyle/>
-          <a:p>
-            <a:pPr algn="ctr"/>
-            <a:endParaRPr/>
-          </a:p>
-        </p:txBody>
-      </p:sp>
-      <p:sp>
-        <p:nvSpPr>
-          <p:cNvPr id="10" name="TextBox 9"/>
+            <a:endParaRPr sz="1500"/>
+          </a:p>
+        </p:txBody>
+      </p:sp>
+      <p:pic>
+        <p:nvPicPr>
+          <p:cNvPr id="3" name="Picture 2" descr="image.png"/>
+          <p:cNvPicPr>
+            <a:picLocks noChangeAspect="1"/>
+          </p:cNvPicPr>
+          <p:nvPr/>
+        </p:nvPicPr>
+        <p:blipFill>
+          <a:blip r:embed="rId2"/>
+          <a:stretch>
+            <a:fillRect/>
+          </a:stretch>
+        </p:blipFill>
+        <p:spPr>
+          <a:xfrm>
+            <a:off x="457200" y="1614487"/>
+            <a:ext cx="6283374" cy="4381500"/>
+          </a:xfrm>
+          <a:prstGeom prst="rect">
+            <a:avLst/>
+          </a:prstGeom>
+        </p:spPr>
+      </p:pic>
+      <p:sp>
+        <p:nvSpPr>
+          <p:cNvPr id="5" name="TextBox 4"/>
           <p:cNvSpPr txBox="1"/>
           <p:nvPr/>
         </p:nvSpPr>
@@ -20283,7 +19320,7 @@
       </p:sp>
       <p:sp>
         <p:nvSpPr>
-          <p:cNvPr id="11" name="TextBox 10"/>
+          <p:cNvPr id="6" name="TextBox 5"/>
           <p:cNvSpPr txBox="1"/>
           <p:nvPr/>
         </p:nvSpPr>
@@ -20315,336 +19352,21 @@
                 </a:solidFill>
                 <a:latin typeface="Plus Jakarta Sans"/>
               </a:rPr>
-              <a:t>So sánh Kết quả Dự đoán Thực tế trên Giao diện</a:t>
-            </a:r>
-          </a:p>
-        </p:txBody>
-      </p:sp>
-      <p:sp>
-        <p:nvSpPr>
-          <p:cNvPr id="12" name="TextBox 11"/>
+              <a:t>Demo Giao diện Nhập liệu &amp; Ước tính</a:t>
+            </a:r>
+          </a:p>
+        </p:txBody>
+      </p:sp>
+      <p:sp>
+        <p:nvSpPr>
+          <p:cNvPr id="7" name="TextBox 6"/>
           <p:cNvSpPr txBox="1"/>
           <p:nvPr/>
         </p:nvSpPr>
         <p:spPr>
           <a:xfrm>
-            <a:off x="657225" y="2957512"/>
-            <a:ext cx="6453187" cy="381000"/>
-          </a:xfrm>
-          <a:prstGeom prst="rect">
-            <a:avLst/>
-          </a:prstGeom>
-          <a:noFill/>
-        </p:spPr>
-        <p:txBody>
-          <a:bodyPr wrap="none" lIns="0" tIns="0" rIns="0" bIns="0" anchor="t">
-            <a:spAutoFit/>
-          </a:bodyPr>
-          <a:lstStyle/>
-          <a:p>
-            <a:pPr algn="l"/>
-            <a:r>
-              <a:rPr sz="2400" b="1" i="0" u="none">
-                <a:solidFill>
-                  <a:srgbClr val="0F172A"/>
-                </a:solidFill>
-                <a:latin typeface="Plus Jakarta Sans"/>
-              </a:rPr>
-              <a:t>872 Triệu VNĐ</a:t>
-            </a:r>
-          </a:p>
-        </p:txBody>
-      </p:sp>
-      <p:sp>
-        <p:nvSpPr>
-          <p:cNvPr id="13" name="TextBox 12"/>
-          <p:cNvSpPr txBox="1"/>
-          <p:nvPr/>
-        </p:nvSpPr>
-        <p:spPr>
-          <a:xfrm>
-            <a:off x="657225" y="3376612"/>
-            <a:ext cx="6453187" cy="152400"/>
-          </a:xfrm>
-          <a:prstGeom prst="rect">
-            <a:avLst/>
-          </a:prstGeom>
-          <a:noFill/>
-        </p:spPr>
-        <p:txBody>
-          <a:bodyPr wrap="none" lIns="0" tIns="0" rIns="0" bIns="0" anchor="t">
-            <a:spAutoFit/>
-          </a:bodyPr>
-          <a:lstStyle/>
-          <a:p>
-            <a:pPr algn="l"/>
-            <a:r>
-              <a:rPr sz="975" b="0" i="0" u="none">
-                <a:solidFill>
-                  <a:srgbClr val="0F766E"/>
-                </a:solidFill>
-                <a:latin typeface="Plus Jakarta Sans"/>
-              </a:rPr>
-              <a:t>R²: 0.9772 · MAE: 83.3 triệu VNĐ</a:t>
-            </a:r>
-          </a:p>
-        </p:txBody>
-      </p:sp>
-      <p:sp>
-        <p:nvSpPr>
-          <p:cNvPr id="14" name="TextBox 13"/>
-          <p:cNvSpPr txBox="1"/>
-          <p:nvPr/>
-        </p:nvSpPr>
-        <p:spPr>
-          <a:xfrm>
-            <a:off x="6372225" y="2957512"/>
-            <a:ext cx="5819775" cy="381000"/>
-          </a:xfrm>
-          <a:prstGeom prst="rect">
-            <a:avLst/>
-          </a:prstGeom>
-          <a:noFill/>
-        </p:spPr>
-        <p:txBody>
-          <a:bodyPr wrap="none" lIns="0" tIns="0" rIns="0" bIns="0" anchor="t">
-            <a:spAutoFit/>
-          </a:bodyPr>
-          <a:lstStyle/>
-          <a:p>
-            <a:pPr algn="l"/>
-            <a:r>
-              <a:rPr sz="2400" b="1" i="0" u="none">
-                <a:solidFill>
-                  <a:srgbClr val="0F172A"/>
-                </a:solidFill>
-                <a:latin typeface="Plus Jakarta Sans"/>
-              </a:rPr>
-              <a:t>899 Triệu VNĐ</a:t>
-            </a:r>
-          </a:p>
-        </p:txBody>
-      </p:sp>
-      <p:sp>
-        <p:nvSpPr>
-          <p:cNvPr id="15" name="TextBox 14"/>
-          <p:cNvSpPr txBox="1"/>
-          <p:nvPr/>
-        </p:nvSpPr>
-        <p:spPr>
-          <a:xfrm>
-            <a:off x="6372225" y="3376612"/>
-            <a:ext cx="5819775" cy="152400"/>
-          </a:xfrm>
-          <a:prstGeom prst="rect">
-            <a:avLst/>
-          </a:prstGeom>
-          <a:noFill/>
-        </p:spPr>
-        <p:txBody>
-          <a:bodyPr wrap="none" lIns="0" tIns="0" rIns="0" bIns="0" anchor="t">
-            <a:spAutoFit/>
-          </a:bodyPr>
-          <a:lstStyle/>
-          <a:p>
-            <a:pPr algn="l"/>
-            <a:r>
-              <a:rPr sz="975" b="0" i="0" u="none">
-                <a:solidFill>
-                  <a:srgbClr val="64748B"/>
-                </a:solidFill>
-                <a:latin typeface="Plus Jakarta Sans"/>
-              </a:rPr>
-              <a:t>R²: 0.9676 · MAE: 100.18 triệu VNĐ</a:t>
-            </a:r>
-          </a:p>
-        </p:txBody>
-      </p:sp>
-      <p:sp>
-        <p:nvSpPr>
-          <p:cNvPr id="16" name="TextBox 15"/>
-          <p:cNvSpPr txBox="1"/>
-          <p:nvPr/>
-        </p:nvSpPr>
-        <p:spPr>
-          <a:xfrm>
-            <a:off x="657225" y="4357687"/>
-            <a:ext cx="6453187" cy="381000"/>
-          </a:xfrm>
-          <a:prstGeom prst="rect">
-            <a:avLst/>
-          </a:prstGeom>
-          <a:noFill/>
-        </p:spPr>
-        <p:txBody>
-          <a:bodyPr wrap="none" lIns="0" tIns="0" rIns="0" bIns="0" anchor="t">
-            <a:spAutoFit/>
-          </a:bodyPr>
-          <a:lstStyle/>
-          <a:p>
-            <a:pPr algn="l"/>
-            <a:r>
-              <a:rPr sz="2400" b="1" i="0" u="none">
-                <a:solidFill>
-                  <a:srgbClr val="0F172A"/>
-                </a:solidFill>
-                <a:latin typeface="Plus Jakarta Sans"/>
-              </a:rPr>
-              <a:t>747 Triệu VNĐ</a:t>
-            </a:r>
-          </a:p>
-        </p:txBody>
-      </p:sp>
-      <p:sp>
-        <p:nvSpPr>
-          <p:cNvPr id="17" name="TextBox 16"/>
-          <p:cNvSpPr txBox="1"/>
-          <p:nvPr/>
-        </p:nvSpPr>
-        <p:spPr>
-          <a:xfrm>
-            <a:off x="657225" y="4776787"/>
-            <a:ext cx="6453187" cy="152400"/>
-          </a:xfrm>
-          <a:prstGeom prst="rect">
-            <a:avLst/>
-          </a:prstGeom>
-          <a:noFill/>
-        </p:spPr>
-        <p:txBody>
-          <a:bodyPr wrap="none" lIns="0" tIns="0" rIns="0" bIns="0" anchor="t">
-            <a:spAutoFit/>
-          </a:bodyPr>
-          <a:lstStyle/>
-          <a:p>
-            <a:pPr algn="l"/>
-            <a:r>
-              <a:rPr sz="975" b="0" i="0" u="none">
-                <a:solidFill>
-                  <a:srgbClr val="64748B"/>
-                </a:solidFill>
-                <a:latin typeface="Plus Jakarta Sans"/>
-              </a:rPr>
-              <a:t>R²: 0.9429 · MAE: 136.12 triệu VNĐ</a:t>
-            </a:r>
-          </a:p>
-        </p:txBody>
-      </p:sp>
-      <p:sp>
-        <p:nvSpPr>
-          <p:cNvPr id="18" name="TextBox 17"/>
-          <p:cNvSpPr txBox="1"/>
-          <p:nvPr/>
-        </p:nvSpPr>
-        <p:spPr>
-          <a:xfrm>
-            <a:off x="6372225" y="4357687"/>
-            <a:ext cx="5819775" cy="381000"/>
-          </a:xfrm>
-          <a:prstGeom prst="rect">
-            <a:avLst/>
-          </a:prstGeom>
-          <a:noFill/>
-        </p:spPr>
-        <p:txBody>
-          <a:bodyPr wrap="none" lIns="0" tIns="0" rIns="0" bIns="0" anchor="t">
-            <a:spAutoFit/>
-          </a:bodyPr>
-          <a:lstStyle/>
-          <a:p>
-            <a:pPr algn="l"/>
-            <a:r>
-              <a:rPr sz="2400" b="1" i="0" u="none">
-                <a:solidFill>
-                  <a:srgbClr val="0F172A"/>
-                </a:solidFill>
-                <a:latin typeface="Plus Jakarta Sans"/>
-              </a:rPr>
-              <a:t>729 Triệu VNĐ</a:t>
-            </a:r>
-          </a:p>
-        </p:txBody>
-      </p:sp>
-      <p:sp>
-        <p:nvSpPr>
-          <p:cNvPr id="19" name="TextBox 18"/>
-          <p:cNvSpPr txBox="1"/>
-          <p:nvPr/>
-        </p:nvSpPr>
-        <p:spPr>
-          <a:xfrm>
-            <a:off x="6372225" y="4776787"/>
-            <a:ext cx="5819775" cy="152400"/>
-          </a:xfrm>
-          <a:prstGeom prst="rect">
-            <a:avLst/>
-          </a:prstGeom>
-          <a:noFill/>
-        </p:spPr>
-        <p:txBody>
-          <a:bodyPr wrap="none" lIns="0" tIns="0" rIns="0" bIns="0" anchor="t">
-            <a:spAutoFit/>
-          </a:bodyPr>
-          <a:lstStyle/>
-          <a:p>
-            <a:pPr algn="l"/>
-            <a:r>
-              <a:rPr sz="975" b="0" i="0" u="none">
-                <a:solidFill>
-                  <a:srgbClr val="64748B"/>
-                </a:solidFill>
-                <a:latin typeface="Plus Jakarta Sans"/>
-              </a:rPr>
-              <a:t>R²: 0.8980 · MAE: 217.15 triệu VNĐ</a:t>
-            </a:r>
-          </a:p>
-        </p:txBody>
-      </p:sp>
-      <p:sp>
-        <p:nvSpPr>
-          <p:cNvPr id="20" name="TextBox 19"/>
-          <p:cNvSpPr txBox="1"/>
-          <p:nvPr/>
-        </p:nvSpPr>
-        <p:spPr>
-          <a:xfrm>
-            <a:off x="657225" y="2681287"/>
-            <a:ext cx="3667125" cy="200025"/>
-          </a:xfrm>
-          <a:prstGeom prst="rect">
-            <a:avLst/>
-          </a:prstGeom>
-          <a:noFill/>
-        </p:spPr>
-        <p:txBody>
-          <a:bodyPr wrap="none" lIns="0" tIns="0" rIns="0" bIns="0" anchor="t">
-            <a:spAutoFit/>
-          </a:bodyPr>
-          <a:lstStyle/>
-          <a:p>
-            <a:pPr algn="l"/>
-            <a:r>
-              <a:rPr sz="1200" b="1" i="0" u="none">
-                <a:solidFill>
-                  <a:srgbClr val="0F766E"/>
-                </a:solidFill>
-                <a:latin typeface="Plus Jakarta Sans"/>
-              </a:rPr>
-              <a:t>SUPPORT VECTOR REGRESSION (BEST)</a:t>
-            </a:r>
-          </a:p>
-        </p:txBody>
-      </p:sp>
-      <p:sp>
-        <p:nvSpPr>
-          <p:cNvPr id="21" name="TextBox 20"/>
-          <p:cNvSpPr txBox="1"/>
-          <p:nvPr/>
-        </p:nvSpPr>
-        <p:spPr>
-          <a:xfrm>
-            <a:off x="5267325" y="2709862"/>
-            <a:ext cx="571500" cy="142875"/>
+            <a:off x="8591726" y="2374065"/>
+            <a:ext cx="3028774" cy="237037"/>
           </a:xfrm>
           <a:prstGeom prst="rect">
             <a:avLst/>
@@ -20659,62 +19381,27 @@
           <a:p>
             <a:pPr algn="l"/>
             <a:r>
-              <a:rPr sz="900" b="1" i="0" u="none">
-                <a:solidFill>
-                  <a:srgbClr val="FFFFFF"/>
-                </a:solidFill>
-                <a:latin typeface="Plus Jakarta Sans"/>
-              </a:rPr>
-              <a:t>21.99 ms</a:t>
-            </a:r>
-          </a:p>
-        </p:txBody>
-      </p:sp>
-      <p:sp>
-        <p:nvSpPr>
-          <p:cNvPr id="22" name="TextBox 21"/>
+              <a:rPr sz="1500" b="1" i="0" u="none">
+                <a:solidFill>
+                  <a:srgbClr val="0D9488"/>
+                </a:solidFill>
+                <a:latin typeface="Plus Jakarta Sans"/>
+              </a:rPr>
+              <a:t>Thông tin Test thử nghiệm</a:t>
+            </a:r>
+          </a:p>
+        </p:txBody>
+      </p:sp>
+      <p:sp>
+        <p:nvSpPr>
+          <p:cNvPr id="8" name="TextBox 7"/>
           <p:cNvSpPr txBox="1"/>
           <p:nvPr/>
         </p:nvSpPr>
         <p:spPr>
           <a:xfrm>
-            <a:off x="6372225" y="2681287"/>
-            <a:ext cx="3059906" cy="200025"/>
-          </a:xfrm>
-          <a:prstGeom prst="rect">
-            <a:avLst/>
-          </a:prstGeom>
-          <a:noFill/>
-        </p:spPr>
-        <p:txBody>
-          <a:bodyPr wrap="none" lIns="0" tIns="0" rIns="0" bIns="0" anchor="t">
-            <a:spAutoFit/>
-          </a:bodyPr>
-          <a:lstStyle/>
-          <a:p>
-            <a:pPr algn="l"/>
-            <a:r>
-              <a:rPr sz="1200" b="1" i="0" u="none">
-                <a:solidFill>
-                  <a:srgbClr val="0284C7"/>
-                </a:solidFill>
-                <a:latin typeface="Plus Jakarta Sans"/>
-              </a:rPr>
-              <a:t>LINEAR REGRESSION (BASELINE)</a:t>
-            </a:r>
-          </a:p>
-        </p:txBody>
-      </p:sp>
-      <p:sp>
-        <p:nvSpPr>
-          <p:cNvPr id="23" name="TextBox 22"/>
-          <p:cNvSpPr txBox="1"/>
-          <p:nvPr/>
-        </p:nvSpPr>
-        <p:spPr>
-          <a:xfrm>
-            <a:off x="10925175" y="2709862"/>
-            <a:ext cx="628650" cy="142875"/>
+            <a:off x="8591726" y="2710449"/>
+            <a:ext cx="3028774" cy="249679"/>
           </a:xfrm>
           <a:prstGeom prst="rect">
             <a:avLst/>
@@ -20727,64 +19414,42 @@
           </a:bodyPr>
           <a:lstStyle/>
           <a:p>
-            <a:pPr algn="l"/>
-            <a:r>
-              <a:rPr sz="900" b="1" i="0" u="none">
-                <a:solidFill>
-                  <a:srgbClr val="0369A1"/>
-                </a:solidFill>
-                <a:latin typeface="Plus Jakarta Sans"/>
-              </a:rPr>
-              <a:t>164.17 ms</a:t>
-            </a:r>
-          </a:p>
-        </p:txBody>
-      </p:sp>
-      <p:sp>
-        <p:nvSpPr>
-          <p:cNvPr id="24" name="TextBox 23"/>
+            <a:pPr algn="l">
+              <a:lnSpc>
+                <a:spcPts val="2025"/>
+              </a:lnSpc>
+            </a:pPr>
+            <a:r>
+              <a:rPr sz="1500" b="1" i="0" u="none">
+                <a:solidFill>
+                  <a:srgbClr val="334155"/>
+                </a:solidFill>
+                <a:latin typeface="Plus Jakarta Sans"/>
+              </a:rPr>
+              <a:t>Thương hiệu:</a:t>
+            </a:r>
+            <a:r>
+              <a:rPr sz="1500" b="0" i="0" u="none">
+                <a:solidFill>
+                  <a:srgbClr val="334155"/>
+                </a:solidFill>
+                <a:latin typeface="Plus Jakarta Sans"/>
+              </a:rPr>
+              <a:t> Toyota</a:t>
+            </a:r>
+          </a:p>
+        </p:txBody>
+      </p:sp>
+      <p:sp>
+        <p:nvSpPr>
+          <p:cNvPr id="9" name="TextBox 8"/>
           <p:cNvSpPr txBox="1"/>
           <p:nvPr/>
         </p:nvSpPr>
         <p:spPr>
           <a:xfrm>
-            <a:off x="657225" y="4081462"/>
-            <a:ext cx="1666875" cy="200025"/>
-          </a:xfrm>
-          <a:prstGeom prst="rect">
-            <a:avLst/>
-          </a:prstGeom>
-          <a:noFill/>
-        </p:spPr>
-        <p:txBody>
-          <a:bodyPr wrap="none" lIns="0" tIns="0" rIns="0" bIns="0" anchor="t">
-            <a:spAutoFit/>
-          </a:bodyPr>
-          <a:lstStyle/>
-          <a:p>
-            <a:pPr algn="l"/>
-            <a:r>
-              <a:rPr sz="1200" b="1" i="0" u="none">
-                <a:solidFill>
-                  <a:srgbClr val="475569"/>
-                </a:solidFill>
-                <a:latin typeface="Plus Jakarta Sans"/>
-              </a:rPr>
-              <a:t>RANDOM FOREST</a:t>
-            </a:r>
-          </a:p>
-        </p:txBody>
-      </p:sp>
-      <p:sp>
-        <p:nvSpPr>
-          <p:cNvPr id="25" name="TextBox 24"/>
-          <p:cNvSpPr txBox="1"/>
-          <p:nvPr/>
-        </p:nvSpPr>
-        <p:spPr>
-          <a:xfrm>
-            <a:off x="5219700" y="4110037"/>
-            <a:ext cx="619125" cy="142875"/>
+            <a:off x="8591726" y="2967624"/>
+            <a:ext cx="3028774" cy="249679"/>
           </a:xfrm>
           <a:prstGeom prst="rect">
             <a:avLst/>
@@ -20797,64 +19462,42 @@
           </a:bodyPr>
           <a:lstStyle/>
           <a:p>
-            <a:pPr algn="l"/>
-            <a:r>
-              <a:rPr sz="900" b="1" i="0" u="none">
-                <a:solidFill>
-                  <a:srgbClr val="475569"/>
-                </a:solidFill>
-                <a:latin typeface="Plus Jakarta Sans"/>
-              </a:rPr>
-              <a:t>159.61 ms</a:t>
-            </a:r>
-          </a:p>
-        </p:txBody>
-      </p:sp>
-      <p:sp>
-        <p:nvSpPr>
-          <p:cNvPr id="26" name="TextBox 25"/>
+            <a:pPr algn="l">
+              <a:lnSpc>
+                <a:spcPts val="2025"/>
+              </a:lnSpc>
+            </a:pPr>
+            <a:r>
+              <a:rPr sz="1500" b="1" i="0" u="none">
+                <a:solidFill>
+                  <a:srgbClr val="334155"/>
+                </a:solidFill>
+                <a:latin typeface="Plus Jakarta Sans"/>
+              </a:rPr>
+              <a:t>Dòng xe:</a:t>
+            </a:r>
+            <a:r>
+              <a:rPr sz="1500" b="0" i="0" u="none">
+                <a:solidFill>
+                  <a:srgbClr val="334155"/>
+                </a:solidFill>
+                <a:latin typeface="Plus Jakarta Sans"/>
+              </a:rPr>
+              <a:t> Camry 2.5Q</a:t>
+            </a:r>
+          </a:p>
+        </p:txBody>
+      </p:sp>
+      <p:sp>
+        <p:nvSpPr>
+          <p:cNvPr id="10" name="TextBox 9"/>
           <p:cNvSpPr txBox="1"/>
           <p:nvPr/>
         </p:nvSpPr>
         <p:spPr>
           <a:xfrm>
-            <a:off x="6372225" y="4081462"/>
-            <a:ext cx="1440656" cy="200025"/>
-          </a:xfrm>
-          <a:prstGeom prst="rect">
-            <a:avLst/>
-          </a:prstGeom>
-          <a:noFill/>
-        </p:spPr>
-        <p:txBody>
-          <a:bodyPr wrap="none" lIns="0" tIns="0" rIns="0" bIns="0" anchor="t">
-            <a:spAutoFit/>
-          </a:bodyPr>
-          <a:lstStyle/>
-          <a:p>
-            <a:pPr algn="l"/>
-            <a:r>
-              <a:rPr sz="1200" b="1" i="0" u="none">
-                <a:solidFill>
-                  <a:srgbClr val="475569"/>
-                </a:solidFill>
-                <a:latin typeface="Plus Jakarta Sans"/>
-              </a:rPr>
-              <a:t>DECISION TREE</a:t>
-            </a:r>
-          </a:p>
-        </p:txBody>
-      </p:sp>
-      <p:sp>
-        <p:nvSpPr>
-          <p:cNvPr id="27" name="TextBox 26"/>
-          <p:cNvSpPr txBox="1"/>
-          <p:nvPr/>
-        </p:nvSpPr>
-        <p:spPr>
-          <a:xfrm>
-            <a:off x="10991850" y="4110037"/>
-            <a:ext cx="561975" cy="142875"/>
+            <a:off x="8591726" y="3224799"/>
+            <a:ext cx="3028774" cy="249679"/>
           </a:xfrm>
           <a:prstGeom prst="rect">
             <a:avLst/>
@@ -20867,19 +19510,386 @@
           </a:bodyPr>
           <a:lstStyle/>
           <a:p>
-            <a:pPr algn="l"/>
-            <a:r>
-              <a:rPr sz="900" b="1" i="0" u="none">
-                <a:solidFill>
-                  <a:srgbClr val="475569"/>
-                </a:solidFill>
-                <a:latin typeface="Plus Jakarta Sans"/>
-              </a:rPr>
-              <a:t>17.36 ms</a:t>
-            </a:r>
-          </a:p>
-        </p:txBody>
-      </p:sp>
+            <a:pPr algn="l">
+              <a:lnSpc>
+                <a:spcPts val="2025"/>
+              </a:lnSpc>
+            </a:pPr>
+            <a:r>
+              <a:rPr sz="1500" b="1" i="0" u="none">
+                <a:solidFill>
+                  <a:srgbClr val="334155"/>
+                </a:solidFill>
+                <a:latin typeface="Plus Jakarta Sans"/>
+              </a:rPr>
+              <a:t>Kiểu dáng:</a:t>
+            </a:r>
+            <a:r>
+              <a:rPr sz="1500" b="0" i="0" u="none">
+                <a:solidFill>
+                  <a:srgbClr val="334155"/>
+                </a:solidFill>
+                <a:latin typeface="Plus Jakarta Sans"/>
+              </a:rPr>
+              <a:t> Sedan</a:t>
+            </a:r>
+          </a:p>
+        </p:txBody>
+      </p:sp>
+      <p:sp>
+        <p:nvSpPr>
+          <p:cNvPr id="11" name="TextBox 10"/>
+          <p:cNvSpPr txBox="1"/>
+          <p:nvPr/>
+        </p:nvSpPr>
+        <p:spPr>
+          <a:xfrm>
+            <a:off x="8591726" y="3481974"/>
+            <a:ext cx="3028774" cy="249679"/>
+          </a:xfrm>
+          <a:prstGeom prst="rect">
+            <a:avLst/>
+          </a:prstGeom>
+          <a:noFill/>
+        </p:spPr>
+        <p:txBody>
+          <a:bodyPr wrap="square" lIns="0" tIns="0" rIns="0" bIns="0" anchor="t">
+            <a:spAutoFit/>
+          </a:bodyPr>
+          <a:lstStyle/>
+          <a:p>
+            <a:pPr algn="l">
+              <a:lnSpc>
+                <a:spcPts val="2025"/>
+              </a:lnSpc>
+            </a:pPr>
+            <a:r>
+              <a:rPr sz="1500" b="1" i="0" u="none">
+                <a:solidFill>
+                  <a:srgbClr val="334155"/>
+                </a:solidFill>
+                <a:latin typeface="Plus Jakarta Sans"/>
+              </a:rPr>
+              <a:t>Năm sản xuất:</a:t>
+            </a:r>
+            <a:r>
+              <a:rPr sz="1500" b="0" i="0" u="none">
+                <a:solidFill>
+                  <a:srgbClr val="334155"/>
+                </a:solidFill>
+                <a:latin typeface="Plus Jakarta Sans"/>
+              </a:rPr>
+              <a:t> 2018</a:t>
+            </a:r>
+          </a:p>
+        </p:txBody>
+      </p:sp>
+      <p:sp>
+        <p:nvSpPr>
+          <p:cNvPr id="12" name="TextBox 11"/>
+          <p:cNvSpPr txBox="1"/>
+          <p:nvPr/>
+        </p:nvSpPr>
+        <p:spPr>
+          <a:xfrm>
+            <a:off x="8591726" y="3739149"/>
+            <a:ext cx="3028774" cy="249679"/>
+          </a:xfrm>
+          <a:prstGeom prst="rect">
+            <a:avLst/>
+          </a:prstGeom>
+          <a:noFill/>
+        </p:spPr>
+        <p:txBody>
+          <a:bodyPr wrap="square" lIns="0" tIns="0" rIns="0" bIns="0" anchor="t">
+            <a:spAutoFit/>
+          </a:bodyPr>
+          <a:lstStyle/>
+          <a:p>
+            <a:pPr algn="l">
+              <a:lnSpc>
+                <a:spcPts val="2025"/>
+              </a:lnSpc>
+            </a:pPr>
+            <a:r>
+              <a:rPr sz="1500" b="1" i="0" u="none">
+                <a:solidFill>
+                  <a:srgbClr val="334155"/>
+                </a:solidFill>
+                <a:latin typeface="Plus Jakarta Sans"/>
+              </a:rPr>
+              <a:t>Số km đã đi:</a:t>
+            </a:r>
+            <a:r>
+              <a:rPr sz="1500" b="0" i="0" u="none">
+                <a:solidFill>
+                  <a:srgbClr val="334155"/>
+                </a:solidFill>
+                <a:latin typeface="Plus Jakarta Sans"/>
+              </a:rPr>
+              <a:t> 50.000 km</a:t>
+            </a:r>
+          </a:p>
+        </p:txBody>
+      </p:sp>
+      <p:sp>
+        <p:nvSpPr>
+          <p:cNvPr id="13" name="TextBox 12"/>
+          <p:cNvSpPr txBox="1"/>
+          <p:nvPr/>
+        </p:nvSpPr>
+        <p:spPr>
+          <a:xfrm>
+            <a:off x="8591726" y="3996324"/>
+            <a:ext cx="3028774" cy="249679"/>
+          </a:xfrm>
+          <a:prstGeom prst="rect">
+            <a:avLst/>
+          </a:prstGeom>
+          <a:noFill/>
+        </p:spPr>
+        <p:txBody>
+          <a:bodyPr wrap="square" lIns="0" tIns="0" rIns="0" bIns="0" anchor="t">
+            <a:spAutoFit/>
+          </a:bodyPr>
+          <a:lstStyle/>
+          <a:p>
+            <a:pPr algn="l">
+              <a:lnSpc>
+                <a:spcPts val="2025"/>
+              </a:lnSpc>
+            </a:pPr>
+            <a:r>
+              <a:rPr sz="1500" b="1" i="0" u="none">
+                <a:solidFill>
+                  <a:srgbClr val="334155"/>
+                </a:solidFill>
+                <a:latin typeface="Plus Jakarta Sans"/>
+              </a:rPr>
+              <a:t>Xuất xứ:</a:t>
+            </a:r>
+            <a:r>
+              <a:rPr sz="1500" b="0" i="0" u="none">
+                <a:solidFill>
+                  <a:srgbClr val="334155"/>
+                </a:solidFill>
+                <a:latin typeface="Plus Jakarta Sans"/>
+              </a:rPr>
+              <a:t> Nhập khẩu</a:t>
+            </a:r>
+          </a:p>
+        </p:txBody>
+      </p:sp>
+      <p:sp>
+        <p:nvSpPr>
+          <p:cNvPr id="14" name="TextBox 13"/>
+          <p:cNvSpPr txBox="1"/>
+          <p:nvPr/>
+        </p:nvSpPr>
+        <p:spPr>
+          <a:xfrm>
+            <a:off x="8591726" y="4253499"/>
+            <a:ext cx="3028774" cy="243143"/>
+          </a:xfrm>
+          <a:prstGeom prst="rect">
+            <a:avLst/>
+          </a:prstGeom>
+          <a:noFill/>
+        </p:spPr>
+        <p:txBody>
+          <a:bodyPr wrap="square" lIns="0" tIns="0" rIns="0" bIns="0" anchor="t">
+            <a:spAutoFit/>
+          </a:bodyPr>
+          <a:lstStyle/>
+          <a:p>
+            <a:pPr algn="l">
+              <a:lnSpc>
+                <a:spcPts val="2025"/>
+              </a:lnSpc>
+            </a:pPr>
+            <a:r>
+              <a:rPr sz="1500" b="1" i="0" u="none" dirty="0" err="1">
+                <a:solidFill>
+                  <a:srgbClr val="334155"/>
+                </a:solidFill>
+                <a:latin typeface="Plus Jakarta Sans"/>
+              </a:rPr>
+              <a:t>Nhiên</a:t>
+            </a:r>
+            <a:r>
+              <a:rPr sz="1500" b="1" i="0" u="none" dirty="0">
+                <a:solidFill>
+                  <a:srgbClr val="334155"/>
+                </a:solidFill>
+                <a:latin typeface="Plus Jakarta Sans"/>
+              </a:rPr>
+              <a:t> </a:t>
+            </a:r>
+            <a:r>
+              <a:rPr sz="1500" b="1" i="0" u="none" dirty="0" err="1">
+                <a:solidFill>
+                  <a:srgbClr val="334155"/>
+                </a:solidFill>
+                <a:latin typeface="Plus Jakarta Sans"/>
+              </a:rPr>
+              <a:t>liệu</a:t>
+            </a:r>
+            <a:r>
+              <a:rPr sz="1500" b="1" i="0" u="none" dirty="0">
+                <a:solidFill>
+                  <a:srgbClr val="334155"/>
+                </a:solidFill>
+                <a:latin typeface="Plus Jakarta Sans"/>
+              </a:rPr>
+              <a:t> / </a:t>
+            </a:r>
+            <a:r>
+              <a:rPr sz="1500" b="1" i="0" u="none" dirty="0" err="1">
+                <a:solidFill>
+                  <a:srgbClr val="334155"/>
+                </a:solidFill>
+                <a:latin typeface="Plus Jakarta Sans"/>
+              </a:rPr>
+              <a:t>Hộp</a:t>
+            </a:r>
+            <a:r>
+              <a:rPr sz="1500" b="1" i="0" u="none" dirty="0">
+                <a:solidFill>
+                  <a:srgbClr val="334155"/>
+                </a:solidFill>
+                <a:latin typeface="Plus Jakarta Sans"/>
+              </a:rPr>
+              <a:t> </a:t>
+            </a:r>
+            <a:r>
+              <a:rPr sz="1500" b="1" i="0" u="none" dirty="0" err="1">
+                <a:solidFill>
+                  <a:srgbClr val="334155"/>
+                </a:solidFill>
+                <a:latin typeface="Plus Jakarta Sans"/>
+              </a:rPr>
+              <a:t>số</a:t>
+            </a:r>
+            <a:r>
+              <a:rPr sz="1500" b="1" i="0" u="none" dirty="0">
+                <a:solidFill>
+                  <a:srgbClr val="334155"/>
+                </a:solidFill>
+                <a:latin typeface="Plus Jakarta Sans"/>
+              </a:rPr>
+              <a:t>:</a:t>
+            </a:r>
+            <a:r>
+              <a:rPr sz="1500" b="0" i="0" u="none" dirty="0">
+                <a:solidFill>
+                  <a:srgbClr val="334155"/>
+                </a:solidFill>
+                <a:latin typeface="Plus Jakarta Sans"/>
+              </a:rPr>
+              <a:t> </a:t>
+            </a:r>
+            <a:r>
+              <a:rPr sz="1500" b="0" i="0" u="none" dirty="0" err="1">
+                <a:solidFill>
+                  <a:srgbClr val="334155"/>
+                </a:solidFill>
+                <a:latin typeface="Plus Jakarta Sans"/>
+              </a:rPr>
+              <a:t>Xăng</a:t>
+            </a:r>
+            <a:r>
+              <a:rPr sz="1500" b="0" i="0" u="none" dirty="0">
+                <a:solidFill>
+                  <a:srgbClr val="334155"/>
+                </a:solidFill>
+                <a:latin typeface="Plus Jakarta Sans"/>
+              </a:rPr>
+              <a:t> / </a:t>
+            </a:r>
+            <a:r>
+              <a:rPr sz="1500" b="0" i="0" u="none" dirty="0" err="1">
+                <a:solidFill>
+                  <a:srgbClr val="334155"/>
+                </a:solidFill>
+                <a:latin typeface="Plus Jakarta Sans"/>
+              </a:rPr>
+              <a:t>Số</a:t>
+            </a:r>
+            <a:r>
+              <a:rPr sz="1500" b="0" i="0" u="none" dirty="0">
+                <a:solidFill>
+                  <a:srgbClr val="334155"/>
+                </a:solidFill>
+                <a:latin typeface="Plus Jakarta Sans"/>
+              </a:rPr>
+              <a:t> </a:t>
+            </a:r>
+            <a:r>
+              <a:rPr sz="1500" b="0" i="0" u="none" dirty="0" err="1">
+                <a:solidFill>
+                  <a:srgbClr val="334155"/>
+                </a:solidFill>
+                <a:latin typeface="Plus Jakarta Sans"/>
+              </a:rPr>
+              <a:t>tự</a:t>
+            </a:r>
+            <a:r>
+              <a:rPr sz="1500" b="0" i="0" u="none" dirty="0">
+                <a:solidFill>
+                  <a:srgbClr val="334155"/>
+                </a:solidFill>
+                <a:latin typeface="Plus Jakarta Sans"/>
+              </a:rPr>
+              <a:t> </a:t>
+            </a:r>
+            <a:r>
+              <a:rPr sz="1500" b="0" i="0" u="none" dirty="0" err="1">
+                <a:solidFill>
+                  <a:srgbClr val="334155"/>
+                </a:solidFill>
+                <a:latin typeface="Plus Jakarta Sans"/>
+              </a:rPr>
+              <a:t>động</a:t>
+            </a:r>
+            <a:endParaRPr sz="1500" b="0" i="0" u="none" dirty="0">
+              <a:solidFill>
+                <a:srgbClr val="334155"/>
+              </a:solidFill>
+              <a:latin typeface="Plus Jakarta Sans"/>
+            </a:endParaRPr>
+          </a:p>
+        </p:txBody>
+      </p:sp>
+      <p:pic>
+        <p:nvPicPr>
+          <p:cNvPr id="16" name="Picture 15">
+            <a:extLst>
+              <a:ext uri="{FF2B5EF4-FFF2-40B4-BE49-F238E27FC236}">
+                <a16:creationId xmlns:a16="http://schemas.microsoft.com/office/drawing/2014/main" id="{57695A4F-316F-8971-D8F1-F72A27D4F868}"/>
+              </a:ext>
+            </a:extLst>
+          </p:cNvPr>
+          <p:cNvPicPr>
+            <a:picLocks noChangeAspect="1"/>
+          </p:cNvPicPr>
+          <p:nvPr/>
+        </p:nvPicPr>
+        <p:blipFill>
+          <a:blip r:embed="rId3"/>
+          <a:stretch>
+            <a:fillRect/>
+          </a:stretch>
+        </p:blipFill>
+        <p:spPr>
+          <a:xfrm>
+            <a:off x="457200" y="944835"/>
+            <a:ext cx="7547209" cy="5784497"/>
+          </a:xfrm>
+          <a:prstGeom prst="rect">
+            <a:avLst/>
+          </a:prstGeom>
+        </p:spPr>
+      </p:pic>
     </p:spTree>
   </p:cSld>
   <p:clrMapOvr>
@@ -20921,12 +19931,12 @@
         </p:nvSpPr>
         <p:spPr>
           <a:xfrm>
-            <a:off x="457199" y="1428750"/>
-            <a:ext cx="6257925" cy="2057400"/>
+            <a:off x="457200" y="2481262"/>
+            <a:ext cx="5562600" cy="1247775"/>
           </a:xfrm>
           <a:prstGeom prst="roundRect">
             <a:avLst>
-              <a:gd name="adj" fmla="val 5555"/>
+              <a:gd name="adj" fmla="val 9160"/>
             </a:avLst>
           </a:prstGeom>
           <a:solidFill>
@@ -20934,7 +19944,7 @@
           </a:solidFill>
           <a:ln w="9525">
             <a:solidFill>
-              <a:srgbClr val="99F6E4"/>
+              <a:srgbClr val="0D9488"/>
             </a:solidFill>
           </a:ln>
           <a:effectLst/>
@@ -20958,7 +19968,7 @@
           <a:lstStyle/>
           <a:p>
             <a:pPr algn="ctr"/>
-            <a:endParaRPr sz="1500"/>
+            <a:endParaRPr/>
           </a:p>
         </p:txBody>
       </p:sp>
@@ -20970,12 +19980,12 @@
         </p:nvSpPr>
         <p:spPr>
           <a:xfrm>
-            <a:off x="5981700" y="4000500"/>
-            <a:ext cx="5524500" cy="1457325"/>
+            <a:off x="6172200" y="2481262"/>
+            <a:ext cx="5562600" cy="1247775"/>
           </a:xfrm>
           <a:prstGeom prst="roundRect">
             <a:avLst>
-              <a:gd name="adj" fmla="val 7843"/>
+              <a:gd name="adj" fmla="val 9160"/>
             </a:avLst>
           </a:prstGeom>
           <a:solidFill>
@@ -21007,67 +20017,305 @@
           <a:lstStyle/>
           <a:p>
             <a:pPr algn="ctr"/>
-            <a:endParaRPr sz="1500" dirty="0"/>
-          </a:p>
-        </p:txBody>
-      </p:sp>
-      <p:pic>
-        <p:nvPicPr>
-          <p:cNvPr id="4" name="Picture 3" descr="image.png"/>
-          <p:cNvPicPr>
-            <a:picLocks noChangeAspect="1"/>
-          </p:cNvPicPr>
-          <p:nvPr/>
-        </p:nvPicPr>
-        <p:blipFill>
-          <a:blip r:embed="rId3"/>
-          <a:stretch>
-            <a:fillRect/>
-          </a:stretch>
-        </p:blipFill>
-        <p:spPr>
-          <a:xfrm>
-            <a:off x="657225" y="1666875"/>
-            <a:ext cx="152400" cy="171450"/>
-          </a:xfrm>
-          <a:prstGeom prst="rect">
-            <a:avLst/>
-          </a:prstGeom>
-        </p:spPr>
-      </p:pic>
-      <p:pic>
-        <p:nvPicPr>
-          <p:cNvPr id="5" name="Picture 4" descr="image.png"/>
-          <p:cNvPicPr>
-            <a:picLocks noChangeAspect="1"/>
-          </p:cNvPicPr>
-          <p:nvPr/>
-        </p:nvPicPr>
-        <p:blipFill>
-          <a:blip r:embed="rId4"/>
-          <a:stretch>
-            <a:fillRect/>
-          </a:stretch>
-        </p:blipFill>
-        <p:spPr>
-          <a:xfrm>
-            <a:off x="6181725" y="4238625"/>
-            <a:ext cx="190500" cy="171450"/>
-          </a:xfrm>
-          <a:prstGeom prst="rect">
-            <a:avLst/>
-          </a:prstGeom>
-        </p:spPr>
-      </p:pic>
-      <p:sp>
-        <p:nvSpPr>
-          <p:cNvPr id="6" name="TextBox 5"/>
+            <a:endParaRPr/>
+          </a:p>
+        </p:txBody>
+      </p:sp>
+      <p:sp>
+        <p:nvSpPr>
+          <p:cNvPr id="4" name="Rounded Rectangle 3"/>
+          <p:cNvSpPr/>
+          <p:nvPr/>
+        </p:nvSpPr>
+        <p:spPr>
+          <a:xfrm>
+            <a:off x="457200" y="3881437"/>
+            <a:ext cx="5562600" cy="1247775"/>
+          </a:xfrm>
+          <a:prstGeom prst="roundRect">
+            <a:avLst>
+              <a:gd name="adj" fmla="val 9160"/>
+            </a:avLst>
+          </a:prstGeom>
+          <a:solidFill>
+            <a:srgbClr val="F8FAFC"/>
+          </a:solidFill>
+          <a:ln w="9525">
+            <a:solidFill>
+              <a:srgbClr val="E2E8F0"/>
+            </a:solidFill>
+          </a:ln>
+          <a:effectLst/>
+        </p:spPr>
+        <p:style>
+          <a:lnRef idx="1">
+            <a:schemeClr val="accent1"/>
+          </a:lnRef>
+          <a:fillRef idx="3">
+            <a:schemeClr val="accent1"/>
+          </a:fillRef>
+          <a:effectRef idx="2">
+            <a:schemeClr val="accent1"/>
+          </a:effectRef>
+          <a:fontRef idx="minor">
+            <a:schemeClr val="lt1"/>
+          </a:fontRef>
+        </p:style>
+        <p:txBody>
+          <a:bodyPr rtlCol="0" anchor="ctr"/>
+          <a:lstStyle/>
+          <a:p>
+            <a:pPr algn="ctr"/>
+            <a:endParaRPr/>
+          </a:p>
+        </p:txBody>
+      </p:sp>
+      <p:sp>
+        <p:nvSpPr>
+          <p:cNvPr id="5" name="Rounded Rectangle 4"/>
+          <p:cNvSpPr/>
+          <p:nvPr/>
+        </p:nvSpPr>
+        <p:spPr>
+          <a:xfrm>
+            <a:off x="6172200" y="3881437"/>
+            <a:ext cx="5562600" cy="1247775"/>
+          </a:xfrm>
+          <a:prstGeom prst="roundRect">
+            <a:avLst>
+              <a:gd name="adj" fmla="val 9160"/>
+            </a:avLst>
+          </a:prstGeom>
+          <a:solidFill>
+            <a:srgbClr val="F8FAFC"/>
+          </a:solidFill>
+          <a:ln w="9525">
+            <a:solidFill>
+              <a:srgbClr val="E2E8F0"/>
+            </a:solidFill>
+          </a:ln>
+          <a:effectLst/>
+        </p:spPr>
+        <p:style>
+          <a:lnRef idx="1">
+            <a:schemeClr val="accent1"/>
+          </a:lnRef>
+          <a:fillRef idx="3">
+            <a:schemeClr val="accent1"/>
+          </a:fillRef>
+          <a:effectRef idx="2">
+            <a:schemeClr val="accent1"/>
+          </a:effectRef>
+          <a:fontRef idx="minor">
+            <a:schemeClr val="lt1"/>
+          </a:fontRef>
+        </p:style>
+        <p:txBody>
+          <a:bodyPr rtlCol="0" anchor="ctr"/>
+          <a:lstStyle/>
+          <a:p>
+            <a:pPr algn="ctr"/>
+            <a:endParaRPr/>
+          </a:p>
+        </p:txBody>
+      </p:sp>
+      <p:sp>
+        <p:nvSpPr>
+          <p:cNvPr id="6" name="Rounded Rectangle 5"/>
+          <p:cNvSpPr/>
+          <p:nvPr/>
+        </p:nvSpPr>
+        <p:spPr>
+          <a:xfrm>
+            <a:off x="5191125" y="2690812"/>
+            <a:ext cx="628650" cy="180975"/>
+          </a:xfrm>
+          <a:prstGeom prst="roundRect">
+            <a:avLst>
+              <a:gd name="adj" fmla="val 21052"/>
+            </a:avLst>
+          </a:prstGeom>
+          <a:solidFill>
+            <a:srgbClr val="0D9488"/>
+          </a:solidFill>
+          <a:ln>
+            <a:noFill/>
+          </a:ln>
+          <a:effectLst/>
+        </p:spPr>
+        <p:style>
+          <a:lnRef idx="1">
+            <a:schemeClr val="accent1"/>
+          </a:lnRef>
+          <a:fillRef idx="3">
+            <a:schemeClr val="accent1"/>
+          </a:fillRef>
+          <a:effectRef idx="2">
+            <a:schemeClr val="accent1"/>
+          </a:effectRef>
+          <a:fontRef idx="minor">
+            <a:schemeClr val="lt1"/>
+          </a:fontRef>
+        </p:style>
+        <p:txBody>
+          <a:bodyPr rtlCol="0" anchor="ctr"/>
+          <a:lstStyle/>
+          <a:p>
+            <a:pPr algn="ctr"/>
+            <a:endParaRPr/>
+          </a:p>
+        </p:txBody>
+      </p:sp>
+      <p:sp>
+        <p:nvSpPr>
+          <p:cNvPr id="7" name="Rounded Rectangle 6"/>
+          <p:cNvSpPr/>
+          <p:nvPr/>
+        </p:nvSpPr>
+        <p:spPr>
+          <a:xfrm>
+            <a:off x="10848975" y="2690812"/>
+            <a:ext cx="685800" cy="180975"/>
+          </a:xfrm>
+          <a:prstGeom prst="roundRect">
+            <a:avLst>
+              <a:gd name="adj" fmla="val 21052"/>
+            </a:avLst>
+          </a:prstGeom>
+          <a:solidFill>
+            <a:srgbClr val="E0F2FE"/>
+          </a:solidFill>
+          <a:ln>
+            <a:noFill/>
+          </a:ln>
+          <a:effectLst/>
+        </p:spPr>
+        <p:style>
+          <a:lnRef idx="1">
+            <a:schemeClr val="accent1"/>
+          </a:lnRef>
+          <a:fillRef idx="3">
+            <a:schemeClr val="accent1"/>
+          </a:fillRef>
+          <a:effectRef idx="2">
+            <a:schemeClr val="accent1"/>
+          </a:effectRef>
+          <a:fontRef idx="minor">
+            <a:schemeClr val="lt1"/>
+          </a:fontRef>
+        </p:style>
+        <p:txBody>
+          <a:bodyPr rtlCol="0" anchor="ctr"/>
+          <a:lstStyle/>
+          <a:p>
+            <a:pPr algn="ctr"/>
+            <a:endParaRPr/>
+          </a:p>
+        </p:txBody>
+      </p:sp>
+      <p:sp>
+        <p:nvSpPr>
+          <p:cNvPr id="8" name="Rounded Rectangle 7"/>
+          <p:cNvSpPr/>
+          <p:nvPr/>
+        </p:nvSpPr>
+        <p:spPr>
+          <a:xfrm>
+            <a:off x="5143500" y="4090987"/>
+            <a:ext cx="676275" cy="180975"/>
+          </a:xfrm>
+          <a:prstGeom prst="roundRect">
+            <a:avLst>
+              <a:gd name="adj" fmla="val 21052"/>
+            </a:avLst>
+          </a:prstGeom>
+          <a:solidFill>
+            <a:srgbClr val="F1F5F9"/>
+          </a:solidFill>
+          <a:ln>
+            <a:noFill/>
+          </a:ln>
+          <a:effectLst/>
+        </p:spPr>
+        <p:style>
+          <a:lnRef idx="1">
+            <a:schemeClr val="accent1"/>
+          </a:lnRef>
+          <a:fillRef idx="3">
+            <a:schemeClr val="accent1"/>
+          </a:fillRef>
+          <a:effectRef idx="2">
+            <a:schemeClr val="accent1"/>
+          </a:effectRef>
+          <a:fontRef idx="minor">
+            <a:schemeClr val="lt1"/>
+          </a:fontRef>
+        </p:style>
+        <p:txBody>
+          <a:bodyPr rtlCol="0" anchor="ctr"/>
+          <a:lstStyle/>
+          <a:p>
+            <a:pPr algn="ctr"/>
+            <a:endParaRPr/>
+          </a:p>
+        </p:txBody>
+      </p:sp>
+      <p:sp>
+        <p:nvSpPr>
+          <p:cNvPr id="9" name="Rounded Rectangle 8"/>
+          <p:cNvSpPr/>
+          <p:nvPr/>
+        </p:nvSpPr>
+        <p:spPr>
+          <a:xfrm>
+            <a:off x="10915650" y="4090987"/>
+            <a:ext cx="619125" cy="180975"/>
+          </a:xfrm>
+          <a:prstGeom prst="roundRect">
+            <a:avLst>
+              <a:gd name="adj" fmla="val 21052"/>
+            </a:avLst>
+          </a:prstGeom>
+          <a:solidFill>
+            <a:srgbClr val="F1F5F9"/>
+          </a:solidFill>
+          <a:ln>
+            <a:noFill/>
+          </a:ln>
+          <a:effectLst/>
+        </p:spPr>
+        <p:style>
+          <a:lnRef idx="1">
+            <a:schemeClr val="accent1"/>
+          </a:lnRef>
+          <a:fillRef idx="3">
+            <a:schemeClr val="accent1"/>
+          </a:fillRef>
+          <a:effectRef idx="2">
+            <a:schemeClr val="accent1"/>
+          </a:effectRef>
+          <a:fontRef idx="minor">
+            <a:schemeClr val="lt1"/>
+          </a:fontRef>
+        </p:style>
+        <p:txBody>
+          <a:bodyPr rtlCol="0" anchor="ctr"/>
+          <a:lstStyle/>
+          <a:p>
+            <a:pPr algn="ctr"/>
+            <a:endParaRPr/>
+          </a:p>
+        </p:txBody>
+      </p:sp>
+      <p:sp>
+        <p:nvSpPr>
+          <p:cNvPr id="10" name="TextBox 9"/>
           <p:cNvSpPr txBox="1"/>
           <p:nvPr/>
         </p:nvSpPr>
         <p:spPr>
           <a:xfrm>
-            <a:off x="457200" y="295275"/>
+            <a:off x="457200" y="381000"/>
             <a:ext cx="11734800" cy="171450"/>
           </a:xfrm>
           <a:prstGeom prst="rect">
@@ -21089,21 +20337,21 @@
                 </a:solidFill>
                 <a:latin typeface="Plus Jakarta Sans"/>
               </a:rPr>
-              <a:t>CHƯƠNG 5 — KẾT LUẬN</a:t>
-            </a:r>
-          </a:p>
-        </p:txBody>
-      </p:sp>
-      <p:sp>
-        <p:nvSpPr>
-          <p:cNvPr id="7" name="TextBox 6"/>
+              <a:t>CHƯƠNG 4 — LUỒNG XỬ LÝ &amp; DEMO</a:t>
+            </a:r>
+          </a:p>
+        </p:txBody>
+      </p:sp>
+      <p:sp>
+        <p:nvSpPr>
+          <p:cNvPr id="11" name="TextBox 10"/>
           <p:cNvSpPr txBox="1"/>
           <p:nvPr/>
         </p:nvSpPr>
         <p:spPr>
           <a:xfrm>
             <a:off x="457200" y="609600"/>
-            <a:ext cx="1661993" cy="321178"/>
+            <a:ext cx="11734800" cy="333375"/>
           </a:xfrm>
           <a:prstGeom prst="rect">
             <a:avLst/>
@@ -21122,87 +20370,27 @@
               </a:lnSpc>
             </a:pPr>
             <a:r>
-              <a:rPr sz="2100" b="1" i="0" u="none" dirty="0" err="1">
+              <a:rPr sz="2100" b="1" i="0" u="none">
                 <a:solidFill>
                   <a:srgbClr val="0F172A"/>
                 </a:solidFill>
                 <a:latin typeface="Plus Jakarta Sans"/>
               </a:rPr>
-              <a:t>Kết</a:t>
-            </a:r>
-            <a:r>
-              <a:rPr sz="2100" b="1" i="0" u="none" dirty="0">
-                <a:solidFill>
-                  <a:srgbClr val="0F172A"/>
-                </a:solidFill>
-                <a:latin typeface="Plus Jakarta Sans"/>
-              </a:rPr>
-              <a:t> </a:t>
-            </a:r>
-            <a:r>
-              <a:rPr sz="2100" b="1" i="0" u="none" dirty="0" err="1">
-                <a:solidFill>
-                  <a:srgbClr val="0F172A"/>
-                </a:solidFill>
-                <a:latin typeface="Plus Jakarta Sans"/>
-              </a:rPr>
-              <a:t>luận</a:t>
-            </a:r>
-            <a:r>
-              <a:rPr sz="2100" b="1" i="0" u="none" dirty="0">
-                <a:solidFill>
-                  <a:srgbClr val="0F172A"/>
-                </a:solidFill>
-                <a:latin typeface="Plus Jakarta Sans"/>
-              </a:rPr>
-              <a:t> </a:t>
-            </a:r>
-            <a:r>
-              <a:rPr sz="2100" b="1" i="0" u="none" dirty="0" err="1">
-                <a:solidFill>
-                  <a:srgbClr val="0F172A"/>
-                </a:solidFill>
-                <a:latin typeface="Plus Jakarta Sans"/>
-              </a:rPr>
-              <a:t>Dự</a:t>
-            </a:r>
-            <a:r>
-              <a:rPr sz="2100" b="1" i="0" u="none" dirty="0">
-                <a:solidFill>
-                  <a:srgbClr val="0F172A"/>
-                </a:solidFill>
-                <a:latin typeface="Plus Jakarta Sans"/>
-              </a:rPr>
-              <a:t> </a:t>
-            </a:r>
-            <a:r>
-              <a:rPr sz="2100" b="1" i="0" u="none" dirty="0" err="1">
-                <a:solidFill>
-                  <a:srgbClr val="0F172A"/>
-                </a:solidFill>
-                <a:latin typeface="Plus Jakarta Sans"/>
-              </a:rPr>
-              <a:t>án</a:t>
-            </a:r>
-            <a:endParaRPr sz="2100" b="1" i="0" u="none" dirty="0">
-              <a:solidFill>
-                <a:srgbClr val="0F172A"/>
-              </a:solidFill>
-              <a:latin typeface="Plus Jakarta Sans"/>
-            </a:endParaRPr>
-          </a:p>
-        </p:txBody>
-      </p:sp>
-      <p:sp>
-        <p:nvSpPr>
-          <p:cNvPr id="8" name="TextBox 7"/>
+              <a:t>So sánh Kết quả Dự đoán Thực tế trên Giao diện</a:t>
+            </a:r>
+          </a:p>
+        </p:txBody>
+      </p:sp>
+      <p:sp>
+        <p:nvSpPr>
+          <p:cNvPr id="12" name="TextBox 11"/>
           <p:cNvSpPr txBox="1"/>
           <p:nvPr/>
         </p:nvSpPr>
         <p:spPr>
           <a:xfrm>
-            <a:off x="657225" y="1628775"/>
-            <a:ext cx="1795171" cy="230832"/>
+            <a:off x="657225" y="2957512"/>
+            <a:ext cx="6453187" cy="381000"/>
           </a:xfrm>
           <a:prstGeom prst="rect">
             <a:avLst/>
@@ -21210,34 +20398,34 @@
           <a:noFill/>
         </p:spPr>
         <p:txBody>
-          <a:bodyPr wrap="none" lIns="152400" tIns="0" rIns="0" bIns="0" anchor="t">
+          <a:bodyPr wrap="none" lIns="0" tIns="0" rIns="0" bIns="0" anchor="t">
             <a:spAutoFit/>
           </a:bodyPr>
           <a:lstStyle/>
           <a:p>
             <a:pPr algn="l"/>
             <a:r>
-              <a:rPr sz="1500" b="1" i="0" u="none">
-                <a:solidFill>
-                  <a:srgbClr val="0F766E"/>
-                </a:solidFill>
-                <a:latin typeface="Plus Jakarta Sans"/>
-              </a:rPr>
-              <a:t>Thành tựu Đạt được</a:t>
-            </a:r>
-          </a:p>
-        </p:txBody>
-      </p:sp>
-      <p:sp>
-        <p:nvSpPr>
-          <p:cNvPr id="9" name="TextBox 8"/>
+              <a:rPr sz="2400" b="1" i="0" u="none">
+                <a:solidFill>
+                  <a:srgbClr val="0F172A"/>
+                </a:solidFill>
+                <a:latin typeface="Plus Jakarta Sans"/>
+              </a:rPr>
+              <a:t>872 Triệu VNĐ</a:t>
+            </a:r>
+          </a:p>
+        </p:txBody>
+      </p:sp>
+      <p:sp>
+        <p:nvSpPr>
+          <p:cNvPr id="13" name="TextBox 12"/>
           <p:cNvSpPr txBox="1"/>
           <p:nvPr/>
         </p:nvSpPr>
         <p:spPr>
           <a:xfrm>
-            <a:off x="6181725" y="4200525"/>
-            <a:ext cx="1741054" cy="230832"/>
+            <a:off x="657225" y="3376612"/>
+            <a:ext cx="6453187" cy="152400"/>
           </a:xfrm>
           <a:prstGeom prst="rect">
             <a:avLst/>
@@ -21245,34 +20433,279 @@
           <a:noFill/>
         </p:spPr>
         <p:txBody>
-          <a:bodyPr wrap="none" lIns="190500" tIns="0" rIns="0" bIns="0" anchor="t">
+          <a:bodyPr wrap="none" lIns="0" tIns="0" rIns="0" bIns="0" anchor="t">
             <a:spAutoFit/>
           </a:bodyPr>
           <a:lstStyle/>
           <a:p>
             <a:pPr algn="l"/>
             <a:r>
-              <a:rPr sz="1500" b="1" i="0" u="none">
-                <a:solidFill>
-                  <a:srgbClr val="0284C7"/>
-                </a:solidFill>
-                <a:latin typeface="Plus Jakarta Sans"/>
-              </a:rPr>
-              <a:t>Độ tin cậy Kiến trúc</a:t>
-            </a:r>
-          </a:p>
-        </p:txBody>
-      </p:sp>
-      <p:sp>
-        <p:nvSpPr>
-          <p:cNvPr id="10" name="TextBox 9"/>
+              <a:rPr sz="975" b="0" i="0" u="none">
+                <a:solidFill>
+                  <a:srgbClr val="0F766E"/>
+                </a:solidFill>
+                <a:latin typeface="Plus Jakarta Sans"/>
+              </a:rPr>
+              <a:t>R²: 0.9772 · MAE: 83.3 triệu VNĐ</a:t>
+            </a:r>
+          </a:p>
+        </p:txBody>
+      </p:sp>
+      <p:sp>
+        <p:nvSpPr>
+          <p:cNvPr id="14" name="TextBox 13"/>
           <p:cNvSpPr txBox="1"/>
           <p:nvPr/>
         </p:nvSpPr>
         <p:spPr>
           <a:xfrm>
-            <a:off x="6181725" y="4572000"/>
-            <a:ext cx="5219700" cy="685800"/>
+            <a:off x="6372225" y="2957512"/>
+            <a:ext cx="5819775" cy="381000"/>
+          </a:xfrm>
+          <a:prstGeom prst="rect">
+            <a:avLst/>
+          </a:prstGeom>
+          <a:noFill/>
+        </p:spPr>
+        <p:txBody>
+          <a:bodyPr wrap="none" lIns="0" tIns="0" rIns="0" bIns="0" anchor="t">
+            <a:spAutoFit/>
+          </a:bodyPr>
+          <a:lstStyle/>
+          <a:p>
+            <a:pPr algn="l"/>
+            <a:r>
+              <a:rPr sz="2400" b="1" i="0" u="none">
+                <a:solidFill>
+                  <a:srgbClr val="0F172A"/>
+                </a:solidFill>
+                <a:latin typeface="Plus Jakarta Sans"/>
+              </a:rPr>
+              <a:t>899 Triệu VNĐ</a:t>
+            </a:r>
+          </a:p>
+        </p:txBody>
+      </p:sp>
+      <p:sp>
+        <p:nvSpPr>
+          <p:cNvPr id="15" name="TextBox 14"/>
+          <p:cNvSpPr txBox="1"/>
+          <p:nvPr/>
+        </p:nvSpPr>
+        <p:spPr>
+          <a:xfrm>
+            <a:off x="6372225" y="3376612"/>
+            <a:ext cx="5819775" cy="152400"/>
+          </a:xfrm>
+          <a:prstGeom prst="rect">
+            <a:avLst/>
+          </a:prstGeom>
+          <a:noFill/>
+        </p:spPr>
+        <p:txBody>
+          <a:bodyPr wrap="none" lIns="0" tIns="0" rIns="0" bIns="0" anchor="t">
+            <a:spAutoFit/>
+          </a:bodyPr>
+          <a:lstStyle/>
+          <a:p>
+            <a:pPr algn="l"/>
+            <a:r>
+              <a:rPr sz="975" b="0" i="0" u="none">
+                <a:solidFill>
+                  <a:srgbClr val="64748B"/>
+                </a:solidFill>
+                <a:latin typeface="Plus Jakarta Sans"/>
+              </a:rPr>
+              <a:t>R²: 0.9676 · MAE: 100.18 triệu VNĐ</a:t>
+            </a:r>
+          </a:p>
+        </p:txBody>
+      </p:sp>
+      <p:sp>
+        <p:nvSpPr>
+          <p:cNvPr id="16" name="TextBox 15"/>
+          <p:cNvSpPr txBox="1"/>
+          <p:nvPr/>
+        </p:nvSpPr>
+        <p:spPr>
+          <a:xfrm>
+            <a:off x="657225" y="4357687"/>
+            <a:ext cx="6453187" cy="381000"/>
+          </a:xfrm>
+          <a:prstGeom prst="rect">
+            <a:avLst/>
+          </a:prstGeom>
+          <a:noFill/>
+        </p:spPr>
+        <p:txBody>
+          <a:bodyPr wrap="none" lIns="0" tIns="0" rIns="0" bIns="0" anchor="t">
+            <a:spAutoFit/>
+          </a:bodyPr>
+          <a:lstStyle/>
+          <a:p>
+            <a:pPr algn="l"/>
+            <a:r>
+              <a:rPr sz="2400" b="1" i="0" u="none">
+                <a:solidFill>
+                  <a:srgbClr val="0F172A"/>
+                </a:solidFill>
+                <a:latin typeface="Plus Jakarta Sans"/>
+              </a:rPr>
+              <a:t>747 Triệu VNĐ</a:t>
+            </a:r>
+          </a:p>
+        </p:txBody>
+      </p:sp>
+      <p:sp>
+        <p:nvSpPr>
+          <p:cNvPr id="17" name="TextBox 16"/>
+          <p:cNvSpPr txBox="1"/>
+          <p:nvPr/>
+        </p:nvSpPr>
+        <p:spPr>
+          <a:xfrm>
+            <a:off x="657225" y="4776787"/>
+            <a:ext cx="6453187" cy="152400"/>
+          </a:xfrm>
+          <a:prstGeom prst="rect">
+            <a:avLst/>
+          </a:prstGeom>
+          <a:noFill/>
+        </p:spPr>
+        <p:txBody>
+          <a:bodyPr wrap="none" lIns="0" tIns="0" rIns="0" bIns="0" anchor="t">
+            <a:spAutoFit/>
+          </a:bodyPr>
+          <a:lstStyle/>
+          <a:p>
+            <a:pPr algn="l"/>
+            <a:r>
+              <a:rPr sz="975" b="0" i="0" u="none">
+                <a:solidFill>
+                  <a:srgbClr val="64748B"/>
+                </a:solidFill>
+                <a:latin typeface="Plus Jakarta Sans"/>
+              </a:rPr>
+              <a:t>R²: 0.9429 · MAE: 136.12 triệu VNĐ</a:t>
+            </a:r>
+          </a:p>
+        </p:txBody>
+      </p:sp>
+      <p:sp>
+        <p:nvSpPr>
+          <p:cNvPr id="18" name="TextBox 17"/>
+          <p:cNvSpPr txBox="1"/>
+          <p:nvPr/>
+        </p:nvSpPr>
+        <p:spPr>
+          <a:xfrm>
+            <a:off x="6372225" y="4357687"/>
+            <a:ext cx="5819775" cy="381000"/>
+          </a:xfrm>
+          <a:prstGeom prst="rect">
+            <a:avLst/>
+          </a:prstGeom>
+          <a:noFill/>
+        </p:spPr>
+        <p:txBody>
+          <a:bodyPr wrap="none" lIns="0" tIns="0" rIns="0" bIns="0" anchor="t">
+            <a:spAutoFit/>
+          </a:bodyPr>
+          <a:lstStyle/>
+          <a:p>
+            <a:pPr algn="l"/>
+            <a:r>
+              <a:rPr sz="2400" b="1" i="0" u="none">
+                <a:solidFill>
+                  <a:srgbClr val="0F172A"/>
+                </a:solidFill>
+                <a:latin typeface="Plus Jakarta Sans"/>
+              </a:rPr>
+              <a:t>729 Triệu VNĐ</a:t>
+            </a:r>
+          </a:p>
+        </p:txBody>
+      </p:sp>
+      <p:sp>
+        <p:nvSpPr>
+          <p:cNvPr id="19" name="TextBox 18"/>
+          <p:cNvSpPr txBox="1"/>
+          <p:nvPr/>
+        </p:nvSpPr>
+        <p:spPr>
+          <a:xfrm>
+            <a:off x="6372225" y="4776787"/>
+            <a:ext cx="5819775" cy="152400"/>
+          </a:xfrm>
+          <a:prstGeom prst="rect">
+            <a:avLst/>
+          </a:prstGeom>
+          <a:noFill/>
+        </p:spPr>
+        <p:txBody>
+          <a:bodyPr wrap="none" lIns="0" tIns="0" rIns="0" bIns="0" anchor="t">
+            <a:spAutoFit/>
+          </a:bodyPr>
+          <a:lstStyle/>
+          <a:p>
+            <a:pPr algn="l"/>
+            <a:r>
+              <a:rPr sz="975" b="0" i="0" u="none">
+                <a:solidFill>
+                  <a:srgbClr val="64748B"/>
+                </a:solidFill>
+                <a:latin typeface="Plus Jakarta Sans"/>
+              </a:rPr>
+              <a:t>R²: 0.8980 · MAE: 217.15 triệu VNĐ</a:t>
+            </a:r>
+          </a:p>
+        </p:txBody>
+      </p:sp>
+      <p:sp>
+        <p:nvSpPr>
+          <p:cNvPr id="20" name="TextBox 19"/>
+          <p:cNvSpPr txBox="1"/>
+          <p:nvPr/>
+        </p:nvSpPr>
+        <p:spPr>
+          <a:xfrm>
+            <a:off x="657225" y="2681287"/>
+            <a:ext cx="3667125" cy="200025"/>
+          </a:xfrm>
+          <a:prstGeom prst="rect">
+            <a:avLst/>
+          </a:prstGeom>
+          <a:noFill/>
+        </p:spPr>
+        <p:txBody>
+          <a:bodyPr wrap="none" lIns="0" tIns="0" rIns="0" bIns="0" anchor="t">
+            <a:spAutoFit/>
+          </a:bodyPr>
+          <a:lstStyle/>
+          <a:p>
+            <a:pPr algn="l"/>
+            <a:r>
+              <a:rPr sz="1200" b="1" i="0" u="none">
+                <a:solidFill>
+                  <a:srgbClr val="0F766E"/>
+                </a:solidFill>
+                <a:latin typeface="Plus Jakarta Sans"/>
+              </a:rPr>
+              <a:t>SUPPORT VECTOR REGRESSION (BEST)</a:t>
+            </a:r>
+          </a:p>
+        </p:txBody>
+      </p:sp>
+      <p:sp>
+        <p:nvSpPr>
+          <p:cNvPr id="21" name="TextBox 20"/>
+          <p:cNvSpPr txBox="1"/>
+          <p:nvPr/>
+        </p:nvSpPr>
+        <p:spPr>
+          <a:xfrm>
+            <a:off x="5267325" y="2709862"/>
+            <a:ext cx="571500" cy="142875"/>
           </a:xfrm>
           <a:prstGeom prst="rect">
             <a:avLst/>
@@ -21285,33 +20718,64 @@
           </a:bodyPr>
           <a:lstStyle/>
           <a:p>
-            <a:pPr algn="l">
-              <a:lnSpc>
-                <a:spcPts val="1800"/>
-              </a:lnSpc>
-            </a:pPr>
-            <a:r>
-              <a:rPr sz="1500" b="0" i="0" u="none">
-                <a:solidFill>
-                  <a:srgbClr val="334155"/>
-                </a:solidFill>
-                <a:latin typeface="Plus Jakarta Sans"/>
-              </a:rPr>
-              <a:t>Việc cô lập dịch vụ AI Service qua API giúp hệ thống sẵn sàng mở rộng scale-out, thay thế hoặc nâng cấp mô hình học máy mà không làm ảnh hưởng đến giao diện người dùng.</a:t>
-            </a:r>
-          </a:p>
-        </p:txBody>
-      </p:sp>
-      <p:sp>
-        <p:nvSpPr>
-          <p:cNvPr id="11" name="TextBox 10"/>
+            <a:pPr algn="l"/>
+            <a:r>
+              <a:rPr sz="900" b="1" i="0" u="none">
+                <a:solidFill>
+                  <a:srgbClr val="FFFFFF"/>
+                </a:solidFill>
+                <a:latin typeface="Plus Jakarta Sans"/>
+              </a:rPr>
+              <a:t>21.99 ms</a:t>
+            </a:r>
+          </a:p>
+        </p:txBody>
+      </p:sp>
+      <p:sp>
+        <p:nvSpPr>
+          <p:cNvPr id="22" name="TextBox 21"/>
           <p:cNvSpPr txBox="1"/>
           <p:nvPr/>
         </p:nvSpPr>
         <p:spPr>
           <a:xfrm>
-            <a:off x="657225" y="2000250"/>
-            <a:ext cx="5219700" cy="514350"/>
+            <a:off x="6372225" y="2681287"/>
+            <a:ext cx="3059906" cy="200025"/>
+          </a:xfrm>
+          <a:prstGeom prst="rect">
+            <a:avLst/>
+          </a:prstGeom>
+          <a:noFill/>
+        </p:spPr>
+        <p:txBody>
+          <a:bodyPr wrap="none" lIns="0" tIns="0" rIns="0" bIns="0" anchor="t">
+            <a:spAutoFit/>
+          </a:bodyPr>
+          <a:lstStyle/>
+          <a:p>
+            <a:pPr algn="l"/>
+            <a:r>
+              <a:rPr sz="1200" b="1" i="0" u="none">
+                <a:solidFill>
+                  <a:srgbClr val="0284C7"/>
+                </a:solidFill>
+                <a:latin typeface="Plus Jakarta Sans"/>
+              </a:rPr>
+              <a:t>LINEAR REGRESSION (BASELINE)</a:t>
+            </a:r>
+          </a:p>
+        </p:txBody>
+      </p:sp>
+      <p:sp>
+        <p:nvSpPr>
+          <p:cNvPr id="23" name="TextBox 22"/>
+          <p:cNvSpPr txBox="1"/>
+          <p:nvPr/>
+        </p:nvSpPr>
+        <p:spPr>
+          <a:xfrm>
+            <a:off x="10925175" y="2709862"/>
+            <a:ext cx="628650" cy="142875"/>
           </a:xfrm>
           <a:prstGeom prst="rect">
             <a:avLst/>
@@ -21324,42 +20788,29 @@
           </a:bodyPr>
           <a:lstStyle/>
           <a:p>
-            <a:pPr algn="l">
-              <a:lnSpc>
-                <a:spcPts val="2025"/>
-              </a:lnSpc>
-            </a:pPr>
-            <a:r>
-              <a:rPr sz="1500" b="1" i="0" u="none">
-                <a:solidFill>
-                  <a:srgbClr val="115E59"/>
-                </a:solidFill>
-                <a:latin typeface="Plus Jakarta Sans"/>
-              </a:rPr>
-              <a:t>Chuẩn hóa Pipeline hoàn chỉnh:</a:t>
-            </a:r>
-            <a:r>
-              <a:rPr sz="1500" b="0" i="0" u="none">
-                <a:solidFill>
-                  <a:srgbClr val="115E59"/>
-                </a:solidFill>
-                <a:latin typeface="Plus Jakarta Sans"/>
-              </a:rPr>
-              <a:t> EDA → Tiền xử lý → Train → Model Packaging → Containerization.</a:t>
-            </a:r>
-          </a:p>
-        </p:txBody>
-      </p:sp>
-      <p:sp>
-        <p:nvSpPr>
-          <p:cNvPr id="12" name="TextBox 11"/>
+            <a:pPr algn="l"/>
+            <a:r>
+              <a:rPr sz="900" b="1" i="0" u="none">
+                <a:solidFill>
+                  <a:srgbClr val="0369A1"/>
+                </a:solidFill>
+                <a:latin typeface="Plus Jakarta Sans"/>
+              </a:rPr>
+              <a:t>164.17 ms</a:t>
+            </a:r>
+          </a:p>
+        </p:txBody>
+      </p:sp>
+      <p:sp>
+        <p:nvSpPr>
+          <p:cNvPr id="24" name="TextBox 23"/>
           <p:cNvSpPr txBox="1"/>
           <p:nvPr/>
         </p:nvSpPr>
         <p:spPr>
           <a:xfrm>
-            <a:off x="657225" y="2514600"/>
-            <a:ext cx="5983626" cy="243143"/>
+            <a:off x="657225" y="4081462"/>
+            <a:ext cx="1666875" cy="200025"/>
           </a:xfrm>
           <a:prstGeom prst="rect">
             <a:avLst/>
@@ -21372,213 +20823,29 @@
           </a:bodyPr>
           <a:lstStyle/>
           <a:p>
-            <a:pPr algn="l">
-              <a:lnSpc>
-                <a:spcPts val="2025"/>
-              </a:lnSpc>
-            </a:pPr>
-            <a:r>
-              <a:rPr sz="1500" b="1" i="0" u="none" dirty="0" err="1">
-                <a:solidFill>
-                  <a:srgbClr val="115E59"/>
-                </a:solidFill>
-                <a:latin typeface="Plus Jakarta Sans"/>
-              </a:rPr>
-              <a:t>Mô</a:t>
-            </a:r>
-            <a:r>
-              <a:rPr sz="1500" b="1" i="0" u="none" dirty="0">
-                <a:solidFill>
-                  <a:srgbClr val="115E59"/>
-                </a:solidFill>
-                <a:latin typeface="Plus Jakarta Sans"/>
-              </a:rPr>
-              <a:t> </a:t>
-            </a:r>
-            <a:r>
-              <a:rPr sz="1500" b="1" i="0" u="none" dirty="0" err="1">
-                <a:solidFill>
-                  <a:srgbClr val="115E59"/>
-                </a:solidFill>
-                <a:latin typeface="Plus Jakarta Sans"/>
-              </a:rPr>
-              <a:t>hình</a:t>
-            </a:r>
-            <a:r>
-              <a:rPr sz="1500" b="1" i="0" u="none" dirty="0">
-                <a:solidFill>
-                  <a:srgbClr val="115E59"/>
-                </a:solidFill>
-                <a:latin typeface="Plus Jakarta Sans"/>
-              </a:rPr>
-              <a:t> </a:t>
-            </a:r>
-            <a:r>
-              <a:rPr sz="1500" b="1" i="0" u="none" dirty="0" err="1">
-                <a:solidFill>
-                  <a:srgbClr val="115E59"/>
-                </a:solidFill>
-                <a:latin typeface="Plus Jakarta Sans"/>
-              </a:rPr>
-              <a:t>đạt</a:t>
-            </a:r>
-            <a:r>
-              <a:rPr sz="1500" b="1" i="0" u="none" dirty="0">
-                <a:solidFill>
-                  <a:srgbClr val="115E59"/>
-                </a:solidFill>
-                <a:latin typeface="Plus Jakarta Sans"/>
-              </a:rPr>
-              <a:t> </a:t>
-            </a:r>
-            <a:r>
-              <a:rPr sz="1500" b="1" i="0" u="none" dirty="0" err="1">
-                <a:solidFill>
-                  <a:srgbClr val="115E59"/>
-                </a:solidFill>
-                <a:latin typeface="Plus Jakarta Sans"/>
-              </a:rPr>
-              <a:t>độ</a:t>
-            </a:r>
-            <a:r>
-              <a:rPr sz="1500" b="1" i="0" u="none" dirty="0">
-                <a:solidFill>
-                  <a:srgbClr val="115E59"/>
-                </a:solidFill>
-                <a:latin typeface="Plus Jakarta Sans"/>
-              </a:rPr>
-              <a:t> </a:t>
-            </a:r>
-            <a:r>
-              <a:rPr sz="1500" b="1" i="0" u="none" dirty="0" err="1">
-                <a:solidFill>
-                  <a:srgbClr val="115E59"/>
-                </a:solidFill>
-                <a:latin typeface="Plus Jakarta Sans"/>
-              </a:rPr>
-              <a:t>chính</a:t>
-            </a:r>
-            <a:r>
-              <a:rPr sz="1500" b="1" i="0" u="none" dirty="0">
-                <a:solidFill>
-                  <a:srgbClr val="115E59"/>
-                </a:solidFill>
-                <a:latin typeface="Plus Jakarta Sans"/>
-              </a:rPr>
-              <a:t> </a:t>
-            </a:r>
-            <a:r>
-              <a:rPr sz="1500" b="1" i="0" u="none" dirty="0" err="1">
-                <a:solidFill>
-                  <a:srgbClr val="115E59"/>
-                </a:solidFill>
-                <a:latin typeface="Plus Jakarta Sans"/>
-              </a:rPr>
-              <a:t>xác</a:t>
-            </a:r>
-            <a:r>
-              <a:rPr sz="1500" b="1" i="0" u="none" dirty="0">
-                <a:solidFill>
-                  <a:srgbClr val="115E59"/>
-                </a:solidFill>
-                <a:latin typeface="Plus Jakarta Sans"/>
-              </a:rPr>
-              <a:t> </a:t>
-            </a:r>
-            <a:r>
-              <a:rPr sz="1500" b="1" i="0" u="none" dirty="0" err="1">
-                <a:solidFill>
-                  <a:srgbClr val="115E59"/>
-                </a:solidFill>
-                <a:latin typeface="Plus Jakarta Sans"/>
-              </a:rPr>
-              <a:t>cao</a:t>
-            </a:r>
-            <a:r>
-              <a:rPr sz="1500" b="1" i="0" u="none" dirty="0">
-                <a:solidFill>
-                  <a:srgbClr val="115E59"/>
-                </a:solidFill>
-                <a:latin typeface="Plus Jakarta Sans"/>
-              </a:rPr>
-              <a:t>:</a:t>
-            </a:r>
-            <a:r>
-              <a:rPr sz="1500" b="0" i="0" u="none" dirty="0">
-                <a:solidFill>
-                  <a:srgbClr val="115E59"/>
-                </a:solidFill>
-                <a:latin typeface="Plus Jakarta Sans"/>
-              </a:rPr>
-              <a:t> SVR </a:t>
-            </a:r>
-            <a:r>
-              <a:rPr sz="1500" b="0" i="0" u="none" dirty="0" err="1">
-                <a:solidFill>
-                  <a:srgbClr val="115E59"/>
-                </a:solidFill>
-                <a:latin typeface="Plus Jakarta Sans"/>
-              </a:rPr>
-              <a:t>đạt</a:t>
-            </a:r>
-            <a:r>
-              <a:rPr sz="1500" b="0" i="0" u="none" dirty="0">
-                <a:solidFill>
-                  <a:srgbClr val="115E59"/>
-                </a:solidFill>
-                <a:latin typeface="Plus Jakarta Sans"/>
-              </a:rPr>
-              <a:t> R² = 0.9772 </a:t>
-            </a:r>
-            <a:r>
-              <a:rPr sz="1500" b="0" i="0" u="none" dirty="0" err="1">
-                <a:solidFill>
-                  <a:srgbClr val="115E59"/>
-                </a:solidFill>
-                <a:latin typeface="Plus Jakarta Sans"/>
-              </a:rPr>
-              <a:t>và</a:t>
-            </a:r>
-            <a:r>
-              <a:rPr sz="1500" b="0" i="0" u="none" dirty="0">
-                <a:solidFill>
-                  <a:srgbClr val="115E59"/>
-                </a:solidFill>
-                <a:latin typeface="Plus Jakarta Sans"/>
-              </a:rPr>
-              <a:t> MAE = 83.3 </a:t>
-            </a:r>
-            <a:r>
-              <a:rPr sz="1500" b="0" i="0" u="none" dirty="0" err="1">
-                <a:solidFill>
-                  <a:srgbClr val="115E59"/>
-                </a:solidFill>
-                <a:latin typeface="Plus Jakarta Sans"/>
-              </a:rPr>
-              <a:t>triệu</a:t>
-            </a:r>
-            <a:r>
-              <a:rPr sz="1500" b="0" i="0" u="none" dirty="0">
-                <a:solidFill>
-                  <a:srgbClr val="115E59"/>
-                </a:solidFill>
-                <a:latin typeface="Plus Jakarta Sans"/>
-              </a:rPr>
-              <a:t> VNĐ.</a:t>
-            </a:r>
-          </a:p>
-        </p:txBody>
-      </p:sp>
-      <p:sp>
-        <p:nvSpPr>
-          <p:cNvPr id="13" name="TextBox 12"/>
+            <a:pPr algn="l"/>
+            <a:r>
+              <a:rPr sz="1200" b="1" i="0" u="none">
+                <a:solidFill>
+                  <a:srgbClr val="475569"/>
+                </a:solidFill>
+                <a:latin typeface="Plus Jakarta Sans"/>
+              </a:rPr>
+              <a:t>RANDOM FOREST</a:t>
+            </a:r>
+          </a:p>
+        </p:txBody>
+      </p:sp>
+      <p:sp>
+        <p:nvSpPr>
+          <p:cNvPr id="25" name="TextBox 24"/>
           <p:cNvSpPr txBox="1"/>
           <p:nvPr/>
         </p:nvSpPr>
         <p:spPr>
           <a:xfrm>
-            <a:off x="657225" y="2771775"/>
-            <a:ext cx="5219700" cy="514350"/>
+            <a:off x="5219700" y="4110037"/>
+            <a:ext cx="619125" cy="142875"/>
           </a:xfrm>
           <a:prstGeom prst="rect">
             <a:avLst/>
@@ -21591,28 +20858,85 @@
           </a:bodyPr>
           <a:lstStyle/>
           <a:p>
-            <a:pPr algn="l">
-              <a:lnSpc>
-                <a:spcPts val="2025"/>
-              </a:lnSpc>
-            </a:pPr>
-            <a:r>
-              <a:rPr sz="1500" b="1" i="0" u="none">
-                <a:solidFill>
-                  <a:srgbClr val="115E59"/>
-                </a:solidFill>
-                <a:latin typeface="Plus Jakarta Sans"/>
-              </a:rPr>
-              <a:t>Hệ thống Real-time:</a:t>
-            </a:r>
-            <a:r>
-              <a:rPr sz="1500" b="0" i="0" u="none">
-                <a:solidFill>
-                  <a:srgbClr val="115E59"/>
-                </a:solidFill>
-                <a:latin typeface="Plus Jakarta Sans"/>
-              </a:rPr>
-              <a:t> Phục vụ dự đoán đồng thời từ 4 mô hình trong thời gian thực.</a:t>
+            <a:pPr algn="l"/>
+            <a:r>
+              <a:rPr sz="900" b="1" i="0" u="none">
+                <a:solidFill>
+                  <a:srgbClr val="475569"/>
+                </a:solidFill>
+                <a:latin typeface="Plus Jakarta Sans"/>
+              </a:rPr>
+              <a:t>159.61 ms</a:t>
+            </a:r>
+          </a:p>
+        </p:txBody>
+      </p:sp>
+      <p:sp>
+        <p:nvSpPr>
+          <p:cNvPr id="26" name="TextBox 25"/>
+          <p:cNvSpPr txBox="1"/>
+          <p:nvPr/>
+        </p:nvSpPr>
+        <p:spPr>
+          <a:xfrm>
+            <a:off x="6372225" y="4081462"/>
+            <a:ext cx="1440656" cy="200025"/>
+          </a:xfrm>
+          <a:prstGeom prst="rect">
+            <a:avLst/>
+          </a:prstGeom>
+          <a:noFill/>
+        </p:spPr>
+        <p:txBody>
+          <a:bodyPr wrap="none" lIns="0" tIns="0" rIns="0" bIns="0" anchor="t">
+            <a:spAutoFit/>
+          </a:bodyPr>
+          <a:lstStyle/>
+          <a:p>
+            <a:pPr algn="l"/>
+            <a:r>
+              <a:rPr sz="1200" b="1" i="0" u="none">
+                <a:solidFill>
+                  <a:srgbClr val="475569"/>
+                </a:solidFill>
+                <a:latin typeface="Plus Jakarta Sans"/>
+              </a:rPr>
+              <a:t>DECISION TREE</a:t>
+            </a:r>
+          </a:p>
+        </p:txBody>
+      </p:sp>
+      <p:sp>
+        <p:nvSpPr>
+          <p:cNvPr id="27" name="TextBox 26"/>
+          <p:cNvSpPr txBox="1"/>
+          <p:nvPr/>
+        </p:nvSpPr>
+        <p:spPr>
+          <a:xfrm>
+            <a:off x="10991850" y="4110037"/>
+            <a:ext cx="561975" cy="142875"/>
+          </a:xfrm>
+          <a:prstGeom prst="rect">
+            <a:avLst/>
+          </a:prstGeom>
+          <a:noFill/>
+        </p:spPr>
+        <p:txBody>
+          <a:bodyPr wrap="square" lIns="0" tIns="0" rIns="0" bIns="0" anchor="t">
+            <a:spAutoFit/>
+          </a:bodyPr>
+          <a:lstStyle/>
+          <a:p>
+            <a:pPr algn="l"/>
+            <a:r>
+              <a:rPr sz="900" b="1" i="0" u="none">
+                <a:solidFill>
+                  <a:srgbClr val="475569"/>
+                </a:solidFill>
+                <a:latin typeface="Plus Jakarta Sans"/>
+              </a:rPr>
+              <a:t>17.36 ms</a:t>
             </a:r>
           </a:p>
         </p:txBody>
@@ -21658,6 +20982,743 @@
         </p:nvSpPr>
         <p:spPr>
           <a:xfrm>
+            <a:off x="457199" y="1428750"/>
+            <a:ext cx="6257925" cy="2057400"/>
+          </a:xfrm>
+          <a:prstGeom prst="roundRect">
+            <a:avLst>
+              <a:gd name="adj" fmla="val 5555"/>
+            </a:avLst>
+          </a:prstGeom>
+          <a:solidFill>
+            <a:srgbClr val="F0FDFA"/>
+          </a:solidFill>
+          <a:ln w="9525">
+            <a:solidFill>
+              <a:srgbClr val="99F6E4"/>
+            </a:solidFill>
+          </a:ln>
+          <a:effectLst/>
+        </p:spPr>
+        <p:style>
+          <a:lnRef idx="1">
+            <a:schemeClr val="accent1"/>
+          </a:lnRef>
+          <a:fillRef idx="3">
+            <a:schemeClr val="accent1"/>
+          </a:fillRef>
+          <a:effectRef idx="2">
+            <a:schemeClr val="accent1"/>
+          </a:effectRef>
+          <a:fontRef idx="minor">
+            <a:schemeClr val="lt1"/>
+          </a:fontRef>
+        </p:style>
+        <p:txBody>
+          <a:bodyPr rtlCol="0" anchor="ctr"/>
+          <a:lstStyle/>
+          <a:p>
+            <a:pPr algn="ctr"/>
+            <a:endParaRPr sz="1500"/>
+          </a:p>
+        </p:txBody>
+      </p:sp>
+      <p:sp>
+        <p:nvSpPr>
+          <p:cNvPr id="3" name="Rounded Rectangle 2"/>
+          <p:cNvSpPr/>
+          <p:nvPr/>
+        </p:nvSpPr>
+        <p:spPr>
+          <a:xfrm>
+            <a:off x="5981700" y="4000500"/>
+            <a:ext cx="5524500" cy="1457325"/>
+          </a:xfrm>
+          <a:prstGeom prst="roundRect">
+            <a:avLst>
+              <a:gd name="adj" fmla="val 7843"/>
+            </a:avLst>
+          </a:prstGeom>
+          <a:solidFill>
+            <a:srgbClr val="F8FAFC"/>
+          </a:solidFill>
+          <a:ln w="9525">
+            <a:solidFill>
+              <a:srgbClr val="E2E8F0"/>
+            </a:solidFill>
+          </a:ln>
+          <a:effectLst/>
+        </p:spPr>
+        <p:style>
+          <a:lnRef idx="1">
+            <a:schemeClr val="accent1"/>
+          </a:lnRef>
+          <a:fillRef idx="3">
+            <a:schemeClr val="accent1"/>
+          </a:fillRef>
+          <a:effectRef idx="2">
+            <a:schemeClr val="accent1"/>
+          </a:effectRef>
+          <a:fontRef idx="minor">
+            <a:schemeClr val="lt1"/>
+          </a:fontRef>
+        </p:style>
+        <p:txBody>
+          <a:bodyPr rtlCol="0" anchor="ctr"/>
+          <a:lstStyle/>
+          <a:p>
+            <a:pPr algn="ctr"/>
+            <a:endParaRPr sz="1500" dirty="0"/>
+          </a:p>
+        </p:txBody>
+      </p:sp>
+      <p:pic>
+        <p:nvPicPr>
+          <p:cNvPr id="4" name="Picture 3" descr="image.png"/>
+          <p:cNvPicPr>
+            <a:picLocks noChangeAspect="1"/>
+          </p:cNvPicPr>
+          <p:nvPr/>
+        </p:nvPicPr>
+        <p:blipFill>
+          <a:blip r:embed="rId3"/>
+          <a:stretch>
+            <a:fillRect/>
+          </a:stretch>
+        </p:blipFill>
+        <p:spPr>
+          <a:xfrm>
+            <a:off x="657225" y="1666875"/>
+            <a:ext cx="152400" cy="171450"/>
+          </a:xfrm>
+          <a:prstGeom prst="rect">
+            <a:avLst/>
+          </a:prstGeom>
+        </p:spPr>
+      </p:pic>
+      <p:pic>
+        <p:nvPicPr>
+          <p:cNvPr id="5" name="Picture 4" descr="image.png"/>
+          <p:cNvPicPr>
+            <a:picLocks noChangeAspect="1"/>
+          </p:cNvPicPr>
+          <p:nvPr/>
+        </p:nvPicPr>
+        <p:blipFill>
+          <a:blip r:embed="rId4"/>
+          <a:stretch>
+            <a:fillRect/>
+          </a:stretch>
+        </p:blipFill>
+        <p:spPr>
+          <a:xfrm>
+            <a:off x="6181725" y="4238625"/>
+            <a:ext cx="190500" cy="171450"/>
+          </a:xfrm>
+          <a:prstGeom prst="rect">
+            <a:avLst/>
+          </a:prstGeom>
+        </p:spPr>
+      </p:pic>
+      <p:sp>
+        <p:nvSpPr>
+          <p:cNvPr id="6" name="TextBox 5"/>
+          <p:cNvSpPr txBox="1"/>
+          <p:nvPr/>
+        </p:nvSpPr>
+        <p:spPr>
+          <a:xfrm>
+            <a:off x="457200" y="295275"/>
+            <a:ext cx="11734800" cy="171450"/>
+          </a:xfrm>
+          <a:prstGeom prst="rect">
+            <a:avLst/>
+          </a:prstGeom>
+          <a:noFill/>
+        </p:spPr>
+        <p:txBody>
+          <a:bodyPr wrap="none" lIns="0" tIns="0" rIns="0" bIns="0" anchor="t">
+            <a:spAutoFit/>
+          </a:bodyPr>
+          <a:lstStyle/>
+          <a:p>
+            <a:pPr algn="l"/>
+            <a:r>
+              <a:rPr sz="1050" b="1" i="0" u="none">
+                <a:solidFill>
+                  <a:srgbClr val="0D9488"/>
+                </a:solidFill>
+                <a:latin typeface="Plus Jakarta Sans"/>
+              </a:rPr>
+              <a:t>CHƯƠNG 5 — KẾT LUẬN</a:t>
+            </a:r>
+          </a:p>
+        </p:txBody>
+      </p:sp>
+      <p:sp>
+        <p:nvSpPr>
+          <p:cNvPr id="7" name="TextBox 6"/>
+          <p:cNvSpPr txBox="1"/>
+          <p:nvPr/>
+        </p:nvSpPr>
+        <p:spPr>
+          <a:xfrm>
+            <a:off x="457200" y="609600"/>
+            <a:ext cx="1661993" cy="321178"/>
+          </a:xfrm>
+          <a:prstGeom prst="rect">
+            <a:avLst/>
+          </a:prstGeom>
+          <a:noFill/>
+        </p:spPr>
+        <p:txBody>
+          <a:bodyPr wrap="none" lIns="0" tIns="0" rIns="0" bIns="0" anchor="t">
+            <a:spAutoFit/>
+          </a:bodyPr>
+          <a:lstStyle/>
+          <a:p>
+            <a:pPr algn="l">
+              <a:lnSpc>
+                <a:spcPts val="2625"/>
+              </a:lnSpc>
+            </a:pPr>
+            <a:r>
+              <a:rPr sz="2100" b="1" i="0" u="none" dirty="0" err="1">
+                <a:solidFill>
+                  <a:srgbClr val="0F172A"/>
+                </a:solidFill>
+                <a:latin typeface="Plus Jakarta Sans"/>
+              </a:rPr>
+              <a:t>Kết</a:t>
+            </a:r>
+            <a:r>
+              <a:rPr sz="2100" b="1" i="0" u="none" dirty="0">
+                <a:solidFill>
+                  <a:srgbClr val="0F172A"/>
+                </a:solidFill>
+                <a:latin typeface="Plus Jakarta Sans"/>
+              </a:rPr>
+              <a:t> </a:t>
+            </a:r>
+            <a:r>
+              <a:rPr sz="2100" b="1" i="0" u="none" dirty="0" err="1">
+                <a:solidFill>
+                  <a:srgbClr val="0F172A"/>
+                </a:solidFill>
+                <a:latin typeface="Plus Jakarta Sans"/>
+              </a:rPr>
+              <a:t>luận</a:t>
+            </a:r>
+            <a:r>
+              <a:rPr sz="2100" b="1" i="0" u="none" dirty="0">
+                <a:solidFill>
+                  <a:srgbClr val="0F172A"/>
+                </a:solidFill>
+                <a:latin typeface="Plus Jakarta Sans"/>
+              </a:rPr>
+              <a:t> </a:t>
+            </a:r>
+            <a:r>
+              <a:rPr sz="2100" b="1" i="0" u="none" dirty="0" err="1">
+                <a:solidFill>
+                  <a:srgbClr val="0F172A"/>
+                </a:solidFill>
+                <a:latin typeface="Plus Jakarta Sans"/>
+              </a:rPr>
+              <a:t>Dự</a:t>
+            </a:r>
+            <a:r>
+              <a:rPr sz="2100" b="1" i="0" u="none" dirty="0">
+                <a:solidFill>
+                  <a:srgbClr val="0F172A"/>
+                </a:solidFill>
+                <a:latin typeface="Plus Jakarta Sans"/>
+              </a:rPr>
+              <a:t> </a:t>
+            </a:r>
+            <a:r>
+              <a:rPr sz="2100" b="1" i="0" u="none" dirty="0" err="1">
+                <a:solidFill>
+                  <a:srgbClr val="0F172A"/>
+                </a:solidFill>
+                <a:latin typeface="Plus Jakarta Sans"/>
+              </a:rPr>
+              <a:t>án</a:t>
+            </a:r>
+            <a:endParaRPr sz="2100" b="1" i="0" u="none" dirty="0">
+              <a:solidFill>
+                <a:srgbClr val="0F172A"/>
+              </a:solidFill>
+              <a:latin typeface="Plus Jakarta Sans"/>
+            </a:endParaRPr>
+          </a:p>
+        </p:txBody>
+      </p:sp>
+      <p:sp>
+        <p:nvSpPr>
+          <p:cNvPr id="8" name="TextBox 7"/>
+          <p:cNvSpPr txBox="1"/>
+          <p:nvPr/>
+        </p:nvSpPr>
+        <p:spPr>
+          <a:xfrm>
+            <a:off x="657225" y="1628775"/>
+            <a:ext cx="1795171" cy="230832"/>
+          </a:xfrm>
+          <a:prstGeom prst="rect">
+            <a:avLst/>
+          </a:prstGeom>
+          <a:noFill/>
+        </p:spPr>
+        <p:txBody>
+          <a:bodyPr wrap="none" lIns="152400" tIns="0" rIns="0" bIns="0" anchor="t">
+            <a:spAutoFit/>
+          </a:bodyPr>
+          <a:lstStyle/>
+          <a:p>
+            <a:pPr algn="l"/>
+            <a:r>
+              <a:rPr sz="1500" b="1" i="0" u="none">
+                <a:solidFill>
+                  <a:srgbClr val="0F766E"/>
+                </a:solidFill>
+                <a:latin typeface="Plus Jakarta Sans"/>
+              </a:rPr>
+              <a:t>Thành tựu Đạt được</a:t>
+            </a:r>
+          </a:p>
+        </p:txBody>
+      </p:sp>
+      <p:sp>
+        <p:nvSpPr>
+          <p:cNvPr id="9" name="TextBox 8"/>
+          <p:cNvSpPr txBox="1"/>
+          <p:nvPr/>
+        </p:nvSpPr>
+        <p:spPr>
+          <a:xfrm>
+            <a:off x="6181725" y="4200525"/>
+            <a:ext cx="1741054" cy="230832"/>
+          </a:xfrm>
+          <a:prstGeom prst="rect">
+            <a:avLst/>
+          </a:prstGeom>
+          <a:noFill/>
+        </p:spPr>
+        <p:txBody>
+          <a:bodyPr wrap="none" lIns="190500" tIns="0" rIns="0" bIns="0" anchor="t">
+            <a:spAutoFit/>
+          </a:bodyPr>
+          <a:lstStyle/>
+          <a:p>
+            <a:pPr algn="l"/>
+            <a:r>
+              <a:rPr sz="1500" b="1" i="0" u="none">
+                <a:solidFill>
+                  <a:srgbClr val="0284C7"/>
+                </a:solidFill>
+                <a:latin typeface="Plus Jakarta Sans"/>
+              </a:rPr>
+              <a:t>Độ tin cậy Kiến trúc</a:t>
+            </a:r>
+          </a:p>
+        </p:txBody>
+      </p:sp>
+      <p:sp>
+        <p:nvSpPr>
+          <p:cNvPr id="10" name="TextBox 9"/>
+          <p:cNvSpPr txBox="1"/>
+          <p:nvPr/>
+        </p:nvSpPr>
+        <p:spPr>
+          <a:xfrm>
+            <a:off x="6181725" y="4572000"/>
+            <a:ext cx="5219700" cy="685800"/>
+          </a:xfrm>
+          <a:prstGeom prst="rect">
+            <a:avLst/>
+          </a:prstGeom>
+          <a:noFill/>
+        </p:spPr>
+        <p:txBody>
+          <a:bodyPr wrap="square" lIns="0" tIns="0" rIns="0" bIns="0" anchor="t">
+            <a:spAutoFit/>
+          </a:bodyPr>
+          <a:lstStyle/>
+          <a:p>
+            <a:pPr algn="l">
+              <a:lnSpc>
+                <a:spcPts val="1800"/>
+              </a:lnSpc>
+            </a:pPr>
+            <a:r>
+              <a:rPr sz="1500" b="0" i="0" u="none">
+                <a:solidFill>
+                  <a:srgbClr val="334155"/>
+                </a:solidFill>
+                <a:latin typeface="Plus Jakarta Sans"/>
+              </a:rPr>
+              <a:t>Việc cô lập dịch vụ AI Service qua API giúp hệ thống sẵn sàng mở rộng scale-out, thay thế hoặc nâng cấp mô hình học máy mà không làm ảnh hưởng đến giao diện người dùng.</a:t>
+            </a:r>
+          </a:p>
+        </p:txBody>
+      </p:sp>
+      <p:sp>
+        <p:nvSpPr>
+          <p:cNvPr id="11" name="TextBox 10"/>
+          <p:cNvSpPr txBox="1"/>
+          <p:nvPr/>
+        </p:nvSpPr>
+        <p:spPr>
+          <a:xfrm>
+            <a:off x="657225" y="2000250"/>
+            <a:ext cx="5219700" cy="514350"/>
+          </a:xfrm>
+          <a:prstGeom prst="rect">
+            <a:avLst/>
+          </a:prstGeom>
+          <a:noFill/>
+        </p:spPr>
+        <p:txBody>
+          <a:bodyPr wrap="square" lIns="0" tIns="0" rIns="0" bIns="0" anchor="t">
+            <a:spAutoFit/>
+          </a:bodyPr>
+          <a:lstStyle/>
+          <a:p>
+            <a:pPr algn="l">
+              <a:lnSpc>
+                <a:spcPts val="2025"/>
+              </a:lnSpc>
+            </a:pPr>
+            <a:r>
+              <a:rPr sz="1500" b="1" i="0" u="none">
+                <a:solidFill>
+                  <a:srgbClr val="115E59"/>
+                </a:solidFill>
+                <a:latin typeface="Plus Jakarta Sans"/>
+              </a:rPr>
+              <a:t>Chuẩn hóa Pipeline hoàn chỉnh:</a:t>
+            </a:r>
+            <a:r>
+              <a:rPr sz="1500" b="0" i="0" u="none">
+                <a:solidFill>
+                  <a:srgbClr val="115E59"/>
+                </a:solidFill>
+                <a:latin typeface="Plus Jakarta Sans"/>
+              </a:rPr>
+              <a:t> EDA → Tiền xử lý → Train → Model Packaging → Containerization.</a:t>
+            </a:r>
+          </a:p>
+        </p:txBody>
+      </p:sp>
+      <p:sp>
+        <p:nvSpPr>
+          <p:cNvPr id="12" name="TextBox 11"/>
+          <p:cNvSpPr txBox="1"/>
+          <p:nvPr/>
+        </p:nvSpPr>
+        <p:spPr>
+          <a:xfrm>
+            <a:off x="657225" y="2514600"/>
+            <a:ext cx="5983626" cy="243143"/>
+          </a:xfrm>
+          <a:prstGeom prst="rect">
+            <a:avLst/>
+          </a:prstGeom>
+          <a:noFill/>
+        </p:spPr>
+        <p:txBody>
+          <a:bodyPr wrap="none" lIns="0" tIns="0" rIns="0" bIns="0" anchor="t">
+            <a:spAutoFit/>
+          </a:bodyPr>
+          <a:lstStyle/>
+          <a:p>
+            <a:pPr algn="l">
+              <a:lnSpc>
+                <a:spcPts val="2025"/>
+              </a:lnSpc>
+            </a:pPr>
+            <a:r>
+              <a:rPr sz="1500" b="1" i="0" u="none" dirty="0" err="1">
+                <a:solidFill>
+                  <a:srgbClr val="115E59"/>
+                </a:solidFill>
+                <a:latin typeface="Plus Jakarta Sans"/>
+              </a:rPr>
+              <a:t>Mô</a:t>
+            </a:r>
+            <a:r>
+              <a:rPr sz="1500" b="1" i="0" u="none" dirty="0">
+                <a:solidFill>
+                  <a:srgbClr val="115E59"/>
+                </a:solidFill>
+                <a:latin typeface="Plus Jakarta Sans"/>
+              </a:rPr>
+              <a:t> </a:t>
+            </a:r>
+            <a:r>
+              <a:rPr sz="1500" b="1" i="0" u="none" dirty="0" err="1">
+                <a:solidFill>
+                  <a:srgbClr val="115E59"/>
+                </a:solidFill>
+                <a:latin typeface="Plus Jakarta Sans"/>
+              </a:rPr>
+              <a:t>hình</a:t>
+            </a:r>
+            <a:r>
+              <a:rPr sz="1500" b="1" i="0" u="none" dirty="0">
+                <a:solidFill>
+                  <a:srgbClr val="115E59"/>
+                </a:solidFill>
+                <a:latin typeface="Plus Jakarta Sans"/>
+              </a:rPr>
+              <a:t> </a:t>
+            </a:r>
+            <a:r>
+              <a:rPr sz="1500" b="1" i="0" u="none" dirty="0" err="1">
+                <a:solidFill>
+                  <a:srgbClr val="115E59"/>
+                </a:solidFill>
+                <a:latin typeface="Plus Jakarta Sans"/>
+              </a:rPr>
+              <a:t>đạt</a:t>
+            </a:r>
+            <a:r>
+              <a:rPr sz="1500" b="1" i="0" u="none" dirty="0">
+                <a:solidFill>
+                  <a:srgbClr val="115E59"/>
+                </a:solidFill>
+                <a:latin typeface="Plus Jakarta Sans"/>
+              </a:rPr>
+              <a:t> </a:t>
+            </a:r>
+            <a:r>
+              <a:rPr sz="1500" b="1" i="0" u="none" dirty="0" err="1">
+                <a:solidFill>
+                  <a:srgbClr val="115E59"/>
+                </a:solidFill>
+                <a:latin typeface="Plus Jakarta Sans"/>
+              </a:rPr>
+              <a:t>độ</a:t>
+            </a:r>
+            <a:r>
+              <a:rPr sz="1500" b="1" i="0" u="none" dirty="0">
+                <a:solidFill>
+                  <a:srgbClr val="115E59"/>
+                </a:solidFill>
+                <a:latin typeface="Plus Jakarta Sans"/>
+              </a:rPr>
+              <a:t> </a:t>
+            </a:r>
+            <a:r>
+              <a:rPr sz="1500" b="1" i="0" u="none" dirty="0" err="1">
+                <a:solidFill>
+                  <a:srgbClr val="115E59"/>
+                </a:solidFill>
+                <a:latin typeface="Plus Jakarta Sans"/>
+              </a:rPr>
+              <a:t>chính</a:t>
+            </a:r>
+            <a:r>
+              <a:rPr sz="1500" b="1" i="0" u="none" dirty="0">
+                <a:solidFill>
+                  <a:srgbClr val="115E59"/>
+                </a:solidFill>
+                <a:latin typeface="Plus Jakarta Sans"/>
+              </a:rPr>
+              <a:t> </a:t>
+            </a:r>
+            <a:r>
+              <a:rPr sz="1500" b="1" i="0" u="none" dirty="0" err="1">
+                <a:solidFill>
+                  <a:srgbClr val="115E59"/>
+                </a:solidFill>
+                <a:latin typeface="Plus Jakarta Sans"/>
+              </a:rPr>
+              <a:t>xác</a:t>
+            </a:r>
+            <a:r>
+              <a:rPr sz="1500" b="1" i="0" u="none" dirty="0">
+                <a:solidFill>
+                  <a:srgbClr val="115E59"/>
+                </a:solidFill>
+                <a:latin typeface="Plus Jakarta Sans"/>
+              </a:rPr>
+              <a:t> </a:t>
+            </a:r>
+            <a:r>
+              <a:rPr sz="1500" b="1" i="0" u="none" dirty="0" err="1">
+                <a:solidFill>
+                  <a:srgbClr val="115E59"/>
+                </a:solidFill>
+                <a:latin typeface="Plus Jakarta Sans"/>
+              </a:rPr>
+              <a:t>cao</a:t>
+            </a:r>
+            <a:r>
+              <a:rPr sz="1500" b="1" i="0" u="none" dirty="0">
+                <a:solidFill>
+                  <a:srgbClr val="115E59"/>
+                </a:solidFill>
+                <a:latin typeface="Plus Jakarta Sans"/>
+              </a:rPr>
+              <a:t>:</a:t>
+            </a:r>
+            <a:r>
+              <a:rPr sz="1500" b="0" i="0" u="none" dirty="0">
+                <a:solidFill>
+                  <a:srgbClr val="115E59"/>
+                </a:solidFill>
+                <a:latin typeface="Plus Jakarta Sans"/>
+              </a:rPr>
+              <a:t> SVR </a:t>
+            </a:r>
+            <a:r>
+              <a:rPr sz="1500" b="0" i="0" u="none" dirty="0" err="1">
+                <a:solidFill>
+                  <a:srgbClr val="115E59"/>
+                </a:solidFill>
+                <a:latin typeface="Plus Jakarta Sans"/>
+              </a:rPr>
+              <a:t>đạt</a:t>
+            </a:r>
+            <a:r>
+              <a:rPr sz="1500" b="0" i="0" u="none" dirty="0">
+                <a:solidFill>
+                  <a:srgbClr val="115E59"/>
+                </a:solidFill>
+                <a:latin typeface="Plus Jakarta Sans"/>
+              </a:rPr>
+              <a:t> R² = 0.9772 </a:t>
+            </a:r>
+            <a:r>
+              <a:rPr sz="1500" b="0" i="0" u="none" dirty="0" err="1">
+                <a:solidFill>
+                  <a:srgbClr val="115E59"/>
+                </a:solidFill>
+                <a:latin typeface="Plus Jakarta Sans"/>
+              </a:rPr>
+              <a:t>và</a:t>
+            </a:r>
+            <a:r>
+              <a:rPr sz="1500" b="0" i="0" u="none" dirty="0">
+                <a:solidFill>
+                  <a:srgbClr val="115E59"/>
+                </a:solidFill>
+                <a:latin typeface="Plus Jakarta Sans"/>
+              </a:rPr>
+              <a:t> MAE = 83.3 </a:t>
+            </a:r>
+            <a:r>
+              <a:rPr sz="1500" b="0" i="0" u="none" dirty="0" err="1">
+                <a:solidFill>
+                  <a:srgbClr val="115E59"/>
+                </a:solidFill>
+                <a:latin typeface="Plus Jakarta Sans"/>
+              </a:rPr>
+              <a:t>triệu</a:t>
+            </a:r>
+            <a:r>
+              <a:rPr sz="1500" b="0" i="0" u="none" dirty="0">
+                <a:solidFill>
+                  <a:srgbClr val="115E59"/>
+                </a:solidFill>
+                <a:latin typeface="Plus Jakarta Sans"/>
+              </a:rPr>
+              <a:t> VNĐ.</a:t>
+            </a:r>
+          </a:p>
+        </p:txBody>
+      </p:sp>
+      <p:sp>
+        <p:nvSpPr>
+          <p:cNvPr id="13" name="TextBox 12"/>
+          <p:cNvSpPr txBox="1"/>
+          <p:nvPr/>
+        </p:nvSpPr>
+        <p:spPr>
+          <a:xfrm>
+            <a:off x="657225" y="2771775"/>
+            <a:ext cx="5219700" cy="514350"/>
+          </a:xfrm>
+          <a:prstGeom prst="rect">
+            <a:avLst/>
+          </a:prstGeom>
+          <a:noFill/>
+        </p:spPr>
+        <p:txBody>
+          <a:bodyPr wrap="square" lIns="0" tIns="0" rIns="0" bIns="0" anchor="t">
+            <a:spAutoFit/>
+          </a:bodyPr>
+          <a:lstStyle/>
+          <a:p>
+            <a:pPr algn="l">
+              <a:lnSpc>
+                <a:spcPts val="2025"/>
+              </a:lnSpc>
+            </a:pPr>
+            <a:r>
+              <a:rPr sz="1500" b="1" i="0" u="none">
+                <a:solidFill>
+                  <a:srgbClr val="115E59"/>
+                </a:solidFill>
+                <a:latin typeface="Plus Jakarta Sans"/>
+              </a:rPr>
+              <a:t>Hệ thống Real-time:</a:t>
+            </a:r>
+            <a:r>
+              <a:rPr sz="1500" b="0" i="0" u="none">
+                <a:solidFill>
+                  <a:srgbClr val="115E59"/>
+                </a:solidFill>
+                <a:latin typeface="Plus Jakarta Sans"/>
+              </a:rPr>
+              <a:t> Phục vụ dự đoán đồng thời từ 4 mô hình trong thời gian thực.</a:t>
+            </a:r>
+          </a:p>
+        </p:txBody>
+      </p:sp>
+    </p:spTree>
+  </p:cSld>
+  <p:clrMapOvr>
+    <a:masterClrMapping/>
+  </p:clrMapOvr>
+</p:sld>
+</file>
+
+<file path=ppt/slides/slide25.xml><?xml version="1.0" encoding="utf-8"?>
+<p:sld xmlns:a="http://schemas.openxmlformats.org/drawingml/2006/main" xmlns:r="http://schemas.openxmlformats.org/officeDocument/2006/relationships" xmlns:p="http://schemas.openxmlformats.org/presentationml/2006/main">
+  <p:cSld>
+    <p:bg>
+      <p:bgPr>
+        <a:solidFill>
+          <a:srgbClr val="FFFFFF"/>
+        </a:solidFill>
+        <a:effectLst/>
+      </p:bgPr>
+    </p:bg>
+    <p:spTree>
+      <p:nvGrpSpPr>
+        <p:cNvPr id="1" name=""/>
+        <p:cNvGrpSpPr/>
+        <p:nvPr/>
+      </p:nvGrpSpPr>
+      <p:grpSpPr>
+        <a:xfrm>
+          <a:off x="0" y="0"/>
+          <a:ext cx="0" cy="0"/>
+          <a:chOff x="0" y="0"/>
+          <a:chExt cx="0" cy="0"/>
+        </a:xfrm>
+      </p:grpSpPr>
+      <p:sp>
+        <p:nvSpPr>
+          <p:cNvPr id="2" name="Rounded Rectangle 1"/>
+          <p:cNvSpPr/>
+          <p:nvPr/>
+        </p:nvSpPr>
+        <p:spPr>
+          <a:xfrm>
             <a:off x="457200" y="1133475"/>
             <a:ext cx="5058667" cy="5343525"/>
           </a:xfrm>
@@ -22626,7 +22687,7 @@
 </p:sld>
 </file>
 
-<file path=ppt/slides/slide25.xml><?xml version="1.0" encoding="utf-8"?>
+<file path=ppt/slides/slide26.xml><?xml version="1.0" encoding="utf-8"?>
 <p:sld xmlns:a="http://schemas.openxmlformats.org/drawingml/2006/main" xmlns:r="http://schemas.openxmlformats.org/officeDocument/2006/relationships" xmlns:p="http://schemas.openxmlformats.org/presentationml/2006/main">
   <p:cSld>
     <p:bg>
